--- a/JAMS/PPT/Figs_1차후_플랫폼용_한글.pptx
+++ b/JAMS/PPT/Figs_1차후_플랫폼용_한글.pptx
@@ -199,7 +199,7 @@
           <a:p>
             <a:fld id="{56139E07-0DC5-4FB2-8EFC-9339BB5A38A7}" type="datetimeFigureOut">
               <a:rPr lang="ko-KR" altLang="en-US" smtClean="0"/>
-              <a:t>2025-07-15</a:t>
+              <a:t>2025-07-17</a:t>
             </a:fld>
             <a:endParaRPr lang="ko-KR" altLang="en-US"/>
           </a:p>
@@ -613,7 +613,7 @@
           <a:p>
             <a:fld id="{08D45E2C-F65D-4824-8008-5941D4E99895}" type="datetimeFigureOut">
               <a:rPr lang="ko-KR" altLang="en-US" smtClean="0"/>
-              <a:t>2025-07-15</a:t>
+              <a:t>2025-07-17</a:t>
             </a:fld>
             <a:endParaRPr lang="ko-KR" altLang="en-US"/>
           </a:p>
@@ -811,7 +811,7 @@
           <a:p>
             <a:fld id="{08D45E2C-F65D-4824-8008-5941D4E99895}" type="datetimeFigureOut">
               <a:rPr lang="ko-KR" altLang="en-US" smtClean="0"/>
-              <a:t>2025-07-15</a:t>
+              <a:t>2025-07-17</a:t>
             </a:fld>
             <a:endParaRPr lang="ko-KR" altLang="en-US"/>
           </a:p>
@@ -1019,7 +1019,7 @@
           <a:p>
             <a:fld id="{08D45E2C-F65D-4824-8008-5941D4E99895}" type="datetimeFigureOut">
               <a:rPr lang="ko-KR" altLang="en-US" smtClean="0"/>
-              <a:t>2025-07-15</a:t>
+              <a:t>2025-07-17</a:t>
             </a:fld>
             <a:endParaRPr lang="ko-KR" altLang="en-US"/>
           </a:p>
@@ -1217,7 +1217,7 @@
           <a:p>
             <a:fld id="{08D45E2C-F65D-4824-8008-5941D4E99895}" type="datetimeFigureOut">
               <a:rPr lang="ko-KR" altLang="en-US" smtClean="0"/>
-              <a:t>2025-07-15</a:t>
+              <a:t>2025-07-17</a:t>
             </a:fld>
             <a:endParaRPr lang="ko-KR" altLang="en-US"/>
           </a:p>
@@ -1492,7 +1492,7 @@
           <a:p>
             <a:fld id="{08D45E2C-F65D-4824-8008-5941D4E99895}" type="datetimeFigureOut">
               <a:rPr lang="ko-KR" altLang="en-US" smtClean="0"/>
-              <a:t>2025-07-15</a:t>
+              <a:t>2025-07-17</a:t>
             </a:fld>
             <a:endParaRPr lang="ko-KR" altLang="en-US"/>
           </a:p>
@@ -1757,7 +1757,7 @@
           <a:p>
             <a:fld id="{08D45E2C-F65D-4824-8008-5941D4E99895}" type="datetimeFigureOut">
               <a:rPr lang="ko-KR" altLang="en-US" smtClean="0"/>
-              <a:t>2025-07-15</a:t>
+              <a:t>2025-07-17</a:t>
             </a:fld>
             <a:endParaRPr lang="ko-KR" altLang="en-US"/>
           </a:p>
@@ -2169,7 +2169,7 @@
           <a:p>
             <a:fld id="{08D45E2C-F65D-4824-8008-5941D4E99895}" type="datetimeFigureOut">
               <a:rPr lang="ko-KR" altLang="en-US" smtClean="0"/>
-              <a:t>2025-07-15</a:t>
+              <a:t>2025-07-17</a:t>
             </a:fld>
             <a:endParaRPr lang="ko-KR" altLang="en-US"/>
           </a:p>
@@ -2310,7 +2310,7 @@
           <a:p>
             <a:fld id="{08D45E2C-F65D-4824-8008-5941D4E99895}" type="datetimeFigureOut">
               <a:rPr lang="ko-KR" altLang="en-US" smtClean="0"/>
-              <a:t>2025-07-15</a:t>
+              <a:t>2025-07-17</a:t>
             </a:fld>
             <a:endParaRPr lang="ko-KR" altLang="en-US"/>
           </a:p>
@@ -2423,7 +2423,7 @@
           <a:p>
             <a:fld id="{08D45E2C-F65D-4824-8008-5941D4E99895}" type="datetimeFigureOut">
               <a:rPr lang="ko-KR" altLang="en-US" smtClean="0"/>
-              <a:t>2025-07-15</a:t>
+              <a:t>2025-07-17</a:t>
             </a:fld>
             <a:endParaRPr lang="ko-KR" altLang="en-US"/>
           </a:p>
@@ -2734,7 +2734,7 @@
           <a:p>
             <a:fld id="{08D45E2C-F65D-4824-8008-5941D4E99895}" type="datetimeFigureOut">
               <a:rPr lang="ko-KR" altLang="en-US" smtClean="0"/>
-              <a:t>2025-07-15</a:t>
+              <a:t>2025-07-17</a:t>
             </a:fld>
             <a:endParaRPr lang="ko-KR" altLang="en-US"/>
           </a:p>
@@ -3022,7 +3022,7 @@
           <a:p>
             <a:fld id="{08D45E2C-F65D-4824-8008-5941D4E99895}" type="datetimeFigureOut">
               <a:rPr lang="ko-KR" altLang="en-US" smtClean="0"/>
-              <a:t>2025-07-15</a:t>
+              <a:t>2025-07-17</a:t>
             </a:fld>
             <a:endParaRPr lang="ko-KR" altLang="en-US"/>
           </a:p>
@@ -3263,7 +3263,7 @@
           <a:p>
             <a:fld id="{08D45E2C-F65D-4824-8008-5941D4E99895}" type="datetimeFigureOut">
               <a:rPr lang="ko-KR" altLang="en-US" smtClean="0"/>
-              <a:t>2025-07-15</a:t>
+              <a:t>2025-07-17</a:t>
             </a:fld>
             <a:endParaRPr lang="ko-KR" altLang="en-US"/>
           </a:p>
@@ -3778,10 +3778,10 @@
       </p:grpSpPr>
       <p:pic>
         <p:nvPicPr>
-          <p:cNvPr id="5" name="그림 4">
-            <a:extLst>
-              <a:ext uri="{FF2B5EF4-FFF2-40B4-BE49-F238E27FC236}">
-                <a16:creationId xmlns:a16="http://schemas.microsoft.com/office/drawing/2014/main" id="{3211E6FC-B379-CAC9-784B-D721CCACA9CA}"/>
+          <p:cNvPr id="3" name="그림 2">
+            <a:extLst>
+              <a:ext uri="{FF2B5EF4-FFF2-40B4-BE49-F238E27FC236}">
+                <a16:creationId xmlns:a16="http://schemas.microsoft.com/office/drawing/2014/main" id="{34DEEFA5-5FF8-145F-5FB2-7435106F92B2}"/>
               </a:ext>
             </a:extLst>
           </p:cNvPr>
@@ -3798,20 +3798,2115 @@
         </p:blipFill>
         <p:spPr>
           <a:xfrm>
-            <a:off x="0" y="-1371606"/>
-            <a:ext cx="4579910" cy="425456"/>
+            <a:off x="0" y="230275"/>
+            <a:ext cx="12192000" cy="6397450"/>
           </a:xfrm>
           <a:prstGeom prst="rect">
             <a:avLst/>
           </a:prstGeom>
         </p:spPr>
       </p:pic>
+      <p:sp>
+        <p:nvSpPr>
+          <p:cNvPr id="7" name="직사각형 6">
+            <a:extLst>
+              <a:ext uri="{FF2B5EF4-FFF2-40B4-BE49-F238E27FC236}">
+                <a16:creationId xmlns:a16="http://schemas.microsoft.com/office/drawing/2014/main" id="{06DC0279-F7AB-64B3-069E-2B9E17C0E185}"/>
+              </a:ext>
+            </a:extLst>
+          </p:cNvPr>
+          <p:cNvSpPr/>
+          <p:nvPr/>
+        </p:nvSpPr>
+        <p:spPr>
+          <a:xfrm>
+            <a:off x="674954" y="4147078"/>
+            <a:ext cx="10717226" cy="2604242"/>
+          </a:xfrm>
+          <a:prstGeom prst="rect">
+            <a:avLst/>
+          </a:prstGeom>
+          <a:solidFill>
+            <a:schemeClr val="bg1"/>
+          </a:solidFill>
+          <a:ln>
+            <a:noFill/>
+          </a:ln>
+        </p:spPr>
+        <p:style>
+          <a:lnRef idx="2">
+            <a:schemeClr val="accent1">
+              <a:shade val="15000"/>
+            </a:schemeClr>
+          </a:lnRef>
+          <a:fillRef idx="1">
+            <a:schemeClr val="accent1"/>
+          </a:fillRef>
+          <a:effectRef idx="0">
+            <a:schemeClr val="accent1"/>
+          </a:effectRef>
+          <a:fontRef idx="minor">
+            <a:schemeClr val="lt1"/>
+          </a:fontRef>
+        </p:style>
+        <p:txBody>
+          <a:bodyPr rtlCol="0" anchor="ctr"/>
+          <a:lstStyle/>
+          <a:p>
+            <a:pPr algn="ctr"/>
+            <a:endParaRPr lang="ko-KR" altLang="en-US"/>
+          </a:p>
+        </p:txBody>
+      </p:sp>
+      <p:sp>
+        <p:nvSpPr>
+          <p:cNvPr id="2" name="직사각형 1">
+            <a:extLst>
+              <a:ext uri="{FF2B5EF4-FFF2-40B4-BE49-F238E27FC236}">
+                <a16:creationId xmlns:a16="http://schemas.microsoft.com/office/drawing/2014/main" id="{9216B4D2-8FB7-04E4-0952-1F5E51C8B145}"/>
+              </a:ext>
+            </a:extLst>
+          </p:cNvPr>
+          <p:cNvSpPr/>
+          <p:nvPr/>
+        </p:nvSpPr>
+        <p:spPr>
+          <a:xfrm>
+            <a:off x="767510" y="4168156"/>
+            <a:ext cx="311544" cy="914400"/>
+          </a:xfrm>
+          <a:prstGeom prst="rect">
+            <a:avLst/>
+          </a:prstGeom>
+          <a:solidFill>
+            <a:schemeClr val="bg1"/>
+          </a:solidFill>
+          <a:ln>
+            <a:noFill/>
+          </a:ln>
+        </p:spPr>
+        <p:style>
+          <a:lnRef idx="2">
+            <a:schemeClr val="accent1">
+              <a:shade val="15000"/>
+            </a:schemeClr>
+          </a:lnRef>
+          <a:fillRef idx="1">
+            <a:schemeClr val="accent1"/>
+          </a:fillRef>
+          <a:effectRef idx="0">
+            <a:schemeClr val="accent1"/>
+          </a:effectRef>
+          <a:fontRef idx="minor">
+            <a:schemeClr val="lt1"/>
+          </a:fontRef>
+        </p:style>
+        <p:txBody>
+          <a:bodyPr rtlCol="0" anchor="ctr"/>
+          <a:lstStyle/>
+          <a:p>
+            <a:pPr algn="ctr"/>
+            <a:r>
+              <a:rPr lang="ko-KR" altLang="en-US" dirty="0">
+                <a:solidFill>
+                  <a:schemeClr val="tx1"/>
+                </a:solidFill>
+              </a:rPr>
+              <a:t>화</a:t>
+            </a:r>
+            <a:endParaRPr lang="en-US" altLang="ko-KR" dirty="0">
+              <a:solidFill>
+                <a:schemeClr val="tx1"/>
+              </a:solidFill>
+            </a:endParaRPr>
+          </a:p>
+          <a:p>
+            <a:pPr algn="ctr"/>
+            <a:r>
+              <a:rPr lang="ko-KR" altLang="en-US" dirty="0">
+                <a:solidFill>
+                  <a:schemeClr val="tx1"/>
+                </a:solidFill>
+              </a:rPr>
+              <a:t>성</a:t>
+            </a:r>
+            <a:endParaRPr lang="en-US" altLang="ko-KR" dirty="0">
+              <a:solidFill>
+                <a:schemeClr val="tx1"/>
+              </a:solidFill>
+            </a:endParaRPr>
+          </a:p>
+          <a:p>
+            <a:pPr algn="ctr"/>
+            <a:r>
+              <a:rPr lang="ko-KR" altLang="en-US" dirty="0">
+                <a:solidFill>
+                  <a:schemeClr val="tx1"/>
+                </a:solidFill>
+              </a:rPr>
+              <a:t>시</a:t>
+            </a:r>
+          </a:p>
+        </p:txBody>
+      </p:sp>
+      <p:sp>
+        <p:nvSpPr>
+          <p:cNvPr id="8" name="직사각형 7">
+            <a:extLst>
+              <a:ext uri="{FF2B5EF4-FFF2-40B4-BE49-F238E27FC236}">
+                <a16:creationId xmlns:a16="http://schemas.microsoft.com/office/drawing/2014/main" id="{1456A6A9-C0F7-9875-8CFB-786AA5E42F21}"/>
+              </a:ext>
+            </a:extLst>
+          </p:cNvPr>
+          <p:cNvSpPr/>
+          <p:nvPr/>
+        </p:nvSpPr>
+        <p:spPr>
+          <a:xfrm>
+            <a:off x="1106813" y="4168156"/>
+            <a:ext cx="311544" cy="914400"/>
+          </a:xfrm>
+          <a:prstGeom prst="rect">
+            <a:avLst/>
+          </a:prstGeom>
+          <a:solidFill>
+            <a:schemeClr val="bg1"/>
+          </a:solidFill>
+          <a:ln>
+            <a:noFill/>
+          </a:ln>
+        </p:spPr>
+        <p:style>
+          <a:lnRef idx="2">
+            <a:schemeClr val="accent1">
+              <a:shade val="15000"/>
+            </a:schemeClr>
+          </a:lnRef>
+          <a:fillRef idx="1">
+            <a:schemeClr val="accent1"/>
+          </a:fillRef>
+          <a:effectRef idx="0">
+            <a:schemeClr val="accent1"/>
+          </a:effectRef>
+          <a:fontRef idx="minor">
+            <a:schemeClr val="lt1"/>
+          </a:fontRef>
+        </p:style>
+        <p:txBody>
+          <a:bodyPr rtlCol="0" anchor="ctr"/>
+          <a:lstStyle/>
+          <a:p>
+            <a:pPr algn="ctr"/>
+            <a:r>
+              <a:rPr lang="ko-KR" altLang="en-US" dirty="0">
+                <a:solidFill>
+                  <a:schemeClr val="tx1"/>
+                </a:solidFill>
+              </a:rPr>
+              <a:t>평택시</a:t>
+            </a:r>
+          </a:p>
+        </p:txBody>
+      </p:sp>
+      <p:sp>
+        <p:nvSpPr>
+          <p:cNvPr id="9" name="직사각형 8">
+            <a:extLst>
+              <a:ext uri="{FF2B5EF4-FFF2-40B4-BE49-F238E27FC236}">
+                <a16:creationId xmlns:a16="http://schemas.microsoft.com/office/drawing/2014/main" id="{E5A2525E-393C-772F-7C8C-659A1C40E318}"/>
+              </a:ext>
+            </a:extLst>
+          </p:cNvPr>
+          <p:cNvSpPr/>
+          <p:nvPr/>
+        </p:nvSpPr>
+        <p:spPr>
+          <a:xfrm>
+            <a:off x="1446116" y="4168156"/>
+            <a:ext cx="311544" cy="914400"/>
+          </a:xfrm>
+          <a:prstGeom prst="rect">
+            <a:avLst/>
+          </a:prstGeom>
+          <a:solidFill>
+            <a:schemeClr val="bg1"/>
+          </a:solidFill>
+          <a:ln>
+            <a:noFill/>
+          </a:ln>
+        </p:spPr>
+        <p:style>
+          <a:lnRef idx="2">
+            <a:schemeClr val="accent1">
+              <a:shade val="15000"/>
+            </a:schemeClr>
+          </a:lnRef>
+          <a:fillRef idx="1">
+            <a:schemeClr val="accent1"/>
+          </a:fillRef>
+          <a:effectRef idx="0">
+            <a:schemeClr val="accent1"/>
+          </a:effectRef>
+          <a:fontRef idx="minor">
+            <a:schemeClr val="lt1"/>
+          </a:fontRef>
+        </p:style>
+        <p:txBody>
+          <a:bodyPr rtlCol="0" anchor="ctr"/>
+          <a:lstStyle/>
+          <a:p>
+            <a:pPr algn="ctr"/>
+            <a:r>
+              <a:rPr lang="ko-KR" altLang="en-US" dirty="0">
+                <a:solidFill>
+                  <a:schemeClr val="tx1"/>
+                </a:solidFill>
+              </a:rPr>
+              <a:t>파주시</a:t>
+            </a:r>
+          </a:p>
+        </p:txBody>
+      </p:sp>
+      <p:sp>
+        <p:nvSpPr>
+          <p:cNvPr id="10" name="직사각형 9">
+            <a:extLst>
+              <a:ext uri="{FF2B5EF4-FFF2-40B4-BE49-F238E27FC236}">
+                <a16:creationId xmlns:a16="http://schemas.microsoft.com/office/drawing/2014/main" id="{E85E50B6-768E-9FB1-9E76-CA250CF23CB8}"/>
+              </a:ext>
+            </a:extLst>
+          </p:cNvPr>
+          <p:cNvSpPr/>
+          <p:nvPr/>
+        </p:nvSpPr>
+        <p:spPr>
+          <a:xfrm>
+            <a:off x="1785419" y="4168156"/>
+            <a:ext cx="311544" cy="914400"/>
+          </a:xfrm>
+          <a:prstGeom prst="rect">
+            <a:avLst/>
+          </a:prstGeom>
+          <a:solidFill>
+            <a:schemeClr val="bg1"/>
+          </a:solidFill>
+          <a:ln>
+            <a:noFill/>
+          </a:ln>
+        </p:spPr>
+        <p:style>
+          <a:lnRef idx="2">
+            <a:schemeClr val="accent1">
+              <a:shade val="15000"/>
+            </a:schemeClr>
+          </a:lnRef>
+          <a:fillRef idx="1">
+            <a:schemeClr val="accent1"/>
+          </a:fillRef>
+          <a:effectRef idx="0">
+            <a:schemeClr val="accent1"/>
+          </a:effectRef>
+          <a:fontRef idx="minor">
+            <a:schemeClr val="lt1"/>
+          </a:fontRef>
+        </p:style>
+        <p:txBody>
+          <a:bodyPr rtlCol="0" anchor="ctr"/>
+          <a:lstStyle/>
+          <a:p>
+            <a:pPr algn="ctr"/>
+            <a:r>
+              <a:rPr lang="ko-KR" altLang="en-US" dirty="0">
+                <a:solidFill>
+                  <a:schemeClr val="tx1"/>
+                </a:solidFill>
+              </a:rPr>
+              <a:t>여주시</a:t>
+            </a:r>
+          </a:p>
+        </p:txBody>
+      </p:sp>
+      <p:sp>
+        <p:nvSpPr>
+          <p:cNvPr id="11" name="직사각형 10">
+            <a:extLst>
+              <a:ext uri="{FF2B5EF4-FFF2-40B4-BE49-F238E27FC236}">
+                <a16:creationId xmlns:a16="http://schemas.microsoft.com/office/drawing/2014/main" id="{71E1C45E-F8FD-D74A-AD51-C475841FBFB5}"/>
+              </a:ext>
+            </a:extLst>
+          </p:cNvPr>
+          <p:cNvSpPr/>
+          <p:nvPr/>
+        </p:nvSpPr>
+        <p:spPr>
+          <a:xfrm>
+            <a:off x="2124722" y="4168156"/>
+            <a:ext cx="311544" cy="914400"/>
+          </a:xfrm>
+          <a:prstGeom prst="rect">
+            <a:avLst/>
+          </a:prstGeom>
+          <a:solidFill>
+            <a:schemeClr val="bg1"/>
+          </a:solidFill>
+          <a:ln>
+            <a:noFill/>
+          </a:ln>
+        </p:spPr>
+        <p:style>
+          <a:lnRef idx="2">
+            <a:schemeClr val="accent1">
+              <a:shade val="15000"/>
+            </a:schemeClr>
+          </a:lnRef>
+          <a:fillRef idx="1">
+            <a:schemeClr val="accent1"/>
+          </a:fillRef>
+          <a:effectRef idx="0">
+            <a:schemeClr val="accent1"/>
+          </a:effectRef>
+          <a:fontRef idx="minor">
+            <a:schemeClr val="lt1"/>
+          </a:fontRef>
+        </p:style>
+        <p:txBody>
+          <a:bodyPr rtlCol="0" anchor="ctr"/>
+          <a:lstStyle/>
+          <a:p>
+            <a:pPr algn="ctr"/>
+            <a:r>
+              <a:rPr lang="ko-KR" altLang="en-US" dirty="0">
+                <a:solidFill>
+                  <a:schemeClr val="tx1"/>
+                </a:solidFill>
+              </a:rPr>
+              <a:t>이천시</a:t>
+            </a:r>
+          </a:p>
+        </p:txBody>
+      </p:sp>
+      <p:sp>
+        <p:nvSpPr>
+          <p:cNvPr id="12" name="직사각형 11">
+            <a:extLst>
+              <a:ext uri="{FF2B5EF4-FFF2-40B4-BE49-F238E27FC236}">
+                <a16:creationId xmlns:a16="http://schemas.microsoft.com/office/drawing/2014/main" id="{57B11DB0-78F7-23F6-6B36-1DE20D534F24}"/>
+              </a:ext>
+            </a:extLst>
+          </p:cNvPr>
+          <p:cNvSpPr/>
+          <p:nvPr/>
+        </p:nvSpPr>
+        <p:spPr>
+          <a:xfrm>
+            <a:off x="2464025" y="4168156"/>
+            <a:ext cx="311544" cy="914400"/>
+          </a:xfrm>
+          <a:prstGeom prst="rect">
+            <a:avLst/>
+          </a:prstGeom>
+          <a:solidFill>
+            <a:schemeClr val="bg1"/>
+          </a:solidFill>
+          <a:ln>
+            <a:noFill/>
+          </a:ln>
+        </p:spPr>
+        <p:style>
+          <a:lnRef idx="2">
+            <a:schemeClr val="accent1">
+              <a:shade val="15000"/>
+            </a:schemeClr>
+          </a:lnRef>
+          <a:fillRef idx="1">
+            <a:schemeClr val="accent1"/>
+          </a:fillRef>
+          <a:effectRef idx="0">
+            <a:schemeClr val="accent1"/>
+          </a:effectRef>
+          <a:fontRef idx="minor">
+            <a:schemeClr val="lt1"/>
+          </a:fontRef>
+        </p:style>
+        <p:txBody>
+          <a:bodyPr rtlCol="0" anchor="ctr"/>
+          <a:lstStyle/>
+          <a:p>
+            <a:pPr algn="ctr"/>
+            <a:r>
+              <a:rPr lang="ko-KR" altLang="en-US" dirty="0">
+                <a:solidFill>
+                  <a:schemeClr val="tx1"/>
+                </a:solidFill>
+              </a:rPr>
+              <a:t>안성시</a:t>
+            </a:r>
+            <a:endParaRPr lang="en-US" altLang="ko-KR" dirty="0">
+              <a:solidFill>
+                <a:schemeClr val="tx1"/>
+              </a:solidFill>
+            </a:endParaRPr>
+          </a:p>
+        </p:txBody>
+      </p:sp>
+      <p:sp>
+        <p:nvSpPr>
+          <p:cNvPr id="13" name="직사각형 12">
+            <a:extLst>
+              <a:ext uri="{FF2B5EF4-FFF2-40B4-BE49-F238E27FC236}">
+                <a16:creationId xmlns:a16="http://schemas.microsoft.com/office/drawing/2014/main" id="{C8BD056F-70B3-B4CA-6F2C-4221543F053B}"/>
+              </a:ext>
+            </a:extLst>
+          </p:cNvPr>
+          <p:cNvSpPr/>
+          <p:nvPr/>
+        </p:nvSpPr>
+        <p:spPr>
+          <a:xfrm>
+            <a:off x="2803328" y="4168156"/>
+            <a:ext cx="311544" cy="914400"/>
+          </a:xfrm>
+          <a:prstGeom prst="rect">
+            <a:avLst/>
+          </a:prstGeom>
+          <a:solidFill>
+            <a:schemeClr val="bg1"/>
+          </a:solidFill>
+          <a:ln>
+            <a:noFill/>
+          </a:ln>
+        </p:spPr>
+        <p:style>
+          <a:lnRef idx="2">
+            <a:schemeClr val="accent1">
+              <a:shade val="15000"/>
+            </a:schemeClr>
+          </a:lnRef>
+          <a:fillRef idx="1">
+            <a:schemeClr val="accent1"/>
+          </a:fillRef>
+          <a:effectRef idx="0">
+            <a:schemeClr val="accent1"/>
+          </a:effectRef>
+          <a:fontRef idx="minor">
+            <a:schemeClr val="lt1"/>
+          </a:fontRef>
+        </p:style>
+        <p:txBody>
+          <a:bodyPr rtlCol="0" anchor="ctr"/>
+          <a:lstStyle/>
+          <a:p>
+            <a:pPr algn="ctr"/>
+            <a:r>
+              <a:rPr lang="ko-KR" altLang="en-US" dirty="0">
+                <a:solidFill>
+                  <a:schemeClr val="tx1"/>
+                </a:solidFill>
+              </a:rPr>
+              <a:t>용인시</a:t>
+            </a:r>
+            <a:endParaRPr lang="en-US" altLang="ko-KR" dirty="0">
+              <a:solidFill>
+                <a:schemeClr val="tx1"/>
+              </a:solidFill>
+            </a:endParaRPr>
+          </a:p>
+        </p:txBody>
+      </p:sp>
+      <p:sp>
+        <p:nvSpPr>
+          <p:cNvPr id="14" name="직사각형 13">
+            <a:extLst>
+              <a:ext uri="{FF2B5EF4-FFF2-40B4-BE49-F238E27FC236}">
+                <a16:creationId xmlns:a16="http://schemas.microsoft.com/office/drawing/2014/main" id="{CD71F94E-D328-886F-4F3A-709885C2F890}"/>
+              </a:ext>
+            </a:extLst>
+          </p:cNvPr>
+          <p:cNvSpPr/>
+          <p:nvPr/>
+        </p:nvSpPr>
+        <p:spPr>
+          <a:xfrm>
+            <a:off x="3142631" y="4168156"/>
+            <a:ext cx="311544" cy="914400"/>
+          </a:xfrm>
+          <a:prstGeom prst="rect">
+            <a:avLst/>
+          </a:prstGeom>
+          <a:solidFill>
+            <a:schemeClr val="bg1"/>
+          </a:solidFill>
+          <a:ln>
+            <a:noFill/>
+          </a:ln>
+        </p:spPr>
+        <p:style>
+          <a:lnRef idx="2">
+            <a:schemeClr val="accent1">
+              <a:shade val="15000"/>
+            </a:schemeClr>
+          </a:lnRef>
+          <a:fillRef idx="1">
+            <a:schemeClr val="accent1"/>
+          </a:fillRef>
+          <a:effectRef idx="0">
+            <a:schemeClr val="accent1"/>
+          </a:effectRef>
+          <a:fontRef idx="minor">
+            <a:schemeClr val="lt1"/>
+          </a:fontRef>
+        </p:style>
+        <p:txBody>
+          <a:bodyPr rtlCol="0" anchor="ctr"/>
+          <a:lstStyle/>
+          <a:p>
+            <a:pPr algn="ctr"/>
+            <a:r>
+              <a:rPr lang="ko-KR" altLang="en-US" dirty="0">
+                <a:solidFill>
+                  <a:schemeClr val="tx1"/>
+                </a:solidFill>
+              </a:rPr>
+              <a:t>포천시</a:t>
+            </a:r>
+            <a:endParaRPr lang="en-US" altLang="ko-KR" dirty="0">
+              <a:solidFill>
+                <a:schemeClr val="tx1"/>
+              </a:solidFill>
+            </a:endParaRPr>
+          </a:p>
+        </p:txBody>
+      </p:sp>
+      <p:sp>
+        <p:nvSpPr>
+          <p:cNvPr id="15" name="직사각형 14">
+            <a:extLst>
+              <a:ext uri="{FF2B5EF4-FFF2-40B4-BE49-F238E27FC236}">
+                <a16:creationId xmlns:a16="http://schemas.microsoft.com/office/drawing/2014/main" id="{D7054F85-F150-AA02-D2FA-42B9083C3075}"/>
+              </a:ext>
+            </a:extLst>
+          </p:cNvPr>
+          <p:cNvSpPr/>
+          <p:nvPr/>
+        </p:nvSpPr>
+        <p:spPr>
+          <a:xfrm>
+            <a:off x="3481934" y="4168156"/>
+            <a:ext cx="311544" cy="914400"/>
+          </a:xfrm>
+          <a:prstGeom prst="rect">
+            <a:avLst/>
+          </a:prstGeom>
+          <a:solidFill>
+            <a:schemeClr val="bg1"/>
+          </a:solidFill>
+          <a:ln>
+            <a:noFill/>
+          </a:ln>
+        </p:spPr>
+        <p:style>
+          <a:lnRef idx="2">
+            <a:schemeClr val="accent1">
+              <a:shade val="15000"/>
+            </a:schemeClr>
+          </a:lnRef>
+          <a:fillRef idx="1">
+            <a:schemeClr val="accent1"/>
+          </a:fillRef>
+          <a:effectRef idx="0">
+            <a:schemeClr val="accent1"/>
+          </a:effectRef>
+          <a:fontRef idx="minor">
+            <a:schemeClr val="lt1"/>
+          </a:fontRef>
+        </p:style>
+        <p:txBody>
+          <a:bodyPr rtlCol="0" anchor="ctr"/>
+          <a:lstStyle/>
+          <a:p>
+            <a:pPr algn="ctr"/>
+            <a:r>
+              <a:rPr lang="ko-KR" altLang="en-US" dirty="0">
+                <a:solidFill>
+                  <a:schemeClr val="tx1"/>
+                </a:solidFill>
+              </a:rPr>
+              <a:t>양평군</a:t>
+            </a:r>
+            <a:endParaRPr lang="en-US" altLang="ko-KR" dirty="0">
+              <a:solidFill>
+                <a:schemeClr val="tx1"/>
+              </a:solidFill>
+            </a:endParaRPr>
+          </a:p>
+        </p:txBody>
+      </p:sp>
+      <p:sp>
+        <p:nvSpPr>
+          <p:cNvPr id="16" name="직사각형 15">
+            <a:extLst>
+              <a:ext uri="{FF2B5EF4-FFF2-40B4-BE49-F238E27FC236}">
+                <a16:creationId xmlns:a16="http://schemas.microsoft.com/office/drawing/2014/main" id="{30D2576F-21D8-C914-E7DC-297E904233B6}"/>
+              </a:ext>
+            </a:extLst>
+          </p:cNvPr>
+          <p:cNvSpPr/>
+          <p:nvPr/>
+        </p:nvSpPr>
+        <p:spPr>
+          <a:xfrm>
+            <a:off x="3821237" y="4168156"/>
+            <a:ext cx="311544" cy="914400"/>
+          </a:xfrm>
+          <a:prstGeom prst="rect">
+            <a:avLst/>
+          </a:prstGeom>
+          <a:solidFill>
+            <a:schemeClr val="bg1"/>
+          </a:solidFill>
+          <a:ln>
+            <a:noFill/>
+          </a:ln>
+        </p:spPr>
+        <p:style>
+          <a:lnRef idx="2">
+            <a:schemeClr val="accent1">
+              <a:shade val="15000"/>
+            </a:schemeClr>
+          </a:lnRef>
+          <a:fillRef idx="1">
+            <a:schemeClr val="accent1"/>
+          </a:fillRef>
+          <a:effectRef idx="0">
+            <a:schemeClr val="accent1"/>
+          </a:effectRef>
+          <a:fontRef idx="minor">
+            <a:schemeClr val="lt1"/>
+          </a:fontRef>
+        </p:style>
+        <p:txBody>
+          <a:bodyPr rtlCol="0" anchor="ctr"/>
+          <a:lstStyle/>
+          <a:p>
+            <a:pPr algn="ctr"/>
+            <a:r>
+              <a:rPr lang="ko-KR" altLang="en-US" dirty="0">
+                <a:solidFill>
+                  <a:schemeClr val="tx1"/>
+                </a:solidFill>
+              </a:rPr>
+              <a:t>연천군</a:t>
+            </a:r>
+            <a:endParaRPr lang="en-US" altLang="ko-KR" dirty="0">
+              <a:solidFill>
+                <a:schemeClr val="tx1"/>
+              </a:solidFill>
+            </a:endParaRPr>
+          </a:p>
+        </p:txBody>
+      </p:sp>
+      <p:sp>
+        <p:nvSpPr>
+          <p:cNvPr id="17" name="직사각형 16">
+            <a:extLst>
+              <a:ext uri="{FF2B5EF4-FFF2-40B4-BE49-F238E27FC236}">
+                <a16:creationId xmlns:a16="http://schemas.microsoft.com/office/drawing/2014/main" id="{765348F2-1883-DBDA-AE9F-1AD0CB99A521}"/>
+              </a:ext>
+            </a:extLst>
+          </p:cNvPr>
+          <p:cNvSpPr/>
+          <p:nvPr/>
+        </p:nvSpPr>
+        <p:spPr>
+          <a:xfrm>
+            <a:off x="4160540" y="4168156"/>
+            <a:ext cx="311544" cy="914400"/>
+          </a:xfrm>
+          <a:prstGeom prst="rect">
+            <a:avLst/>
+          </a:prstGeom>
+          <a:solidFill>
+            <a:schemeClr val="bg1"/>
+          </a:solidFill>
+          <a:ln>
+            <a:noFill/>
+          </a:ln>
+        </p:spPr>
+        <p:style>
+          <a:lnRef idx="2">
+            <a:schemeClr val="accent1">
+              <a:shade val="15000"/>
+            </a:schemeClr>
+          </a:lnRef>
+          <a:fillRef idx="1">
+            <a:schemeClr val="accent1"/>
+          </a:fillRef>
+          <a:effectRef idx="0">
+            <a:schemeClr val="accent1"/>
+          </a:effectRef>
+          <a:fontRef idx="minor">
+            <a:schemeClr val="lt1"/>
+          </a:fontRef>
+        </p:style>
+        <p:txBody>
+          <a:bodyPr rtlCol="0" anchor="ctr"/>
+          <a:lstStyle/>
+          <a:p>
+            <a:pPr algn="ctr"/>
+            <a:r>
+              <a:rPr lang="ko-KR" altLang="en-US" dirty="0">
+                <a:solidFill>
+                  <a:schemeClr val="tx1"/>
+                </a:solidFill>
+              </a:rPr>
+              <a:t>김포시</a:t>
+            </a:r>
+            <a:endParaRPr lang="en-US" altLang="ko-KR" dirty="0">
+              <a:solidFill>
+                <a:schemeClr val="tx1"/>
+              </a:solidFill>
+            </a:endParaRPr>
+          </a:p>
+        </p:txBody>
+      </p:sp>
+      <p:sp>
+        <p:nvSpPr>
+          <p:cNvPr id="18" name="직사각형 17">
+            <a:extLst>
+              <a:ext uri="{FF2B5EF4-FFF2-40B4-BE49-F238E27FC236}">
+                <a16:creationId xmlns:a16="http://schemas.microsoft.com/office/drawing/2014/main" id="{24C6E699-B7C8-9E29-2CDD-6F465693D75A}"/>
+              </a:ext>
+            </a:extLst>
+          </p:cNvPr>
+          <p:cNvSpPr/>
+          <p:nvPr/>
+        </p:nvSpPr>
+        <p:spPr>
+          <a:xfrm>
+            <a:off x="4499843" y="4168156"/>
+            <a:ext cx="311544" cy="914400"/>
+          </a:xfrm>
+          <a:prstGeom prst="rect">
+            <a:avLst/>
+          </a:prstGeom>
+          <a:solidFill>
+            <a:schemeClr val="bg1"/>
+          </a:solidFill>
+          <a:ln>
+            <a:noFill/>
+          </a:ln>
+        </p:spPr>
+        <p:style>
+          <a:lnRef idx="2">
+            <a:schemeClr val="accent1">
+              <a:shade val="15000"/>
+            </a:schemeClr>
+          </a:lnRef>
+          <a:fillRef idx="1">
+            <a:schemeClr val="accent1"/>
+          </a:fillRef>
+          <a:effectRef idx="0">
+            <a:schemeClr val="accent1"/>
+          </a:effectRef>
+          <a:fontRef idx="minor">
+            <a:schemeClr val="lt1"/>
+          </a:fontRef>
+        </p:style>
+        <p:txBody>
+          <a:bodyPr rtlCol="0" anchor="ctr"/>
+          <a:lstStyle/>
+          <a:p>
+            <a:pPr algn="ctr"/>
+            <a:r>
+              <a:rPr lang="ko-KR" altLang="en-US" dirty="0">
+                <a:solidFill>
+                  <a:schemeClr val="tx1"/>
+                </a:solidFill>
+              </a:rPr>
+              <a:t>고양시</a:t>
+            </a:r>
+            <a:endParaRPr lang="en-US" altLang="ko-KR" dirty="0">
+              <a:solidFill>
+                <a:schemeClr val="tx1"/>
+              </a:solidFill>
+            </a:endParaRPr>
+          </a:p>
+        </p:txBody>
+      </p:sp>
+      <p:sp>
+        <p:nvSpPr>
+          <p:cNvPr id="19" name="직사각형 18">
+            <a:extLst>
+              <a:ext uri="{FF2B5EF4-FFF2-40B4-BE49-F238E27FC236}">
+                <a16:creationId xmlns:a16="http://schemas.microsoft.com/office/drawing/2014/main" id="{14D4410F-7A95-BE0B-C96E-1D61000B8E29}"/>
+              </a:ext>
+            </a:extLst>
+          </p:cNvPr>
+          <p:cNvSpPr/>
+          <p:nvPr/>
+        </p:nvSpPr>
+        <p:spPr>
+          <a:xfrm>
+            <a:off x="4839146" y="4168156"/>
+            <a:ext cx="311544" cy="914400"/>
+          </a:xfrm>
+          <a:prstGeom prst="rect">
+            <a:avLst/>
+          </a:prstGeom>
+          <a:solidFill>
+            <a:schemeClr val="bg1"/>
+          </a:solidFill>
+          <a:ln>
+            <a:noFill/>
+          </a:ln>
+        </p:spPr>
+        <p:style>
+          <a:lnRef idx="2">
+            <a:schemeClr val="accent1">
+              <a:shade val="15000"/>
+            </a:schemeClr>
+          </a:lnRef>
+          <a:fillRef idx="1">
+            <a:schemeClr val="accent1"/>
+          </a:fillRef>
+          <a:effectRef idx="0">
+            <a:schemeClr val="accent1"/>
+          </a:effectRef>
+          <a:fontRef idx="minor">
+            <a:schemeClr val="lt1"/>
+          </a:fontRef>
+        </p:style>
+        <p:txBody>
+          <a:bodyPr rtlCol="0" anchor="ctr"/>
+          <a:lstStyle/>
+          <a:p>
+            <a:pPr algn="ctr"/>
+            <a:r>
+              <a:rPr lang="ko-KR" altLang="en-US" dirty="0">
+                <a:solidFill>
+                  <a:schemeClr val="tx1"/>
+                </a:solidFill>
+              </a:rPr>
+              <a:t>남양주</a:t>
+            </a:r>
+            <a:endParaRPr lang="en-US" altLang="ko-KR" dirty="0">
+              <a:solidFill>
+                <a:schemeClr val="tx1"/>
+              </a:solidFill>
+            </a:endParaRPr>
+          </a:p>
+        </p:txBody>
+      </p:sp>
+      <p:sp>
+        <p:nvSpPr>
+          <p:cNvPr id="20" name="직사각형 19">
+            <a:extLst>
+              <a:ext uri="{FF2B5EF4-FFF2-40B4-BE49-F238E27FC236}">
+                <a16:creationId xmlns:a16="http://schemas.microsoft.com/office/drawing/2014/main" id="{84F942E7-9DE1-F81D-5269-CF446EF6C3B2}"/>
+              </a:ext>
+            </a:extLst>
+          </p:cNvPr>
+          <p:cNvSpPr/>
+          <p:nvPr/>
+        </p:nvSpPr>
+        <p:spPr>
+          <a:xfrm>
+            <a:off x="5178449" y="4168156"/>
+            <a:ext cx="311544" cy="914400"/>
+          </a:xfrm>
+          <a:prstGeom prst="rect">
+            <a:avLst/>
+          </a:prstGeom>
+          <a:solidFill>
+            <a:schemeClr val="bg1"/>
+          </a:solidFill>
+          <a:ln>
+            <a:noFill/>
+          </a:ln>
+        </p:spPr>
+        <p:style>
+          <a:lnRef idx="2">
+            <a:schemeClr val="accent1">
+              <a:shade val="15000"/>
+            </a:schemeClr>
+          </a:lnRef>
+          <a:fillRef idx="1">
+            <a:schemeClr val="accent1"/>
+          </a:fillRef>
+          <a:effectRef idx="0">
+            <a:schemeClr val="accent1"/>
+          </a:effectRef>
+          <a:fontRef idx="minor">
+            <a:schemeClr val="lt1"/>
+          </a:fontRef>
+        </p:style>
+        <p:txBody>
+          <a:bodyPr rtlCol="0" anchor="ctr"/>
+          <a:lstStyle/>
+          <a:p>
+            <a:pPr algn="ctr"/>
+            <a:r>
+              <a:rPr lang="ko-KR" altLang="en-US" dirty="0">
+                <a:solidFill>
+                  <a:schemeClr val="tx1"/>
+                </a:solidFill>
+              </a:rPr>
+              <a:t>양주시</a:t>
+            </a:r>
+            <a:endParaRPr lang="en-US" altLang="ko-KR" dirty="0">
+              <a:solidFill>
+                <a:schemeClr val="tx1"/>
+              </a:solidFill>
+            </a:endParaRPr>
+          </a:p>
+        </p:txBody>
+      </p:sp>
+      <p:sp>
+        <p:nvSpPr>
+          <p:cNvPr id="21" name="직사각형 20">
+            <a:extLst>
+              <a:ext uri="{FF2B5EF4-FFF2-40B4-BE49-F238E27FC236}">
+                <a16:creationId xmlns:a16="http://schemas.microsoft.com/office/drawing/2014/main" id="{33C1F8B5-0649-6E2F-D566-00A6B7C3E686}"/>
+              </a:ext>
+            </a:extLst>
+          </p:cNvPr>
+          <p:cNvSpPr/>
+          <p:nvPr/>
+        </p:nvSpPr>
+        <p:spPr>
+          <a:xfrm>
+            <a:off x="5517752" y="4168156"/>
+            <a:ext cx="311544" cy="914400"/>
+          </a:xfrm>
+          <a:prstGeom prst="rect">
+            <a:avLst/>
+          </a:prstGeom>
+          <a:solidFill>
+            <a:schemeClr val="bg1"/>
+          </a:solidFill>
+          <a:ln>
+            <a:noFill/>
+          </a:ln>
+        </p:spPr>
+        <p:style>
+          <a:lnRef idx="2">
+            <a:schemeClr val="accent1">
+              <a:shade val="15000"/>
+            </a:schemeClr>
+          </a:lnRef>
+          <a:fillRef idx="1">
+            <a:schemeClr val="accent1"/>
+          </a:fillRef>
+          <a:effectRef idx="0">
+            <a:schemeClr val="accent1"/>
+          </a:effectRef>
+          <a:fontRef idx="minor">
+            <a:schemeClr val="lt1"/>
+          </a:fontRef>
+        </p:style>
+        <p:txBody>
+          <a:bodyPr rtlCol="0" anchor="ctr"/>
+          <a:lstStyle/>
+          <a:p>
+            <a:pPr algn="ctr"/>
+            <a:r>
+              <a:rPr lang="ko-KR" altLang="en-US" dirty="0">
+                <a:solidFill>
+                  <a:schemeClr val="tx1"/>
+                </a:solidFill>
+              </a:rPr>
+              <a:t>광주시</a:t>
+            </a:r>
+            <a:endParaRPr lang="en-US" altLang="ko-KR" dirty="0">
+              <a:solidFill>
+                <a:schemeClr val="tx1"/>
+              </a:solidFill>
+            </a:endParaRPr>
+          </a:p>
+        </p:txBody>
+      </p:sp>
+      <p:sp>
+        <p:nvSpPr>
+          <p:cNvPr id="22" name="직사각형 21">
+            <a:extLst>
+              <a:ext uri="{FF2B5EF4-FFF2-40B4-BE49-F238E27FC236}">
+                <a16:creationId xmlns:a16="http://schemas.microsoft.com/office/drawing/2014/main" id="{3B500E6B-924A-B463-8940-FA9E03CB6908}"/>
+              </a:ext>
+            </a:extLst>
+          </p:cNvPr>
+          <p:cNvSpPr/>
+          <p:nvPr/>
+        </p:nvSpPr>
+        <p:spPr>
+          <a:xfrm>
+            <a:off x="5857055" y="4168156"/>
+            <a:ext cx="311544" cy="914400"/>
+          </a:xfrm>
+          <a:prstGeom prst="rect">
+            <a:avLst/>
+          </a:prstGeom>
+          <a:solidFill>
+            <a:schemeClr val="bg1"/>
+          </a:solidFill>
+          <a:ln>
+            <a:noFill/>
+          </a:ln>
+        </p:spPr>
+        <p:style>
+          <a:lnRef idx="2">
+            <a:schemeClr val="accent1">
+              <a:shade val="15000"/>
+            </a:schemeClr>
+          </a:lnRef>
+          <a:fillRef idx="1">
+            <a:schemeClr val="accent1"/>
+          </a:fillRef>
+          <a:effectRef idx="0">
+            <a:schemeClr val="accent1"/>
+          </a:effectRef>
+          <a:fontRef idx="minor">
+            <a:schemeClr val="lt1"/>
+          </a:fontRef>
+        </p:style>
+        <p:txBody>
+          <a:bodyPr rtlCol="0" anchor="ctr"/>
+          <a:lstStyle/>
+          <a:p>
+            <a:pPr algn="ctr"/>
+            <a:r>
+              <a:rPr lang="ko-KR" altLang="en-US" dirty="0">
+                <a:solidFill>
+                  <a:schemeClr val="tx1"/>
+                </a:solidFill>
+              </a:rPr>
+              <a:t>가평군</a:t>
+            </a:r>
+            <a:endParaRPr lang="en-US" altLang="ko-KR" dirty="0">
+              <a:solidFill>
+                <a:schemeClr val="tx1"/>
+              </a:solidFill>
+            </a:endParaRPr>
+          </a:p>
+        </p:txBody>
+      </p:sp>
+      <p:sp>
+        <p:nvSpPr>
+          <p:cNvPr id="23" name="직사각형 22">
+            <a:extLst>
+              <a:ext uri="{FF2B5EF4-FFF2-40B4-BE49-F238E27FC236}">
+                <a16:creationId xmlns:a16="http://schemas.microsoft.com/office/drawing/2014/main" id="{1C4E68C3-B5D2-BFFA-7DC0-A637BDCB9115}"/>
+              </a:ext>
+            </a:extLst>
+          </p:cNvPr>
+          <p:cNvSpPr/>
+          <p:nvPr/>
+        </p:nvSpPr>
+        <p:spPr>
+          <a:xfrm>
+            <a:off x="6196358" y="4168156"/>
+            <a:ext cx="311544" cy="914400"/>
+          </a:xfrm>
+          <a:prstGeom prst="rect">
+            <a:avLst/>
+          </a:prstGeom>
+          <a:solidFill>
+            <a:schemeClr val="bg1"/>
+          </a:solidFill>
+          <a:ln>
+            <a:noFill/>
+          </a:ln>
+        </p:spPr>
+        <p:style>
+          <a:lnRef idx="2">
+            <a:schemeClr val="accent1">
+              <a:shade val="15000"/>
+            </a:schemeClr>
+          </a:lnRef>
+          <a:fillRef idx="1">
+            <a:schemeClr val="accent1"/>
+          </a:fillRef>
+          <a:effectRef idx="0">
+            <a:schemeClr val="accent1"/>
+          </a:effectRef>
+          <a:fontRef idx="minor">
+            <a:schemeClr val="lt1"/>
+          </a:fontRef>
+        </p:style>
+        <p:txBody>
+          <a:bodyPr rtlCol="0" anchor="ctr"/>
+          <a:lstStyle/>
+          <a:p>
+            <a:pPr algn="ctr"/>
+            <a:r>
+              <a:rPr lang="ko-KR" altLang="en-US" dirty="0">
+                <a:solidFill>
+                  <a:schemeClr val="tx1"/>
+                </a:solidFill>
+              </a:rPr>
+              <a:t>안산시</a:t>
+            </a:r>
+            <a:endParaRPr lang="en-US" altLang="ko-KR" dirty="0">
+              <a:solidFill>
+                <a:schemeClr val="tx1"/>
+              </a:solidFill>
+            </a:endParaRPr>
+          </a:p>
+        </p:txBody>
+      </p:sp>
+      <p:sp>
+        <p:nvSpPr>
+          <p:cNvPr id="24" name="직사각형 23">
+            <a:extLst>
+              <a:ext uri="{FF2B5EF4-FFF2-40B4-BE49-F238E27FC236}">
+                <a16:creationId xmlns:a16="http://schemas.microsoft.com/office/drawing/2014/main" id="{29FFAE3A-E622-EE2A-A33E-059C7B738BCB}"/>
+              </a:ext>
+            </a:extLst>
+          </p:cNvPr>
+          <p:cNvSpPr/>
+          <p:nvPr/>
+        </p:nvSpPr>
+        <p:spPr>
+          <a:xfrm>
+            <a:off x="6535661" y="4168156"/>
+            <a:ext cx="311544" cy="914400"/>
+          </a:xfrm>
+          <a:prstGeom prst="rect">
+            <a:avLst/>
+          </a:prstGeom>
+          <a:solidFill>
+            <a:schemeClr val="bg1"/>
+          </a:solidFill>
+          <a:ln>
+            <a:noFill/>
+          </a:ln>
+        </p:spPr>
+        <p:style>
+          <a:lnRef idx="2">
+            <a:schemeClr val="accent1">
+              <a:shade val="15000"/>
+            </a:schemeClr>
+          </a:lnRef>
+          <a:fillRef idx="1">
+            <a:schemeClr val="accent1"/>
+          </a:fillRef>
+          <a:effectRef idx="0">
+            <a:schemeClr val="accent1"/>
+          </a:effectRef>
+          <a:fontRef idx="minor">
+            <a:schemeClr val="lt1"/>
+          </a:fontRef>
+        </p:style>
+        <p:txBody>
+          <a:bodyPr rtlCol="0" anchor="ctr"/>
+          <a:lstStyle/>
+          <a:p>
+            <a:pPr algn="ctr"/>
+            <a:r>
+              <a:rPr lang="ko-KR" altLang="en-US" dirty="0">
+                <a:solidFill>
+                  <a:schemeClr val="tx1"/>
+                </a:solidFill>
+              </a:rPr>
+              <a:t>시흥시</a:t>
+            </a:r>
+            <a:endParaRPr lang="en-US" altLang="ko-KR" dirty="0">
+              <a:solidFill>
+                <a:schemeClr val="tx1"/>
+              </a:solidFill>
+            </a:endParaRPr>
+          </a:p>
+        </p:txBody>
+      </p:sp>
+      <p:sp>
+        <p:nvSpPr>
+          <p:cNvPr id="25" name="직사각형 24">
+            <a:extLst>
+              <a:ext uri="{FF2B5EF4-FFF2-40B4-BE49-F238E27FC236}">
+                <a16:creationId xmlns:a16="http://schemas.microsoft.com/office/drawing/2014/main" id="{2D56B101-3ED8-E97A-6BDB-C710F7963F61}"/>
+              </a:ext>
+            </a:extLst>
+          </p:cNvPr>
+          <p:cNvSpPr/>
+          <p:nvPr/>
+        </p:nvSpPr>
+        <p:spPr>
+          <a:xfrm>
+            <a:off x="6874964" y="4168156"/>
+            <a:ext cx="311544" cy="914400"/>
+          </a:xfrm>
+          <a:prstGeom prst="rect">
+            <a:avLst/>
+          </a:prstGeom>
+          <a:solidFill>
+            <a:schemeClr val="bg1"/>
+          </a:solidFill>
+          <a:ln>
+            <a:noFill/>
+          </a:ln>
+        </p:spPr>
+        <p:style>
+          <a:lnRef idx="2">
+            <a:schemeClr val="accent1">
+              <a:shade val="15000"/>
+            </a:schemeClr>
+          </a:lnRef>
+          <a:fillRef idx="1">
+            <a:schemeClr val="accent1"/>
+          </a:fillRef>
+          <a:effectRef idx="0">
+            <a:schemeClr val="accent1"/>
+          </a:effectRef>
+          <a:fontRef idx="minor">
+            <a:schemeClr val="lt1"/>
+          </a:fontRef>
+        </p:style>
+        <p:txBody>
+          <a:bodyPr rtlCol="0" anchor="ctr"/>
+          <a:lstStyle/>
+          <a:p>
+            <a:pPr algn="ctr"/>
+            <a:r>
+              <a:rPr lang="ko-KR" altLang="en-US" dirty="0">
+                <a:solidFill>
+                  <a:schemeClr val="tx1"/>
+                </a:solidFill>
+              </a:rPr>
+              <a:t>수원시</a:t>
+            </a:r>
+            <a:endParaRPr lang="en-US" altLang="ko-KR" dirty="0">
+              <a:solidFill>
+                <a:schemeClr val="tx1"/>
+              </a:solidFill>
+            </a:endParaRPr>
+          </a:p>
+        </p:txBody>
+      </p:sp>
+      <p:sp>
+        <p:nvSpPr>
+          <p:cNvPr id="26" name="직사각형 25">
+            <a:extLst>
+              <a:ext uri="{FF2B5EF4-FFF2-40B4-BE49-F238E27FC236}">
+                <a16:creationId xmlns:a16="http://schemas.microsoft.com/office/drawing/2014/main" id="{71D04FA4-D302-FF0C-A42B-9F7AE4981DDC}"/>
+              </a:ext>
+            </a:extLst>
+          </p:cNvPr>
+          <p:cNvSpPr/>
+          <p:nvPr/>
+        </p:nvSpPr>
+        <p:spPr>
+          <a:xfrm>
+            <a:off x="7214267" y="4168156"/>
+            <a:ext cx="311544" cy="914400"/>
+          </a:xfrm>
+          <a:prstGeom prst="rect">
+            <a:avLst/>
+          </a:prstGeom>
+          <a:solidFill>
+            <a:schemeClr val="bg1"/>
+          </a:solidFill>
+          <a:ln>
+            <a:noFill/>
+          </a:ln>
+        </p:spPr>
+        <p:style>
+          <a:lnRef idx="2">
+            <a:schemeClr val="accent1">
+              <a:shade val="15000"/>
+            </a:schemeClr>
+          </a:lnRef>
+          <a:fillRef idx="1">
+            <a:schemeClr val="accent1"/>
+          </a:fillRef>
+          <a:effectRef idx="0">
+            <a:schemeClr val="accent1"/>
+          </a:effectRef>
+          <a:fontRef idx="minor">
+            <a:schemeClr val="lt1"/>
+          </a:fontRef>
+        </p:style>
+        <p:txBody>
+          <a:bodyPr rtlCol="0" anchor="ctr"/>
+          <a:lstStyle/>
+          <a:p>
+            <a:pPr algn="ctr"/>
+            <a:r>
+              <a:rPr lang="ko-KR" altLang="en-US" dirty="0">
+                <a:solidFill>
+                  <a:schemeClr val="tx1"/>
+                </a:solidFill>
+              </a:rPr>
+              <a:t>성남시</a:t>
+            </a:r>
+            <a:endParaRPr lang="en-US" altLang="ko-KR" dirty="0">
+              <a:solidFill>
+                <a:schemeClr val="tx1"/>
+              </a:solidFill>
+            </a:endParaRPr>
+          </a:p>
+        </p:txBody>
+      </p:sp>
+      <p:sp>
+        <p:nvSpPr>
+          <p:cNvPr id="27" name="직사각형 26">
+            <a:extLst>
+              <a:ext uri="{FF2B5EF4-FFF2-40B4-BE49-F238E27FC236}">
+                <a16:creationId xmlns:a16="http://schemas.microsoft.com/office/drawing/2014/main" id="{ED3B0472-86D7-5EC0-894F-FA22C68019AB}"/>
+              </a:ext>
+            </a:extLst>
+          </p:cNvPr>
+          <p:cNvSpPr/>
+          <p:nvPr/>
+        </p:nvSpPr>
+        <p:spPr>
+          <a:xfrm>
+            <a:off x="7553570" y="4168156"/>
+            <a:ext cx="311544" cy="914400"/>
+          </a:xfrm>
+          <a:prstGeom prst="rect">
+            <a:avLst/>
+          </a:prstGeom>
+          <a:solidFill>
+            <a:schemeClr val="bg1"/>
+          </a:solidFill>
+          <a:ln>
+            <a:noFill/>
+          </a:ln>
+        </p:spPr>
+        <p:style>
+          <a:lnRef idx="2">
+            <a:schemeClr val="accent1">
+              <a:shade val="15000"/>
+            </a:schemeClr>
+          </a:lnRef>
+          <a:fillRef idx="1">
+            <a:schemeClr val="accent1"/>
+          </a:fillRef>
+          <a:effectRef idx="0">
+            <a:schemeClr val="accent1"/>
+          </a:effectRef>
+          <a:fontRef idx="minor">
+            <a:schemeClr val="lt1"/>
+          </a:fontRef>
+        </p:style>
+        <p:txBody>
+          <a:bodyPr rtlCol="0" anchor="ctr"/>
+          <a:lstStyle/>
+          <a:p>
+            <a:pPr algn="ctr"/>
+            <a:r>
+              <a:rPr lang="ko-KR" altLang="en-US" dirty="0">
+                <a:solidFill>
+                  <a:schemeClr val="tx1"/>
+                </a:solidFill>
+              </a:rPr>
+              <a:t>부천시</a:t>
+            </a:r>
+            <a:endParaRPr lang="en-US" altLang="ko-KR" dirty="0">
+              <a:solidFill>
+                <a:schemeClr val="tx1"/>
+              </a:solidFill>
+            </a:endParaRPr>
+          </a:p>
+        </p:txBody>
+      </p:sp>
+      <p:sp>
+        <p:nvSpPr>
+          <p:cNvPr id="28" name="직사각형 27">
+            <a:extLst>
+              <a:ext uri="{FF2B5EF4-FFF2-40B4-BE49-F238E27FC236}">
+                <a16:creationId xmlns:a16="http://schemas.microsoft.com/office/drawing/2014/main" id="{55B48130-0FAD-D6BF-2245-7A0C0C7EF009}"/>
+              </a:ext>
+            </a:extLst>
+          </p:cNvPr>
+          <p:cNvSpPr/>
+          <p:nvPr/>
+        </p:nvSpPr>
+        <p:spPr>
+          <a:xfrm>
+            <a:off x="7892873" y="4168156"/>
+            <a:ext cx="311544" cy="914400"/>
+          </a:xfrm>
+          <a:prstGeom prst="rect">
+            <a:avLst/>
+          </a:prstGeom>
+          <a:solidFill>
+            <a:schemeClr val="bg1"/>
+          </a:solidFill>
+          <a:ln>
+            <a:noFill/>
+          </a:ln>
+        </p:spPr>
+        <p:style>
+          <a:lnRef idx="2">
+            <a:schemeClr val="accent1">
+              <a:shade val="15000"/>
+            </a:schemeClr>
+          </a:lnRef>
+          <a:fillRef idx="1">
+            <a:schemeClr val="accent1"/>
+          </a:fillRef>
+          <a:effectRef idx="0">
+            <a:schemeClr val="accent1"/>
+          </a:effectRef>
+          <a:fontRef idx="minor">
+            <a:schemeClr val="lt1"/>
+          </a:fontRef>
+        </p:style>
+        <p:txBody>
+          <a:bodyPr rtlCol="0" anchor="ctr"/>
+          <a:lstStyle/>
+          <a:p>
+            <a:pPr algn="ctr"/>
+            <a:r>
+              <a:rPr lang="ko-KR" altLang="en-US" dirty="0">
+                <a:solidFill>
+                  <a:schemeClr val="tx1"/>
+                </a:solidFill>
+              </a:rPr>
+              <a:t>하남시</a:t>
+            </a:r>
+            <a:endParaRPr lang="en-US" altLang="ko-KR" dirty="0">
+              <a:solidFill>
+                <a:schemeClr val="tx1"/>
+              </a:solidFill>
+            </a:endParaRPr>
+          </a:p>
+        </p:txBody>
+      </p:sp>
+      <p:sp>
+        <p:nvSpPr>
+          <p:cNvPr id="29" name="직사각형 28">
+            <a:extLst>
+              <a:ext uri="{FF2B5EF4-FFF2-40B4-BE49-F238E27FC236}">
+                <a16:creationId xmlns:a16="http://schemas.microsoft.com/office/drawing/2014/main" id="{691DA4A7-1CD8-F388-E9DF-A9A781B6ACFE}"/>
+              </a:ext>
+            </a:extLst>
+          </p:cNvPr>
+          <p:cNvSpPr/>
+          <p:nvPr/>
+        </p:nvSpPr>
+        <p:spPr>
+          <a:xfrm>
+            <a:off x="8232176" y="4168156"/>
+            <a:ext cx="311544" cy="914400"/>
+          </a:xfrm>
+          <a:prstGeom prst="rect">
+            <a:avLst/>
+          </a:prstGeom>
+          <a:solidFill>
+            <a:schemeClr val="bg1"/>
+          </a:solidFill>
+          <a:ln>
+            <a:noFill/>
+          </a:ln>
+        </p:spPr>
+        <p:style>
+          <a:lnRef idx="2">
+            <a:schemeClr val="accent1">
+              <a:shade val="15000"/>
+            </a:schemeClr>
+          </a:lnRef>
+          <a:fillRef idx="1">
+            <a:schemeClr val="accent1"/>
+          </a:fillRef>
+          <a:effectRef idx="0">
+            <a:schemeClr val="accent1"/>
+          </a:effectRef>
+          <a:fontRef idx="minor">
+            <a:schemeClr val="lt1"/>
+          </a:fontRef>
+        </p:style>
+        <p:txBody>
+          <a:bodyPr rtlCol="0" anchor="ctr"/>
+          <a:lstStyle/>
+          <a:p>
+            <a:pPr algn="ctr"/>
+            <a:r>
+              <a:rPr lang="ko-KR" altLang="en-US" dirty="0">
+                <a:solidFill>
+                  <a:schemeClr val="tx1"/>
+                </a:solidFill>
+              </a:rPr>
+              <a:t>의정부</a:t>
+            </a:r>
+            <a:endParaRPr lang="en-US" altLang="ko-KR" dirty="0">
+              <a:solidFill>
+                <a:schemeClr val="tx1"/>
+              </a:solidFill>
+            </a:endParaRPr>
+          </a:p>
+        </p:txBody>
+      </p:sp>
+      <p:sp>
+        <p:nvSpPr>
+          <p:cNvPr id="30" name="직사각형 29">
+            <a:extLst>
+              <a:ext uri="{FF2B5EF4-FFF2-40B4-BE49-F238E27FC236}">
+                <a16:creationId xmlns:a16="http://schemas.microsoft.com/office/drawing/2014/main" id="{3180CEAC-5A0E-694C-6459-812C78FFD5F2}"/>
+              </a:ext>
+            </a:extLst>
+          </p:cNvPr>
+          <p:cNvSpPr/>
+          <p:nvPr/>
+        </p:nvSpPr>
+        <p:spPr>
+          <a:xfrm>
+            <a:off x="8571479" y="4168156"/>
+            <a:ext cx="311544" cy="914400"/>
+          </a:xfrm>
+          <a:prstGeom prst="rect">
+            <a:avLst/>
+          </a:prstGeom>
+          <a:solidFill>
+            <a:schemeClr val="bg1"/>
+          </a:solidFill>
+          <a:ln>
+            <a:noFill/>
+          </a:ln>
+        </p:spPr>
+        <p:style>
+          <a:lnRef idx="2">
+            <a:schemeClr val="accent1">
+              <a:shade val="15000"/>
+            </a:schemeClr>
+          </a:lnRef>
+          <a:fillRef idx="1">
+            <a:schemeClr val="accent1"/>
+          </a:fillRef>
+          <a:effectRef idx="0">
+            <a:schemeClr val="accent1"/>
+          </a:effectRef>
+          <a:fontRef idx="minor">
+            <a:schemeClr val="lt1"/>
+          </a:fontRef>
+        </p:style>
+        <p:txBody>
+          <a:bodyPr rtlCol="0" anchor="ctr"/>
+          <a:lstStyle/>
+          <a:p>
+            <a:pPr algn="ctr"/>
+            <a:r>
+              <a:rPr lang="ko-KR" altLang="en-US" dirty="0">
+                <a:solidFill>
+                  <a:schemeClr val="tx1"/>
+                </a:solidFill>
+              </a:rPr>
+              <a:t>오산시</a:t>
+            </a:r>
+            <a:endParaRPr lang="en-US" altLang="ko-KR" dirty="0">
+              <a:solidFill>
+                <a:schemeClr val="tx1"/>
+              </a:solidFill>
+            </a:endParaRPr>
+          </a:p>
+        </p:txBody>
+      </p:sp>
+      <p:sp>
+        <p:nvSpPr>
+          <p:cNvPr id="31" name="직사각형 30">
+            <a:extLst>
+              <a:ext uri="{FF2B5EF4-FFF2-40B4-BE49-F238E27FC236}">
+                <a16:creationId xmlns:a16="http://schemas.microsoft.com/office/drawing/2014/main" id="{146121B3-31A0-8E27-E657-488BC7937647}"/>
+              </a:ext>
+            </a:extLst>
+          </p:cNvPr>
+          <p:cNvSpPr/>
+          <p:nvPr/>
+        </p:nvSpPr>
+        <p:spPr>
+          <a:xfrm>
+            <a:off x="8910782" y="4168156"/>
+            <a:ext cx="311544" cy="914400"/>
+          </a:xfrm>
+          <a:prstGeom prst="rect">
+            <a:avLst/>
+          </a:prstGeom>
+          <a:solidFill>
+            <a:schemeClr val="bg1"/>
+          </a:solidFill>
+          <a:ln>
+            <a:noFill/>
+          </a:ln>
+        </p:spPr>
+        <p:style>
+          <a:lnRef idx="2">
+            <a:schemeClr val="accent1">
+              <a:shade val="15000"/>
+            </a:schemeClr>
+          </a:lnRef>
+          <a:fillRef idx="1">
+            <a:schemeClr val="accent1"/>
+          </a:fillRef>
+          <a:effectRef idx="0">
+            <a:schemeClr val="accent1"/>
+          </a:effectRef>
+          <a:fontRef idx="minor">
+            <a:schemeClr val="lt1"/>
+          </a:fontRef>
+        </p:style>
+        <p:txBody>
+          <a:bodyPr rtlCol="0" anchor="ctr"/>
+          <a:lstStyle/>
+          <a:p>
+            <a:pPr algn="ctr"/>
+            <a:r>
+              <a:rPr lang="ko-KR" altLang="en-US" dirty="0">
+                <a:solidFill>
+                  <a:schemeClr val="tx1"/>
+                </a:solidFill>
+              </a:rPr>
+              <a:t>안양시</a:t>
+            </a:r>
+            <a:endParaRPr lang="en-US" altLang="ko-KR" dirty="0">
+              <a:solidFill>
+                <a:schemeClr val="tx1"/>
+              </a:solidFill>
+            </a:endParaRPr>
+          </a:p>
+        </p:txBody>
+      </p:sp>
+      <p:sp>
+        <p:nvSpPr>
+          <p:cNvPr id="32" name="직사각형 31">
+            <a:extLst>
+              <a:ext uri="{FF2B5EF4-FFF2-40B4-BE49-F238E27FC236}">
+                <a16:creationId xmlns:a16="http://schemas.microsoft.com/office/drawing/2014/main" id="{5120B970-43BA-EB8D-32F2-FE6526A09FCF}"/>
+              </a:ext>
+            </a:extLst>
+          </p:cNvPr>
+          <p:cNvSpPr/>
+          <p:nvPr/>
+        </p:nvSpPr>
+        <p:spPr>
+          <a:xfrm>
+            <a:off x="9250085" y="4168156"/>
+            <a:ext cx="311544" cy="914400"/>
+          </a:xfrm>
+          <a:prstGeom prst="rect">
+            <a:avLst/>
+          </a:prstGeom>
+          <a:solidFill>
+            <a:schemeClr val="bg1"/>
+          </a:solidFill>
+          <a:ln>
+            <a:noFill/>
+          </a:ln>
+        </p:spPr>
+        <p:style>
+          <a:lnRef idx="2">
+            <a:schemeClr val="accent1">
+              <a:shade val="15000"/>
+            </a:schemeClr>
+          </a:lnRef>
+          <a:fillRef idx="1">
+            <a:schemeClr val="accent1"/>
+          </a:fillRef>
+          <a:effectRef idx="0">
+            <a:schemeClr val="accent1"/>
+          </a:effectRef>
+          <a:fontRef idx="minor">
+            <a:schemeClr val="lt1"/>
+          </a:fontRef>
+        </p:style>
+        <p:txBody>
+          <a:bodyPr rtlCol="0" anchor="ctr"/>
+          <a:lstStyle/>
+          <a:p>
+            <a:pPr algn="ctr"/>
+            <a:r>
+              <a:rPr lang="ko-KR" altLang="en-US" dirty="0">
+                <a:solidFill>
+                  <a:schemeClr val="tx1"/>
+                </a:solidFill>
+              </a:rPr>
+              <a:t>광명시</a:t>
+            </a:r>
+            <a:endParaRPr lang="en-US" altLang="ko-KR" dirty="0">
+              <a:solidFill>
+                <a:schemeClr val="tx1"/>
+              </a:solidFill>
+            </a:endParaRPr>
+          </a:p>
+        </p:txBody>
+      </p:sp>
+      <p:sp>
+        <p:nvSpPr>
+          <p:cNvPr id="33" name="직사각형 32">
+            <a:extLst>
+              <a:ext uri="{FF2B5EF4-FFF2-40B4-BE49-F238E27FC236}">
+                <a16:creationId xmlns:a16="http://schemas.microsoft.com/office/drawing/2014/main" id="{3CE2C81A-A67D-7BEA-130C-B6F6D9C2AD28}"/>
+              </a:ext>
+            </a:extLst>
+          </p:cNvPr>
+          <p:cNvSpPr/>
+          <p:nvPr/>
+        </p:nvSpPr>
+        <p:spPr>
+          <a:xfrm>
+            <a:off x="9589388" y="4168156"/>
+            <a:ext cx="311544" cy="914400"/>
+          </a:xfrm>
+          <a:prstGeom prst="rect">
+            <a:avLst/>
+          </a:prstGeom>
+          <a:solidFill>
+            <a:schemeClr val="bg1"/>
+          </a:solidFill>
+          <a:ln>
+            <a:noFill/>
+          </a:ln>
+        </p:spPr>
+        <p:style>
+          <a:lnRef idx="2">
+            <a:schemeClr val="accent1">
+              <a:shade val="15000"/>
+            </a:schemeClr>
+          </a:lnRef>
+          <a:fillRef idx="1">
+            <a:schemeClr val="accent1"/>
+          </a:fillRef>
+          <a:effectRef idx="0">
+            <a:schemeClr val="accent1"/>
+          </a:effectRef>
+          <a:fontRef idx="minor">
+            <a:schemeClr val="lt1"/>
+          </a:fontRef>
+        </p:style>
+        <p:txBody>
+          <a:bodyPr rtlCol="0" anchor="ctr"/>
+          <a:lstStyle/>
+          <a:p>
+            <a:pPr algn="ctr"/>
+            <a:r>
+              <a:rPr lang="ko-KR" altLang="en-US" dirty="0">
+                <a:solidFill>
+                  <a:schemeClr val="tx1"/>
+                </a:solidFill>
+              </a:rPr>
+              <a:t>동두천</a:t>
+            </a:r>
+            <a:endParaRPr lang="en-US" altLang="ko-KR" dirty="0">
+              <a:solidFill>
+                <a:schemeClr val="tx1"/>
+              </a:solidFill>
+            </a:endParaRPr>
+          </a:p>
+        </p:txBody>
+      </p:sp>
+      <p:sp>
+        <p:nvSpPr>
+          <p:cNvPr id="34" name="직사각형 33">
+            <a:extLst>
+              <a:ext uri="{FF2B5EF4-FFF2-40B4-BE49-F238E27FC236}">
+                <a16:creationId xmlns:a16="http://schemas.microsoft.com/office/drawing/2014/main" id="{3FAC4075-86E1-245E-DA0A-B3045F5E4359}"/>
+              </a:ext>
+            </a:extLst>
+          </p:cNvPr>
+          <p:cNvSpPr/>
+          <p:nvPr/>
+        </p:nvSpPr>
+        <p:spPr>
+          <a:xfrm>
+            <a:off x="9928691" y="4168156"/>
+            <a:ext cx="311544" cy="914400"/>
+          </a:xfrm>
+          <a:prstGeom prst="rect">
+            <a:avLst/>
+          </a:prstGeom>
+          <a:solidFill>
+            <a:schemeClr val="bg1"/>
+          </a:solidFill>
+          <a:ln>
+            <a:noFill/>
+          </a:ln>
+        </p:spPr>
+        <p:style>
+          <a:lnRef idx="2">
+            <a:schemeClr val="accent1">
+              <a:shade val="15000"/>
+            </a:schemeClr>
+          </a:lnRef>
+          <a:fillRef idx="1">
+            <a:schemeClr val="accent1"/>
+          </a:fillRef>
+          <a:effectRef idx="0">
+            <a:schemeClr val="accent1"/>
+          </a:effectRef>
+          <a:fontRef idx="minor">
+            <a:schemeClr val="lt1"/>
+          </a:fontRef>
+        </p:style>
+        <p:txBody>
+          <a:bodyPr rtlCol="0" anchor="ctr"/>
+          <a:lstStyle/>
+          <a:p>
+            <a:pPr algn="ctr"/>
+            <a:r>
+              <a:rPr lang="ko-KR" altLang="en-US" dirty="0">
+                <a:solidFill>
+                  <a:schemeClr val="tx1"/>
+                </a:solidFill>
+              </a:rPr>
+              <a:t>의왕시</a:t>
+            </a:r>
+            <a:endParaRPr lang="en-US" altLang="ko-KR" dirty="0">
+              <a:solidFill>
+                <a:schemeClr val="tx1"/>
+              </a:solidFill>
+            </a:endParaRPr>
+          </a:p>
+        </p:txBody>
+      </p:sp>
+      <p:sp>
+        <p:nvSpPr>
+          <p:cNvPr id="35" name="직사각형 34">
+            <a:extLst>
+              <a:ext uri="{FF2B5EF4-FFF2-40B4-BE49-F238E27FC236}">
+                <a16:creationId xmlns:a16="http://schemas.microsoft.com/office/drawing/2014/main" id="{5DD44CFF-97EC-FEDE-BECA-BD77408991ED}"/>
+              </a:ext>
+            </a:extLst>
+          </p:cNvPr>
+          <p:cNvSpPr/>
+          <p:nvPr/>
+        </p:nvSpPr>
+        <p:spPr>
+          <a:xfrm>
+            <a:off x="10267994" y="4168156"/>
+            <a:ext cx="311544" cy="914400"/>
+          </a:xfrm>
+          <a:prstGeom prst="rect">
+            <a:avLst/>
+          </a:prstGeom>
+          <a:solidFill>
+            <a:schemeClr val="bg1"/>
+          </a:solidFill>
+          <a:ln>
+            <a:noFill/>
+          </a:ln>
+        </p:spPr>
+        <p:style>
+          <a:lnRef idx="2">
+            <a:schemeClr val="accent1">
+              <a:shade val="15000"/>
+            </a:schemeClr>
+          </a:lnRef>
+          <a:fillRef idx="1">
+            <a:schemeClr val="accent1"/>
+          </a:fillRef>
+          <a:effectRef idx="0">
+            <a:schemeClr val="accent1"/>
+          </a:effectRef>
+          <a:fontRef idx="minor">
+            <a:schemeClr val="lt1"/>
+          </a:fontRef>
+        </p:style>
+        <p:txBody>
+          <a:bodyPr rtlCol="0" anchor="ctr"/>
+          <a:lstStyle/>
+          <a:p>
+            <a:pPr algn="ctr"/>
+            <a:r>
+              <a:rPr lang="ko-KR" altLang="en-US" dirty="0">
+                <a:solidFill>
+                  <a:schemeClr val="tx1"/>
+                </a:solidFill>
+              </a:rPr>
+              <a:t>군포시</a:t>
+            </a:r>
+            <a:endParaRPr lang="en-US" altLang="ko-KR" dirty="0">
+              <a:solidFill>
+                <a:schemeClr val="tx1"/>
+              </a:solidFill>
+            </a:endParaRPr>
+          </a:p>
+        </p:txBody>
+      </p:sp>
+      <p:sp>
+        <p:nvSpPr>
+          <p:cNvPr id="36" name="직사각형 35">
+            <a:extLst>
+              <a:ext uri="{FF2B5EF4-FFF2-40B4-BE49-F238E27FC236}">
+                <a16:creationId xmlns:a16="http://schemas.microsoft.com/office/drawing/2014/main" id="{CA3C3EA6-4095-FE66-A64F-CF28800B931A}"/>
+              </a:ext>
+            </a:extLst>
+          </p:cNvPr>
+          <p:cNvSpPr/>
+          <p:nvPr/>
+        </p:nvSpPr>
+        <p:spPr>
+          <a:xfrm>
+            <a:off x="10607297" y="4168156"/>
+            <a:ext cx="311544" cy="914400"/>
+          </a:xfrm>
+          <a:prstGeom prst="rect">
+            <a:avLst/>
+          </a:prstGeom>
+          <a:solidFill>
+            <a:schemeClr val="bg1"/>
+          </a:solidFill>
+          <a:ln>
+            <a:noFill/>
+          </a:ln>
+        </p:spPr>
+        <p:style>
+          <a:lnRef idx="2">
+            <a:schemeClr val="accent1">
+              <a:shade val="15000"/>
+            </a:schemeClr>
+          </a:lnRef>
+          <a:fillRef idx="1">
+            <a:schemeClr val="accent1"/>
+          </a:fillRef>
+          <a:effectRef idx="0">
+            <a:schemeClr val="accent1"/>
+          </a:effectRef>
+          <a:fontRef idx="minor">
+            <a:schemeClr val="lt1"/>
+          </a:fontRef>
+        </p:style>
+        <p:txBody>
+          <a:bodyPr rtlCol="0" anchor="ctr"/>
+          <a:lstStyle/>
+          <a:p>
+            <a:pPr algn="ctr"/>
+            <a:r>
+              <a:rPr lang="ko-KR" altLang="en-US" dirty="0">
+                <a:solidFill>
+                  <a:schemeClr val="tx1"/>
+                </a:solidFill>
+              </a:rPr>
+              <a:t>구리시</a:t>
+            </a:r>
+            <a:endParaRPr lang="en-US" altLang="ko-KR" dirty="0">
+              <a:solidFill>
+                <a:schemeClr val="tx1"/>
+              </a:solidFill>
+            </a:endParaRPr>
+          </a:p>
+        </p:txBody>
+      </p:sp>
+      <p:sp>
+        <p:nvSpPr>
+          <p:cNvPr id="37" name="직사각형 36">
+            <a:extLst>
+              <a:ext uri="{FF2B5EF4-FFF2-40B4-BE49-F238E27FC236}">
+                <a16:creationId xmlns:a16="http://schemas.microsoft.com/office/drawing/2014/main" id="{5648B884-B8BA-166E-84D3-7A26B39EB86A}"/>
+              </a:ext>
+            </a:extLst>
+          </p:cNvPr>
+          <p:cNvSpPr/>
+          <p:nvPr/>
+        </p:nvSpPr>
+        <p:spPr>
+          <a:xfrm>
+            <a:off x="10946608" y="4168156"/>
+            <a:ext cx="311544" cy="914400"/>
+          </a:xfrm>
+          <a:prstGeom prst="rect">
+            <a:avLst/>
+          </a:prstGeom>
+          <a:solidFill>
+            <a:schemeClr val="bg1"/>
+          </a:solidFill>
+          <a:ln>
+            <a:noFill/>
+          </a:ln>
+        </p:spPr>
+        <p:style>
+          <a:lnRef idx="2">
+            <a:schemeClr val="accent1">
+              <a:shade val="15000"/>
+            </a:schemeClr>
+          </a:lnRef>
+          <a:fillRef idx="1">
+            <a:schemeClr val="accent1"/>
+          </a:fillRef>
+          <a:effectRef idx="0">
+            <a:schemeClr val="accent1"/>
+          </a:effectRef>
+          <a:fontRef idx="minor">
+            <a:schemeClr val="lt1"/>
+          </a:fontRef>
+        </p:style>
+        <p:txBody>
+          <a:bodyPr rtlCol="0" anchor="ctr"/>
+          <a:lstStyle/>
+          <a:p>
+            <a:pPr algn="ctr"/>
+            <a:r>
+              <a:rPr lang="ko-KR" altLang="en-US" dirty="0">
+                <a:solidFill>
+                  <a:schemeClr val="tx1"/>
+                </a:solidFill>
+              </a:rPr>
+              <a:t>과천시</a:t>
+            </a:r>
+            <a:endParaRPr lang="en-US" altLang="ko-KR" dirty="0">
+              <a:solidFill>
+                <a:schemeClr val="tx1"/>
+              </a:solidFill>
+            </a:endParaRPr>
+          </a:p>
+        </p:txBody>
+      </p:sp>
+      <p:sp>
+        <p:nvSpPr>
+          <p:cNvPr id="38" name="직사각형 37">
+            <a:extLst>
+              <a:ext uri="{FF2B5EF4-FFF2-40B4-BE49-F238E27FC236}">
+                <a16:creationId xmlns:a16="http://schemas.microsoft.com/office/drawing/2014/main" id="{AE540F6D-BD3F-CF0C-D9AB-48093D9C6049}"/>
+              </a:ext>
+            </a:extLst>
+          </p:cNvPr>
+          <p:cNvSpPr/>
+          <p:nvPr/>
+        </p:nvSpPr>
+        <p:spPr>
+          <a:xfrm>
+            <a:off x="0" y="331998"/>
+            <a:ext cx="325120" cy="3665962"/>
+          </a:xfrm>
+          <a:prstGeom prst="rect">
+            <a:avLst/>
+          </a:prstGeom>
+          <a:solidFill>
+            <a:schemeClr val="bg1"/>
+          </a:solidFill>
+          <a:ln>
+            <a:noFill/>
+          </a:ln>
+        </p:spPr>
+        <p:style>
+          <a:lnRef idx="2">
+            <a:schemeClr val="accent1">
+              <a:shade val="15000"/>
+            </a:schemeClr>
+          </a:lnRef>
+          <a:fillRef idx="1">
+            <a:schemeClr val="accent1"/>
+          </a:fillRef>
+          <a:effectRef idx="0">
+            <a:schemeClr val="accent1"/>
+          </a:effectRef>
+          <a:fontRef idx="minor">
+            <a:schemeClr val="lt1"/>
+          </a:fontRef>
+        </p:style>
+        <p:txBody>
+          <a:bodyPr rtlCol="0" anchor="ctr"/>
+          <a:lstStyle/>
+          <a:p>
+            <a:pPr algn="ctr"/>
+            <a:endParaRPr lang="ko-KR" altLang="en-US"/>
+          </a:p>
+        </p:txBody>
+      </p:sp>
       <p:pic>
         <p:nvPicPr>
-          <p:cNvPr id="3" name="그림 2">
-            <a:extLst>
-              <a:ext uri="{FF2B5EF4-FFF2-40B4-BE49-F238E27FC236}">
-                <a16:creationId xmlns:a16="http://schemas.microsoft.com/office/drawing/2014/main" id="{34DEEFA5-5FF8-145F-5FB2-7435106F92B2}"/>
+          <p:cNvPr id="6" name="그림 5">
+            <a:extLst>
+              <a:ext uri="{FF2B5EF4-FFF2-40B4-BE49-F238E27FC236}">
+                <a16:creationId xmlns:a16="http://schemas.microsoft.com/office/drawing/2014/main" id="{E0D8D61A-90CD-3A4E-F07C-5A8037327A2A}"/>
               </a:ext>
             </a:extLst>
           </p:cNvPr>
@@ -3828,8 +5923,8 @@
         </p:blipFill>
         <p:spPr>
           <a:xfrm>
-            <a:off x="0" y="230275"/>
-            <a:ext cx="12192000" cy="6397450"/>
+            <a:off x="22308" y="634910"/>
+            <a:ext cx="313268" cy="2672170"/>
           </a:xfrm>
           <a:prstGeom prst="rect">
             <a:avLst/>
@@ -3838,10 +5933,10 @@
       </p:pic>
       <p:sp>
         <p:nvSpPr>
-          <p:cNvPr id="7" name="직사각형 6">
-            <a:extLst>
-              <a:ext uri="{FF2B5EF4-FFF2-40B4-BE49-F238E27FC236}">
-                <a16:creationId xmlns:a16="http://schemas.microsoft.com/office/drawing/2014/main" id="{06DC0279-F7AB-64B3-069E-2B9E17C0E185}"/>
+          <p:cNvPr id="39" name="직사각형 38">
+            <a:extLst>
+              <a:ext uri="{FF2B5EF4-FFF2-40B4-BE49-F238E27FC236}">
+                <a16:creationId xmlns:a16="http://schemas.microsoft.com/office/drawing/2014/main" id="{B0079EDF-4D70-85CF-37A3-DCB8014A23E6}"/>
               </a:ext>
             </a:extLst>
           </p:cNvPr>
@@ -3850,8 +5945,8 @@
         </p:nvSpPr>
         <p:spPr>
           <a:xfrm>
-            <a:off x="674954" y="4147078"/>
-            <a:ext cx="10717226" cy="2604242"/>
+            <a:off x="11866880" y="296438"/>
+            <a:ext cx="325120" cy="3665962"/>
           </a:xfrm>
           <a:prstGeom prst="rect">
             <a:avLst/>
@@ -3888,12 +5983,42 @@
           </a:p>
         </p:txBody>
       </p:sp>
-      <p:sp>
-        <p:nvSpPr>
-          <p:cNvPr id="2" name="직사각형 1">
-            <a:extLst>
-              <a:ext uri="{FF2B5EF4-FFF2-40B4-BE49-F238E27FC236}">
-                <a16:creationId xmlns:a16="http://schemas.microsoft.com/office/drawing/2014/main" id="{9216B4D2-8FB7-04E4-0952-1F5E51C8B145}"/>
+      <p:pic>
+        <p:nvPicPr>
+          <p:cNvPr id="42" name="그림 41">
+            <a:extLst>
+              <a:ext uri="{FF2B5EF4-FFF2-40B4-BE49-F238E27FC236}">
+                <a16:creationId xmlns:a16="http://schemas.microsoft.com/office/drawing/2014/main" id="{499D8763-953E-6FF1-89D3-7B1CCA44EFC5}"/>
+              </a:ext>
+            </a:extLst>
+          </p:cNvPr>
+          <p:cNvPicPr>
+            <a:picLocks noChangeAspect="1"/>
+          </p:cNvPicPr>
+          <p:nvPr/>
+        </p:nvPicPr>
+        <p:blipFill>
+          <a:blip r:embed="rId4"/>
+          <a:stretch>
+            <a:fillRect/>
+          </a:stretch>
+        </p:blipFill>
+        <p:spPr>
+          <a:xfrm>
+            <a:off x="11903246" y="660310"/>
+            <a:ext cx="278594" cy="2350265"/>
+          </a:xfrm>
+          <a:prstGeom prst="rect">
+            <a:avLst/>
+          </a:prstGeom>
+        </p:spPr>
+      </p:pic>
+      <p:sp>
+        <p:nvSpPr>
+          <p:cNvPr id="44" name="직사각형 43">
+            <a:extLst>
+              <a:ext uri="{FF2B5EF4-FFF2-40B4-BE49-F238E27FC236}">
+                <a16:creationId xmlns:a16="http://schemas.microsoft.com/office/drawing/2014/main" id="{0F5B2487-BD00-BA96-6782-0B72C19B5F91}"/>
               </a:ext>
             </a:extLst>
           </p:cNvPr>
@@ -3902,8 +6027,8 @@
         </p:nvSpPr>
         <p:spPr>
           <a:xfrm>
-            <a:off x="767510" y="4168156"/>
-            <a:ext cx="311544" cy="914400"/>
+            <a:off x="7563958" y="660310"/>
+            <a:ext cx="2364733" cy="1198970"/>
           </a:xfrm>
           <a:prstGeom prst="rect">
             <a:avLst/>
@@ -3912,7 +6037,9 @@
             <a:schemeClr val="bg1"/>
           </a:solidFill>
           <a:ln>
-            <a:noFill/>
+            <a:solidFill>
+              <a:schemeClr val="tx1"/>
+            </a:solidFill>
           </a:ln>
         </p:spPr>
         <p:style>
@@ -3936,55 +6063,150 @@
           <a:lstStyle/>
           <a:p>
             <a:pPr algn="ctr"/>
-            <a:r>
-              <a:rPr lang="ko-KR" altLang="en-US" dirty="0">
-                <a:solidFill>
-                  <a:schemeClr val="tx1"/>
-                </a:solidFill>
-              </a:rPr>
-              <a:t>화</a:t>
-            </a:r>
-            <a:endParaRPr lang="en-US" altLang="ko-KR" dirty="0">
-              <a:solidFill>
-                <a:schemeClr val="tx1"/>
-              </a:solidFill>
-            </a:endParaRPr>
-          </a:p>
-          <a:p>
-            <a:pPr algn="ctr"/>
-            <a:r>
-              <a:rPr lang="ko-KR" altLang="en-US" dirty="0">
-                <a:solidFill>
-                  <a:schemeClr val="tx1"/>
-                </a:solidFill>
-              </a:rPr>
-              <a:t>성</a:t>
-            </a:r>
-            <a:endParaRPr lang="en-US" altLang="ko-KR" dirty="0">
-              <a:solidFill>
-                <a:schemeClr val="tx1"/>
-              </a:solidFill>
-            </a:endParaRPr>
-          </a:p>
-          <a:p>
-            <a:pPr algn="ctr"/>
-            <a:r>
-              <a:rPr lang="ko-KR" altLang="en-US" dirty="0">
-                <a:solidFill>
-                  <a:schemeClr val="tx1"/>
-                </a:solidFill>
-              </a:rPr>
-              <a:t>시</a:t>
-            </a:r>
-          </a:p>
-        </p:txBody>
-      </p:sp>
-      <p:sp>
-        <p:nvSpPr>
-          <p:cNvPr id="8" name="직사각형 7">
-            <a:extLst>
-              <a:ext uri="{FF2B5EF4-FFF2-40B4-BE49-F238E27FC236}">
-                <a16:creationId xmlns:a16="http://schemas.microsoft.com/office/drawing/2014/main" id="{1456A6A9-C0F7-9875-8CFB-786AA5E42F21}"/>
+            <a:endParaRPr lang="ko-KR" altLang="en-US"/>
+          </a:p>
+        </p:txBody>
+      </p:sp>
+      <p:pic>
+        <p:nvPicPr>
+          <p:cNvPr id="5" name="그림 4">
+            <a:extLst>
+              <a:ext uri="{FF2B5EF4-FFF2-40B4-BE49-F238E27FC236}">
+                <a16:creationId xmlns:a16="http://schemas.microsoft.com/office/drawing/2014/main" id="{3211E6FC-B379-CAC9-784B-D721CCACA9CA}"/>
+              </a:ext>
+            </a:extLst>
+          </p:cNvPr>
+          <p:cNvPicPr>
+            <a:picLocks noChangeAspect="1"/>
+          </p:cNvPicPr>
+          <p:nvPr/>
+        </p:nvPicPr>
+        <p:blipFill>
+          <a:blip r:embed="rId5"/>
+          <a:srcRect l="52671" r="38769"/>
+          <a:stretch>
+            <a:fillRect/>
+          </a:stretch>
+        </p:blipFill>
+        <p:spPr>
+          <a:xfrm>
+            <a:off x="7654331" y="755484"/>
+            <a:ext cx="392061" cy="425456"/>
+          </a:xfrm>
+          <a:prstGeom prst="rect">
+            <a:avLst/>
+          </a:prstGeom>
+          <a:ln>
+            <a:solidFill>
+              <a:schemeClr val="tx1"/>
+            </a:solidFill>
+          </a:ln>
+        </p:spPr>
+      </p:pic>
+      <p:pic>
+        <p:nvPicPr>
+          <p:cNvPr id="43" name="그림 42">
+            <a:extLst>
+              <a:ext uri="{FF2B5EF4-FFF2-40B4-BE49-F238E27FC236}">
+                <a16:creationId xmlns:a16="http://schemas.microsoft.com/office/drawing/2014/main" id="{57455D0D-CCC9-4D5D-53EB-80E7BF72658D}"/>
+              </a:ext>
+            </a:extLst>
+          </p:cNvPr>
+          <p:cNvPicPr>
+            <a:picLocks noChangeAspect="1"/>
+          </p:cNvPicPr>
+          <p:nvPr/>
+        </p:nvPicPr>
+        <p:blipFill>
+          <a:blip r:embed="rId5"/>
+          <a:srcRect r="91439"/>
+          <a:stretch>
+            <a:fillRect/>
+          </a:stretch>
+        </p:blipFill>
+        <p:spPr>
+          <a:xfrm>
+            <a:off x="7654330" y="1353271"/>
+            <a:ext cx="392061" cy="425456"/>
+          </a:xfrm>
+          <a:prstGeom prst="rect">
+            <a:avLst/>
+          </a:prstGeom>
+          <a:ln>
+            <a:solidFill>
+              <a:schemeClr val="tx1"/>
+            </a:solidFill>
+          </a:ln>
+        </p:spPr>
+      </p:pic>
+      <p:pic>
+        <p:nvPicPr>
+          <p:cNvPr id="47" name="그림 46">
+            <a:extLst>
+              <a:ext uri="{FF2B5EF4-FFF2-40B4-BE49-F238E27FC236}">
+                <a16:creationId xmlns:a16="http://schemas.microsoft.com/office/drawing/2014/main" id="{8C348F7F-A727-F616-BE92-E9A3EB80F01A}"/>
+              </a:ext>
+            </a:extLst>
+          </p:cNvPr>
+          <p:cNvPicPr>
+            <a:picLocks noChangeAspect="1"/>
+          </p:cNvPicPr>
+          <p:nvPr/>
+        </p:nvPicPr>
+        <p:blipFill>
+          <a:blip r:embed="rId3"/>
+          <a:srcRect t="36283"/>
+          <a:stretch>
+            <a:fillRect/>
+          </a:stretch>
+        </p:blipFill>
+        <p:spPr>
+          <a:xfrm rot="5400000">
+            <a:off x="8858141" y="177362"/>
+            <a:ext cx="291019" cy="1581700"/>
+          </a:xfrm>
+          <a:prstGeom prst="rect">
+            <a:avLst/>
+          </a:prstGeom>
+        </p:spPr>
+      </p:pic>
+      <p:pic>
+        <p:nvPicPr>
+          <p:cNvPr id="48" name="그림 47">
+            <a:extLst>
+              <a:ext uri="{FF2B5EF4-FFF2-40B4-BE49-F238E27FC236}">
+                <a16:creationId xmlns:a16="http://schemas.microsoft.com/office/drawing/2014/main" id="{936CA95C-D021-044D-4AE7-45C56A838548}"/>
+              </a:ext>
+            </a:extLst>
+          </p:cNvPr>
+          <p:cNvPicPr>
+            <a:picLocks noChangeAspect="1"/>
+          </p:cNvPicPr>
+          <p:nvPr/>
+        </p:nvPicPr>
+        <p:blipFill>
+          <a:blip r:embed="rId4"/>
+          <a:srcRect b="32787"/>
+          <a:stretch>
+            <a:fillRect/>
+          </a:stretch>
+        </p:blipFill>
+        <p:spPr>
+          <a:xfrm rot="16200000">
+            <a:off x="8865356" y="795835"/>
+            <a:ext cx="278594" cy="1579696"/>
+          </a:xfrm>
+          <a:prstGeom prst="rect">
+            <a:avLst/>
+          </a:prstGeom>
+        </p:spPr>
+      </p:pic>
+      <p:sp>
+        <p:nvSpPr>
+          <p:cNvPr id="51" name="직사각형 50">
+            <a:extLst>
+              <a:ext uri="{FF2B5EF4-FFF2-40B4-BE49-F238E27FC236}">
+                <a16:creationId xmlns:a16="http://schemas.microsoft.com/office/drawing/2014/main" id="{236A7CFD-8A6A-4E71-6FDD-0AEFF8308126}"/>
               </a:ext>
             </a:extLst>
           </p:cNvPr>
@@ -3993,14 +6215,14 @@
         </p:nvSpPr>
         <p:spPr>
           <a:xfrm>
-            <a:off x="1106813" y="4168156"/>
-            <a:ext cx="311544" cy="914400"/>
-          </a:xfrm>
-          <a:prstGeom prst="rect">
-            <a:avLst/>
-          </a:prstGeom>
-          <a:solidFill>
-            <a:schemeClr val="bg1"/>
+            <a:off x="7719322" y="813467"/>
+            <a:ext cx="274652" cy="277477"/>
+          </a:xfrm>
+          <a:prstGeom prst="rect">
+            <a:avLst/>
+          </a:prstGeom>
+          <a:solidFill>
+            <a:srgbClr val="2166AC"/>
           </a:solidFill>
           <a:ln>
             <a:noFill/>
@@ -4027,1855 +6249,7 @@
           <a:lstStyle/>
           <a:p>
             <a:pPr algn="ctr"/>
-            <a:r>
-              <a:rPr lang="ko-KR" altLang="en-US" dirty="0">
-                <a:solidFill>
-                  <a:schemeClr val="tx1"/>
-                </a:solidFill>
-              </a:rPr>
-              <a:t>평택시</a:t>
-            </a:r>
-          </a:p>
-        </p:txBody>
-      </p:sp>
-      <p:sp>
-        <p:nvSpPr>
-          <p:cNvPr id="9" name="직사각형 8">
-            <a:extLst>
-              <a:ext uri="{FF2B5EF4-FFF2-40B4-BE49-F238E27FC236}">
-                <a16:creationId xmlns:a16="http://schemas.microsoft.com/office/drawing/2014/main" id="{E5A2525E-393C-772F-7C8C-659A1C40E318}"/>
-              </a:ext>
-            </a:extLst>
-          </p:cNvPr>
-          <p:cNvSpPr/>
-          <p:nvPr/>
-        </p:nvSpPr>
-        <p:spPr>
-          <a:xfrm>
-            <a:off x="1446116" y="4168156"/>
-            <a:ext cx="311544" cy="914400"/>
-          </a:xfrm>
-          <a:prstGeom prst="rect">
-            <a:avLst/>
-          </a:prstGeom>
-          <a:solidFill>
-            <a:schemeClr val="bg1"/>
-          </a:solidFill>
-          <a:ln>
-            <a:noFill/>
-          </a:ln>
-        </p:spPr>
-        <p:style>
-          <a:lnRef idx="2">
-            <a:schemeClr val="accent1">
-              <a:shade val="15000"/>
-            </a:schemeClr>
-          </a:lnRef>
-          <a:fillRef idx="1">
-            <a:schemeClr val="accent1"/>
-          </a:fillRef>
-          <a:effectRef idx="0">
-            <a:schemeClr val="accent1"/>
-          </a:effectRef>
-          <a:fontRef idx="minor">
-            <a:schemeClr val="lt1"/>
-          </a:fontRef>
-        </p:style>
-        <p:txBody>
-          <a:bodyPr rtlCol="0" anchor="ctr"/>
-          <a:lstStyle/>
-          <a:p>
-            <a:pPr algn="ctr"/>
-            <a:r>
-              <a:rPr lang="ko-KR" altLang="en-US" dirty="0">
-                <a:solidFill>
-                  <a:schemeClr val="tx1"/>
-                </a:solidFill>
-              </a:rPr>
-              <a:t>파주시</a:t>
-            </a:r>
-          </a:p>
-        </p:txBody>
-      </p:sp>
-      <p:sp>
-        <p:nvSpPr>
-          <p:cNvPr id="10" name="직사각형 9">
-            <a:extLst>
-              <a:ext uri="{FF2B5EF4-FFF2-40B4-BE49-F238E27FC236}">
-                <a16:creationId xmlns:a16="http://schemas.microsoft.com/office/drawing/2014/main" id="{E85E50B6-768E-9FB1-9E76-CA250CF23CB8}"/>
-              </a:ext>
-            </a:extLst>
-          </p:cNvPr>
-          <p:cNvSpPr/>
-          <p:nvPr/>
-        </p:nvSpPr>
-        <p:spPr>
-          <a:xfrm>
-            <a:off x="1785419" y="4168156"/>
-            <a:ext cx="311544" cy="914400"/>
-          </a:xfrm>
-          <a:prstGeom prst="rect">
-            <a:avLst/>
-          </a:prstGeom>
-          <a:solidFill>
-            <a:schemeClr val="bg1"/>
-          </a:solidFill>
-          <a:ln>
-            <a:noFill/>
-          </a:ln>
-        </p:spPr>
-        <p:style>
-          <a:lnRef idx="2">
-            <a:schemeClr val="accent1">
-              <a:shade val="15000"/>
-            </a:schemeClr>
-          </a:lnRef>
-          <a:fillRef idx="1">
-            <a:schemeClr val="accent1"/>
-          </a:fillRef>
-          <a:effectRef idx="0">
-            <a:schemeClr val="accent1"/>
-          </a:effectRef>
-          <a:fontRef idx="minor">
-            <a:schemeClr val="lt1"/>
-          </a:fontRef>
-        </p:style>
-        <p:txBody>
-          <a:bodyPr rtlCol="0" anchor="ctr"/>
-          <a:lstStyle/>
-          <a:p>
-            <a:pPr algn="ctr"/>
-            <a:r>
-              <a:rPr lang="ko-KR" altLang="en-US" dirty="0">
-                <a:solidFill>
-                  <a:schemeClr val="tx1"/>
-                </a:solidFill>
-              </a:rPr>
-              <a:t>여주시</a:t>
-            </a:r>
-          </a:p>
-        </p:txBody>
-      </p:sp>
-      <p:sp>
-        <p:nvSpPr>
-          <p:cNvPr id="11" name="직사각형 10">
-            <a:extLst>
-              <a:ext uri="{FF2B5EF4-FFF2-40B4-BE49-F238E27FC236}">
-                <a16:creationId xmlns:a16="http://schemas.microsoft.com/office/drawing/2014/main" id="{71E1C45E-F8FD-D74A-AD51-C475841FBFB5}"/>
-              </a:ext>
-            </a:extLst>
-          </p:cNvPr>
-          <p:cNvSpPr/>
-          <p:nvPr/>
-        </p:nvSpPr>
-        <p:spPr>
-          <a:xfrm>
-            <a:off x="2124722" y="4168156"/>
-            <a:ext cx="311544" cy="914400"/>
-          </a:xfrm>
-          <a:prstGeom prst="rect">
-            <a:avLst/>
-          </a:prstGeom>
-          <a:solidFill>
-            <a:schemeClr val="bg1"/>
-          </a:solidFill>
-          <a:ln>
-            <a:noFill/>
-          </a:ln>
-        </p:spPr>
-        <p:style>
-          <a:lnRef idx="2">
-            <a:schemeClr val="accent1">
-              <a:shade val="15000"/>
-            </a:schemeClr>
-          </a:lnRef>
-          <a:fillRef idx="1">
-            <a:schemeClr val="accent1"/>
-          </a:fillRef>
-          <a:effectRef idx="0">
-            <a:schemeClr val="accent1"/>
-          </a:effectRef>
-          <a:fontRef idx="minor">
-            <a:schemeClr val="lt1"/>
-          </a:fontRef>
-        </p:style>
-        <p:txBody>
-          <a:bodyPr rtlCol="0" anchor="ctr"/>
-          <a:lstStyle/>
-          <a:p>
-            <a:pPr algn="ctr"/>
-            <a:r>
-              <a:rPr lang="ko-KR" altLang="en-US" dirty="0">
-                <a:solidFill>
-                  <a:schemeClr val="tx1"/>
-                </a:solidFill>
-              </a:rPr>
-              <a:t>이천시</a:t>
-            </a:r>
-          </a:p>
-        </p:txBody>
-      </p:sp>
-      <p:sp>
-        <p:nvSpPr>
-          <p:cNvPr id="12" name="직사각형 11">
-            <a:extLst>
-              <a:ext uri="{FF2B5EF4-FFF2-40B4-BE49-F238E27FC236}">
-                <a16:creationId xmlns:a16="http://schemas.microsoft.com/office/drawing/2014/main" id="{57B11DB0-78F7-23F6-6B36-1DE20D534F24}"/>
-              </a:ext>
-            </a:extLst>
-          </p:cNvPr>
-          <p:cNvSpPr/>
-          <p:nvPr/>
-        </p:nvSpPr>
-        <p:spPr>
-          <a:xfrm>
-            <a:off x="2464025" y="4168156"/>
-            <a:ext cx="311544" cy="914400"/>
-          </a:xfrm>
-          <a:prstGeom prst="rect">
-            <a:avLst/>
-          </a:prstGeom>
-          <a:solidFill>
-            <a:schemeClr val="bg1"/>
-          </a:solidFill>
-          <a:ln>
-            <a:noFill/>
-          </a:ln>
-        </p:spPr>
-        <p:style>
-          <a:lnRef idx="2">
-            <a:schemeClr val="accent1">
-              <a:shade val="15000"/>
-            </a:schemeClr>
-          </a:lnRef>
-          <a:fillRef idx="1">
-            <a:schemeClr val="accent1"/>
-          </a:fillRef>
-          <a:effectRef idx="0">
-            <a:schemeClr val="accent1"/>
-          </a:effectRef>
-          <a:fontRef idx="minor">
-            <a:schemeClr val="lt1"/>
-          </a:fontRef>
-        </p:style>
-        <p:txBody>
-          <a:bodyPr rtlCol="0" anchor="ctr"/>
-          <a:lstStyle/>
-          <a:p>
-            <a:pPr algn="ctr"/>
-            <a:r>
-              <a:rPr lang="ko-KR" altLang="en-US" dirty="0">
-                <a:solidFill>
-                  <a:schemeClr val="tx1"/>
-                </a:solidFill>
-              </a:rPr>
-              <a:t>안성시</a:t>
-            </a:r>
-            <a:endParaRPr lang="en-US" altLang="ko-KR" dirty="0">
-              <a:solidFill>
-                <a:schemeClr val="tx1"/>
-              </a:solidFill>
-            </a:endParaRPr>
-          </a:p>
-        </p:txBody>
-      </p:sp>
-      <p:sp>
-        <p:nvSpPr>
-          <p:cNvPr id="13" name="직사각형 12">
-            <a:extLst>
-              <a:ext uri="{FF2B5EF4-FFF2-40B4-BE49-F238E27FC236}">
-                <a16:creationId xmlns:a16="http://schemas.microsoft.com/office/drawing/2014/main" id="{C8BD056F-70B3-B4CA-6F2C-4221543F053B}"/>
-              </a:ext>
-            </a:extLst>
-          </p:cNvPr>
-          <p:cNvSpPr/>
-          <p:nvPr/>
-        </p:nvSpPr>
-        <p:spPr>
-          <a:xfrm>
-            <a:off x="2803328" y="4168156"/>
-            <a:ext cx="311544" cy="914400"/>
-          </a:xfrm>
-          <a:prstGeom prst="rect">
-            <a:avLst/>
-          </a:prstGeom>
-          <a:solidFill>
-            <a:schemeClr val="bg1"/>
-          </a:solidFill>
-          <a:ln>
-            <a:noFill/>
-          </a:ln>
-        </p:spPr>
-        <p:style>
-          <a:lnRef idx="2">
-            <a:schemeClr val="accent1">
-              <a:shade val="15000"/>
-            </a:schemeClr>
-          </a:lnRef>
-          <a:fillRef idx="1">
-            <a:schemeClr val="accent1"/>
-          </a:fillRef>
-          <a:effectRef idx="0">
-            <a:schemeClr val="accent1"/>
-          </a:effectRef>
-          <a:fontRef idx="minor">
-            <a:schemeClr val="lt1"/>
-          </a:fontRef>
-        </p:style>
-        <p:txBody>
-          <a:bodyPr rtlCol="0" anchor="ctr"/>
-          <a:lstStyle/>
-          <a:p>
-            <a:pPr algn="ctr"/>
-            <a:r>
-              <a:rPr lang="ko-KR" altLang="en-US" dirty="0">
-                <a:solidFill>
-                  <a:schemeClr val="tx1"/>
-                </a:solidFill>
-              </a:rPr>
-              <a:t>용인시</a:t>
-            </a:r>
-            <a:endParaRPr lang="en-US" altLang="ko-KR" dirty="0">
-              <a:solidFill>
-                <a:schemeClr val="tx1"/>
-              </a:solidFill>
-            </a:endParaRPr>
-          </a:p>
-        </p:txBody>
-      </p:sp>
-      <p:sp>
-        <p:nvSpPr>
-          <p:cNvPr id="14" name="직사각형 13">
-            <a:extLst>
-              <a:ext uri="{FF2B5EF4-FFF2-40B4-BE49-F238E27FC236}">
-                <a16:creationId xmlns:a16="http://schemas.microsoft.com/office/drawing/2014/main" id="{CD71F94E-D328-886F-4F3A-709885C2F890}"/>
-              </a:ext>
-            </a:extLst>
-          </p:cNvPr>
-          <p:cNvSpPr/>
-          <p:nvPr/>
-        </p:nvSpPr>
-        <p:spPr>
-          <a:xfrm>
-            <a:off x="3142631" y="4168156"/>
-            <a:ext cx="311544" cy="914400"/>
-          </a:xfrm>
-          <a:prstGeom prst="rect">
-            <a:avLst/>
-          </a:prstGeom>
-          <a:solidFill>
-            <a:schemeClr val="bg1"/>
-          </a:solidFill>
-          <a:ln>
-            <a:noFill/>
-          </a:ln>
-        </p:spPr>
-        <p:style>
-          <a:lnRef idx="2">
-            <a:schemeClr val="accent1">
-              <a:shade val="15000"/>
-            </a:schemeClr>
-          </a:lnRef>
-          <a:fillRef idx="1">
-            <a:schemeClr val="accent1"/>
-          </a:fillRef>
-          <a:effectRef idx="0">
-            <a:schemeClr val="accent1"/>
-          </a:effectRef>
-          <a:fontRef idx="minor">
-            <a:schemeClr val="lt1"/>
-          </a:fontRef>
-        </p:style>
-        <p:txBody>
-          <a:bodyPr rtlCol="0" anchor="ctr"/>
-          <a:lstStyle/>
-          <a:p>
-            <a:pPr algn="ctr"/>
-            <a:r>
-              <a:rPr lang="ko-KR" altLang="en-US" dirty="0">
-                <a:solidFill>
-                  <a:schemeClr val="tx1"/>
-                </a:solidFill>
-              </a:rPr>
-              <a:t>포천시</a:t>
-            </a:r>
-            <a:endParaRPr lang="en-US" altLang="ko-KR" dirty="0">
-              <a:solidFill>
-                <a:schemeClr val="tx1"/>
-              </a:solidFill>
-            </a:endParaRPr>
-          </a:p>
-        </p:txBody>
-      </p:sp>
-      <p:sp>
-        <p:nvSpPr>
-          <p:cNvPr id="15" name="직사각형 14">
-            <a:extLst>
-              <a:ext uri="{FF2B5EF4-FFF2-40B4-BE49-F238E27FC236}">
-                <a16:creationId xmlns:a16="http://schemas.microsoft.com/office/drawing/2014/main" id="{D7054F85-F150-AA02-D2FA-42B9083C3075}"/>
-              </a:ext>
-            </a:extLst>
-          </p:cNvPr>
-          <p:cNvSpPr/>
-          <p:nvPr/>
-        </p:nvSpPr>
-        <p:spPr>
-          <a:xfrm>
-            <a:off x="3481934" y="4168156"/>
-            <a:ext cx="311544" cy="914400"/>
-          </a:xfrm>
-          <a:prstGeom prst="rect">
-            <a:avLst/>
-          </a:prstGeom>
-          <a:solidFill>
-            <a:schemeClr val="bg1"/>
-          </a:solidFill>
-          <a:ln>
-            <a:noFill/>
-          </a:ln>
-        </p:spPr>
-        <p:style>
-          <a:lnRef idx="2">
-            <a:schemeClr val="accent1">
-              <a:shade val="15000"/>
-            </a:schemeClr>
-          </a:lnRef>
-          <a:fillRef idx="1">
-            <a:schemeClr val="accent1"/>
-          </a:fillRef>
-          <a:effectRef idx="0">
-            <a:schemeClr val="accent1"/>
-          </a:effectRef>
-          <a:fontRef idx="minor">
-            <a:schemeClr val="lt1"/>
-          </a:fontRef>
-        </p:style>
-        <p:txBody>
-          <a:bodyPr rtlCol="0" anchor="ctr"/>
-          <a:lstStyle/>
-          <a:p>
-            <a:pPr algn="ctr"/>
-            <a:r>
-              <a:rPr lang="ko-KR" altLang="en-US" dirty="0">
-                <a:solidFill>
-                  <a:schemeClr val="tx1"/>
-                </a:solidFill>
-              </a:rPr>
-              <a:t>양평군</a:t>
-            </a:r>
-            <a:endParaRPr lang="en-US" altLang="ko-KR" dirty="0">
-              <a:solidFill>
-                <a:schemeClr val="tx1"/>
-              </a:solidFill>
-            </a:endParaRPr>
-          </a:p>
-        </p:txBody>
-      </p:sp>
-      <p:sp>
-        <p:nvSpPr>
-          <p:cNvPr id="16" name="직사각형 15">
-            <a:extLst>
-              <a:ext uri="{FF2B5EF4-FFF2-40B4-BE49-F238E27FC236}">
-                <a16:creationId xmlns:a16="http://schemas.microsoft.com/office/drawing/2014/main" id="{30D2576F-21D8-C914-E7DC-297E904233B6}"/>
-              </a:ext>
-            </a:extLst>
-          </p:cNvPr>
-          <p:cNvSpPr/>
-          <p:nvPr/>
-        </p:nvSpPr>
-        <p:spPr>
-          <a:xfrm>
-            <a:off x="3821237" y="4168156"/>
-            <a:ext cx="311544" cy="914400"/>
-          </a:xfrm>
-          <a:prstGeom prst="rect">
-            <a:avLst/>
-          </a:prstGeom>
-          <a:solidFill>
-            <a:schemeClr val="bg1"/>
-          </a:solidFill>
-          <a:ln>
-            <a:noFill/>
-          </a:ln>
-        </p:spPr>
-        <p:style>
-          <a:lnRef idx="2">
-            <a:schemeClr val="accent1">
-              <a:shade val="15000"/>
-            </a:schemeClr>
-          </a:lnRef>
-          <a:fillRef idx="1">
-            <a:schemeClr val="accent1"/>
-          </a:fillRef>
-          <a:effectRef idx="0">
-            <a:schemeClr val="accent1"/>
-          </a:effectRef>
-          <a:fontRef idx="minor">
-            <a:schemeClr val="lt1"/>
-          </a:fontRef>
-        </p:style>
-        <p:txBody>
-          <a:bodyPr rtlCol="0" anchor="ctr"/>
-          <a:lstStyle/>
-          <a:p>
-            <a:pPr algn="ctr"/>
-            <a:r>
-              <a:rPr lang="ko-KR" altLang="en-US" dirty="0">
-                <a:solidFill>
-                  <a:schemeClr val="tx1"/>
-                </a:solidFill>
-              </a:rPr>
-              <a:t>연천군</a:t>
-            </a:r>
-            <a:endParaRPr lang="en-US" altLang="ko-KR" dirty="0">
-              <a:solidFill>
-                <a:schemeClr val="tx1"/>
-              </a:solidFill>
-            </a:endParaRPr>
-          </a:p>
-        </p:txBody>
-      </p:sp>
-      <p:sp>
-        <p:nvSpPr>
-          <p:cNvPr id="17" name="직사각형 16">
-            <a:extLst>
-              <a:ext uri="{FF2B5EF4-FFF2-40B4-BE49-F238E27FC236}">
-                <a16:creationId xmlns:a16="http://schemas.microsoft.com/office/drawing/2014/main" id="{765348F2-1883-DBDA-AE9F-1AD0CB99A521}"/>
-              </a:ext>
-            </a:extLst>
-          </p:cNvPr>
-          <p:cNvSpPr/>
-          <p:nvPr/>
-        </p:nvSpPr>
-        <p:spPr>
-          <a:xfrm>
-            <a:off x="4160540" y="4168156"/>
-            <a:ext cx="311544" cy="914400"/>
-          </a:xfrm>
-          <a:prstGeom prst="rect">
-            <a:avLst/>
-          </a:prstGeom>
-          <a:solidFill>
-            <a:schemeClr val="bg1"/>
-          </a:solidFill>
-          <a:ln>
-            <a:noFill/>
-          </a:ln>
-        </p:spPr>
-        <p:style>
-          <a:lnRef idx="2">
-            <a:schemeClr val="accent1">
-              <a:shade val="15000"/>
-            </a:schemeClr>
-          </a:lnRef>
-          <a:fillRef idx="1">
-            <a:schemeClr val="accent1"/>
-          </a:fillRef>
-          <a:effectRef idx="0">
-            <a:schemeClr val="accent1"/>
-          </a:effectRef>
-          <a:fontRef idx="minor">
-            <a:schemeClr val="lt1"/>
-          </a:fontRef>
-        </p:style>
-        <p:txBody>
-          <a:bodyPr rtlCol="0" anchor="ctr"/>
-          <a:lstStyle/>
-          <a:p>
-            <a:pPr algn="ctr"/>
-            <a:r>
-              <a:rPr lang="ko-KR" altLang="en-US" dirty="0">
-                <a:solidFill>
-                  <a:schemeClr val="tx1"/>
-                </a:solidFill>
-              </a:rPr>
-              <a:t>김포시</a:t>
-            </a:r>
-            <a:endParaRPr lang="en-US" altLang="ko-KR" dirty="0">
-              <a:solidFill>
-                <a:schemeClr val="tx1"/>
-              </a:solidFill>
-            </a:endParaRPr>
-          </a:p>
-        </p:txBody>
-      </p:sp>
-      <p:sp>
-        <p:nvSpPr>
-          <p:cNvPr id="18" name="직사각형 17">
-            <a:extLst>
-              <a:ext uri="{FF2B5EF4-FFF2-40B4-BE49-F238E27FC236}">
-                <a16:creationId xmlns:a16="http://schemas.microsoft.com/office/drawing/2014/main" id="{24C6E699-B7C8-9E29-2CDD-6F465693D75A}"/>
-              </a:ext>
-            </a:extLst>
-          </p:cNvPr>
-          <p:cNvSpPr/>
-          <p:nvPr/>
-        </p:nvSpPr>
-        <p:spPr>
-          <a:xfrm>
-            <a:off x="4499843" y="4168156"/>
-            <a:ext cx="311544" cy="914400"/>
-          </a:xfrm>
-          <a:prstGeom prst="rect">
-            <a:avLst/>
-          </a:prstGeom>
-          <a:solidFill>
-            <a:schemeClr val="bg1"/>
-          </a:solidFill>
-          <a:ln>
-            <a:noFill/>
-          </a:ln>
-        </p:spPr>
-        <p:style>
-          <a:lnRef idx="2">
-            <a:schemeClr val="accent1">
-              <a:shade val="15000"/>
-            </a:schemeClr>
-          </a:lnRef>
-          <a:fillRef idx="1">
-            <a:schemeClr val="accent1"/>
-          </a:fillRef>
-          <a:effectRef idx="0">
-            <a:schemeClr val="accent1"/>
-          </a:effectRef>
-          <a:fontRef idx="minor">
-            <a:schemeClr val="lt1"/>
-          </a:fontRef>
-        </p:style>
-        <p:txBody>
-          <a:bodyPr rtlCol="0" anchor="ctr"/>
-          <a:lstStyle/>
-          <a:p>
-            <a:pPr algn="ctr"/>
-            <a:r>
-              <a:rPr lang="ko-KR" altLang="en-US" dirty="0">
-                <a:solidFill>
-                  <a:schemeClr val="tx1"/>
-                </a:solidFill>
-              </a:rPr>
-              <a:t>고양시</a:t>
-            </a:r>
-            <a:endParaRPr lang="en-US" altLang="ko-KR" dirty="0">
-              <a:solidFill>
-                <a:schemeClr val="tx1"/>
-              </a:solidFill>
-            </a:endParaRPr>
-          </a:p>
-        </p:txBody>
-      </p:sp>
-      <p:sp>
-        <p:nvSpPr>
-          <p:cNvPr id="19" name="직사각형 18">
-            <a:extLst>
-              <a:ext uri="{FF2B5EF4-FFF2-40B4-BE49-F238E27FC236}">
-                <a16:creationId xmlns:a16="http://schemas.microsoft.com/office/drawing/2014/main" id="{14D4410F-7A95-BE0B-C96E-1D61000B8E29}"/>
-              </a:ext>
-            </a:extLst>
-          </p:cNvPr>
-          <p:cNvSpPr/>
-          <p:nvPr/>
-        </p:nvSpPr>
-        <p:spPr>
-          <a:xfrm>
-            <a:off x="4839146" y="4168156"/>
-            <a:ext cx="311544" cy="914400"/>
-          </a:xfrm>
-          <a:prstGeom prst="rect">
-            <a:avLst/>
-          </a:prstGeom>
-          <a:solidFill>
-            <a:schemeClr val="bg1"/>
-          </a:solidFill>
-          <a:ln>
-            <a:noFill/>
-          </a:ln>
-        </p:spPr>
-        <p:style>
-          <a:lnRef idx="2">
-            <a:schemeClr val="accent1">
-              <a:shade val="15000"/>
-            </a:schemeClr>
-          </a:lnRef>
-          <a:fillRef idx="1">
-            <a:schemeClr val="accent1"/>
-          </a:fillRef>
-          <a:effectRef idx="0">
-            <a:schemeClr val="accent1"/>
-          </a:effectRef>
-          <a:fontRef idx="minor">
-            <a:schemeClr val="lt1"/>
-          </a:fontRef>
-        </p:style>
-        <p:txBody>
-          <a:bodyPr rtlCol="0" anchor="ctr"/>
-          <a:lstStyle/>
-          <a:p>
-            <a:pPr algn="ctr"/>
-            <a:r>
-              <a:rPr lang="ko-KR" altLang="en-US" dirty="0">
-                <a:solidFill>
-                  <a:schemeClr val="tx1"/>
-                </a:solidFill>
-              </a:rPr>
-              <a:t>남양주</a:t>
-            </a:r>
-            <a:endParaRPr lang="en-US" altLang="ko-KR" dirty="0">
-              <a:solidFill>
-                <a:schemeClr val="tx1"/>
-              </a:solidFill>
-            </a:endParaRPr>
-          </a:p>
-        </p:txBody>
-      </p:sp>
-      <p:sp>
-        <p:nvSpPr>
-          <p:cNvPr id="20" name="직사각형 19">
-            <a:extLst>
-              <a:ext uri="{FF2B5EF4-FFF2-40B4-BE49-F238E27FC236}">
-                <a16:creationId xmlns:a16="http://schemas.microsoft.com/office/drawing/2014/main" id="{84F942E7-9DE1-F81D-5269-CF446EF6C3B2}"/>
-              </a:ext>
-            </a:extLst>
-          </p:cNvPr>
-          <p:cNvSpPr/>
-          <p:nvPr/>
-        </p:nvSpPr>
-        <p:spPr>
-          <a:xfrm>
-            <a:off x="5178449" y="4168156"/>
-            <a:ext cx="311544" cy="914400"/>
-          </a:xfrm>
-          <a:prstGeom prst="rect">
-            <a:avLst/>
-          </a:prstGeom>
-          <a:solidFill>
-            <a:schemeClr val="bg1"/>
-          </a:solidFill>
-          <a:ln>
-            <a:noFill/>
-          </a:ln>
-        </p:spPr>
-        <p:style>
-          <a:lnRef idx="2">
-            <a:schemeClr val="accent1">
-              <a:shade val="15000"/>
-            </a:schemeClr>
-          </a:lnRef>
-          <a:fillRef idx="1">
-            <a:schemeClr val="accent1"/>
-          </a:fillRef>
-          <a:effectRef idx="0">
-            <a:schemeClr val="accent1"/>
-          </a:effectRef>
-          <a:fontRef idx="minor">
-            <a:schemeClr val="lt1"/>
-          </a:fontRef>
-        </p:style>
-        <p:txBody>
-          <a:bodyPr rtlCol="0" anchor="ctr"/>
-          <a:lstStyle/>
-          <a:p>
-            <a:pPr algn="ctr"/>
-            <a:r>
-              <a:rPr lang="ko-KR" altLang="en-US" dirty="0">
-                <a:solidFill>
-                  <a:schemeClr val="tx1"/>
-                </a:solidFill>
-              </a:rPr>
-              <a:t>양주시</a:t>
-            </a:r>
-            <a:endParaRPr lang="en-US" altLang="ko-KR" dirty="0">
-              <a:solidFill>
-                <a:schemeClr val="tx1"/>
-              </a:solidFill>
-            </a:endParaRPr>
-          </a:p>
-        </p:txBody>
-      </p:sp>
-      <p:sp>
-        <p:nvSpPr>
-          <p:cNvPr id="21" name="직사각형 20">
-            <a:extLst>
-              <a:ext uri="{FF2B5EF4-FFF2-40B4-BE49-F238E27FC236}">
-                <a16:creationId xmlns:a16="http://schemas.microsoft.com/office/drawing/2014/main" id="{33C1F8B5-0649-6E2F-D566-00A6B7C3E686}"/>
-              </a:ext>
-            </a:extLst>
-          </p:cNvPr>
-          <p:cNvSpPr/>
-          <p:nvPr/>
-        </p:nvSpPr>
-        <p:spPr>
-          <a:xfrm>
-            <a:off x="5517752" y="4168156"/>
-            <a:ext cx="311544" cy="914400"/>
-          </a:xfrm>
-          <a:prstGeom prst="rect">
-            <a:avLst/>
-          </a:prstGeom>
-          <a:solidFill>
-            <a:schemeClr val="bg1"/>
-          </a:solidFill>
-          <a:ln>
-            <a:noFill/>
-          </a:ln>
-        </p:spPr>
-        <p:style>
-          <a:lnRef idx="2">
-            <a:schemeClr val="accent1">
-              <a:shade val="15000"/>
-            </a:schemeClr>
-          </a:lnRef>
-          <a:fillRef idx="1">
-            <a:schemeClr val="accent1"/>
-          </a:fillRef>
-          <a:effectRef idx="0">
-            <a:schemeClr val="accent1"/>
-          </a:effectRef>
-          <a:fontRef idx="minor">
-            <a:schemeClr val="lt1"/>
-          </a:fontRef>
-        </p:style>
-        <p:txBody>
-          <a:bodyPr rtlCol="0" anchor="ctr"/>
-          <a:lstStyle/>
-          <a:p>
-            <a:pPr algn="ctr"/>
-            <a:r>
-              <a:rPr lang="ko-KR" altLang="en-US" dirty="0">
-                <a:solidFill>
-                  <a:schemeClr val="tx1"/>
-                </a:solidFill>
-              </a:rPr>
-              <a:t>광주시</a:t>
-            </a:r>
-            <a:endParaRPr lang="en-US" altLang="ko-KR" dirty="0">
-              <a:solidFill>
-                <a:schemeClr val="tx1"/>
-              </a:solidFill>
-            </a:endParaRPr>
-          </a:p>
-        </p:txBody>
-      </p:sp>
-      <p:sp>
-        <p:nvSpPr>
-          <p:cNvPr id="22" name="직사각형 21">
-            <a:extLst>
-              <a:ext uri="{FF2B5EF4-FFF2-40B4-BE49-F238E27FC236}">
-                <a16:creationId xmlns:a16="http://schemas.microsoft.com/office/drawing/2014/main" id="{3B500E6B-924A-B463-8940-FA9E03CB6908}"/>
-              </a:ext>
-            </a:extLst>
-          </p:cNvPr>
-          <p:cNvSpPr/>
-          <p:nvPr/>
-        </p:nvSpPr>
-        <p:spPr>
-          <a:xfrm>
-            <a:off x="5857055" y="4168156"/>
-            <a:ext cx="311544" cy="914400"/>
-          </a:xfrm>
-          <a:prstGeom prst="rect">
-            <a:avLst/>
-          </a:prstGeom>
-          <a:solidFill>
-            <a:schemeClr val="bg1"/>
-          </a:solidFill>
-          <a:ln>
-            <a:noFill/>
-          </a:ln>
-        </p:spPr>
-        <p:style>
-          <a:lnRef idx="2">
-            <a:schemeClr val="accent1">
-              <a:shade val="15000"/>
-            </a:schemeClr>
-          </a:lnRef>
-          <a:fillRef idx="1">
-            <a:schemeClr val="accent1"/>
-          </a:fillRef>
-          <a:effectRef idx="0">
-            <a:schemeClr val="accent1"/>
-          </a:effectRef>
-          <a:fontRef idx="minor">
-            <a:schemeClr val="lt1"/>
-          </a:fontRef>
-        </p:style>
-        <p:txBody>
-          <a:bodyPr rtlCol="0" anchor="ctr"/>
-          <a:lstStyle/>
-          <a:p>
-            <a:pPr algn="ctr"/>
-            <a:r>
-              <a:rPr lang="ko-KR" altLang="en-US" dirty="0">
-                <a:solidFill>
-                  <a:schemeClr val="tx1"/>
-                </a:solidFill>
-              </a:rPr>
-              <a:t>가평군</a:t>
-            </a:r>
-            <a:endParaRPr lang="en-US" altLang="ko-KR" dirty="0">
-              <a:solidFill>
-                <a:schemeClr val="tx1"/>
-              </a:solidFill>
-            </a:endParaRPr>
-          </a:p>
-        </p:txBody>
-      </p:sp>
-      <p:sp>
-        <p:nvSpPr>
-          <p:cNvPr id="23" name="직사각형 22">
-            <a:extLst>
-              <a:ext uri="{FF2B5EF4-FFF2-40B4-BE49-F238E27FC236}">
-                <a16:creationId xmlns:a16="http://schemas.microsoft.com/office/drawing/2014/main" id="{1C4E68C3-B5D2-BFFA-7DC0-A637BDCB9115}"/>
-              </a:ext>
-            </a:extLst>
-          </p:cNvPr>
-          <p:cNvSpPr/>
-          <p:nvPr/>
-        </p:nvSpPr>
-        <p:spPr>
-          <a:xfrm>
-            <a:off x="6196358" y="4168156"/>
-            <a:ext cx="311544" cy="914400"/>
-          </a:xfrm>
-          <a:prstGeom prst="rect">
-            <a:avLst/>
-          </a:prstGeom>
-          <a:solidFill>
-            <a:schemeClr val="bg1"/>
-          </a:solidFill>
-          <a:ln>
-            <a:noFill/>
-          </a:ln>
-        </p:spPr>
-        <p:style>
-          <a:lnRef idx="2">
-            <a:schemeClr val="accent1">
-              <a:shade val="15000"/>
-            </a:schemeClr>
-          </a:lnRef>
-          <a:fillRef idx="1">
-            <a:schemeClr val="accent1"/>
-          </a:fillRef>
-          <a:effectRef idx="0">
-            <a:schemeClr val="accent1"/>
-          </a:effectRef>
-          <a:fontRef idx="minor">
-            <a:schemeClr val="lt1"/>
-          </a:fontRef>
-        </p:style>
-        <p:txBody>
-          <a:bodyPr rtlCol="0" anchor="ctr"/>
-          <a:lstStyle/>
-          <a:p>
-            <a:pPr algn="ctr"/>
-            <a:r>
-              <a:rPr lang="ko-KR" altLang="en-US" dirty="0">
-                <a:solidFill>
-                  <a:schemeClr val="tx1"/>
-                </a:solidFill>
-              </a:rPr>
-              <a:t>안산시</a:t>
-            </a:r>
-            <a:endParaRPr lang="en-US" altLang="ko-KR" dirty="0">
-              <a:solidFill>
-                <a:schemeClr val="tx1"/>
-              </a:solidFill>
-            </a:endParaRPr>
-          </a:p>
-        </p:txBody>
-      </p:sp>
-      <p:sp>
-        <p:nvSpPr>
-          <p:cNvPr id="24" name="직사각형 23">
-            <a:extLst>
-              <a:ext uri="{FF2B5EF4-FFF2-40B4-BE49-F238E27FC236}">
-                <a16:creationId xmlns:a16="http://schemas.microsoft.com/office/drawing/2014/main" id="{29FFAE3A-E622-EE2A-A33E-059C7B738BCB}"/>
-              </a:ext>
-            </a:extLst>
-          </p:cNvPr>
-          <p:cNvSpPr/>
-          <p:nvPr/>
-        </p:nvSpPr>
-        <p:spPr>
-          <a:xfrm>
-            <a:off x="6535661" y="4168156"/>
-            <a:ext cx="311544" cy="914400"/>
-          </a:xfrm>
-          <a:prstGeom prst="rect">
-            <a:avLst/>
-          </a:prstGeom>
-          <a:solidFill>
-            <a:schemeClr val="bg1"/>
-          </a:solidFill>
-          <a:ln>
-            <a:noFill/>
-          </a:ln>
-        </p:spPr>
-        <p:style>
-          <a:lnRef idx="2">
-            <a:schemeClr val="accent1">
-              <a:shade val="15000"/>
-            </a:schemeClr>
-          </a:lnRef>
-          <a:fillRef idx="1">
-            <a:schemeClr val="accent1"/>
-          </a:fillRef>
-          <a:effectRef idx="0">
-            <a:schemeClr val="accent1"/>
-          </a:effectRef>
-          <a:fontRef idx="minor">
-            <a:schemeClr val="lt1"/>
-          </a:fontRef>
-        </p:style>
-        <p:txBody>
-          <a:bodyPr rtlCol="0" anchor="ctr"/>
-          <a:lstStyle/>
-          <a:p>
-            <a:pPr algn="ctr"/>
-            <a:r>
-              <a:rPr lang="ko-KR" altLang="en-US" dirty="0">
-                <a:solidFill>
-                  <a:schemeClr val="tx1"/>
-                </a:solidFill>
-              </a:rPr>
-              <a:t>시흥시</a:t>
-            </a:r>
-            <a:endParaRPr lang="en-US" altLang="ko-KR" dirty="0">
-              <a:solidFill>
-                <a:schemeClr val="tx1"/>
-              </a:solidFill>
-            </a:endParaRPr>
-          </a:p>
-        </p:txBody>
-      </p:sp>
-      <p:sp>
-        <p:nvSpPr>
-          <p:cNvPr id="25" name="직사각형 24">
-            <a:extLst>
-              <a:ext uri="{FF2B5EF4-FFF2-40B4-BE49-F238E27FC236}">
-                <a16:creationId xmlns:a16="http://schemas.microsoft.com/office/drawing/2014/main" id="{2D56B101-3ED8-E97A-6BDB-C710F7963F61}"/>
-              </a:ext>
-            </a:extLst>
-          </p:cNvPr>
-          <p:cNvSpPr/>
-          <p:nvPr/>
-        </p:nvSpPr>
-        <p:spPr>
-          <a:xfrm>
-            <a:off x="6874964" y="4168156"/>
-            <a:ext cx="311544" cy="914400"/>
-          </a:xfrm>
-          <a:prstGeom prst="rect">
-            <a:avLst/>
-          </a:prstGeom>
-          <a:solidFill>
-            <a:schemeClr val="bg1"/>
-          </a:solidFill>
-          <a:ln>
-            <a:noFill/>
-          </a:ln>
-        </p:spPr>
-        <p:style>
-          <a:lnRef idx="2">
-            <a:schemeClr val="accent1">
-              <a:shade val="15000"/>
-            </a:schemeClr>
-          </a:lnRef>
-          <a:fillRef idx="1">
-            <a:schemeClr val="accent1"/>
-          </a:fillRef>
-          <a:effectRef idx="0">
-            <a:schemeClr val="accent1"/>
-          </a:effectRef>
-          <a:fontRef idx="minor">
-            <a:schemeClr val="lt1"/>
-          </a:fontRef>
-        </p:style>
-        <p:txBody>
-          <a:bodyPr rtlCol="0" anchor="ctr"/>
-          <a:lstStyle/>
-          <a:p>
-            <a:pPr algn="ctr"/>
-            <a:r>
-              <a:rPr lang="ko-KR" altLang="en-US" dirty="0">
-                <a:solidFill>
-                  <a:schemeClr val="tx1"/>
-                </a:solidFill>
-              </a:rPr>
-              <a:t>수원시</a:t>
-            </a:r>
-            <a:endParaRPr lang="en-US" altLang="ko-KR" dirty="0">
-              <a:solidFill>
-                <a:schemeClr val="tx1"/>
-              </a:solidFill>
-            </a:endParaRPr>
-          </a:p>
-        </p:txBody>
-      </p:sp>
-      <p:sp>
-        <p:nvSpPr>
-          <p:cNvPr id="26" name="직사각형 25">
-            <a:extLst>
-              <a:ext uri="{FF2B5EF4-FFF2-40B4-BE49-F238E27FC236}">
-                <a16:creationId xmlns:a16="http://schemas.microsoft.com/office/drawing/2014/main" id="{71D04FA4-D302-FF0C-A42B-9F7AE4981DDC}"/>
-              </a:ext>
-            </a:extLst>
-          </p:cNvPr>
-          <p:cNvSpPr/>
-          <p:nvPr/>
-        </p:nvSpPr>
-        <p:spPr>
-          <a:xfrm>
-            <a:off x="7214267" y="4168156"/>
-            <a:ext cx="311544" cy="914400"/>
-          </a:xfrm>
-          <a:prstGeom prst="rect">
-            <a:avLst/>
-          </a:prstGeom>
-          <a:solidFill>
-            <a:schemeClr val="bg1"/>
-          </a:solidFill>
-          <a:ln>
-            <a:noFill/>
-          </a:ln>
-        </p:spPr>
-        <p:style>
-          <a:lnRef idx="2">
-            <a:schemeClr val="accent1">
-              <a:shade val="15000"/>
-            </a:schemeClr>
-          </a:lnRef>
-          <a:fillRef idx="1">
-            <a:schemeClr val="accent1"/>
-          </a:fillRef>
-          <a:effectRef idx="0">
-            <a:schemeClr val="accent1"/>
-          </a:effectRef>
-          <a:fontRef idx="minor">
-            <a:schemeClr val="lt1"/>
-          </a:fontRef>
-        </p:style>
-        <p:txBody>
-          <a:bodyPr rtlCol="0" anchor="ctr"/>
-          <a:lstStyle/>
-          <a:p>
-            <a:pPr algn="ctr"/>
-            <a:r>
-              <a:rPr lang="ko-KR" altLang="en-US" dirty="0">
-                <a:solidFill>
-                  <a:schemeClr val="tx1"/>
-                </a:solidFill>
-              </a:rPr>
-              <a:t>성남시</a:t>
-            </a:r>
-            <a:endParaRPr lang="en-US" altLang="ko-KR" dirty="0">
-              <a:solidFill>
-                <a:schemeClr val="tx1"/>
-              </a:solidFill>
-            </a:endParaRPr>
-          </a:p>
-        </p:txBody>
-      </p:sp>
-      <p:sp>
-        <p:nvSpPr>
-          <p:cNvPr id="27" name="직사각형 26">
-            <a:extLst>
-              <a:ext uri="{FF2B5EF4-FFF2-40B4-BE49-F238E27FC236}">
-                <a16:creationId xmlns:a16="http://schemas.microsoft.com/office/drawing/2014/main" id="{ED3B0472-86D7-5EC0-894F-FA22C68019AB}"/>
-              </a:ext>
-            </a:extLst>
-          </p:cNvPr>
-          <p:cNvSpPr/>
-          <p:nvPr/>
-        </p:nvSpPr>
-        <p:spPr>
-          <a:xfrm>
-            <a:off x="7553570" y="4168156"/>
-            <a:ext cx="311544" cy="914400"/>
-          </a:xfrm>
-          <a:prstGeom prst="rect">
-            <a:avLst/>
-          </a:prstGeom>
-          <a:solidFill>
-            <a:schemeClr val="bg1"/>
-          </a:solidFill>
-          <a:ln>
-            <a:noFill/>
-          </a:ln>
-        </p:spPr>
-        <p:style>
-          <a:lnRef idx="2">
-            <a:schemeClr val="accent1">
-              <a:shade val="15000"/>
-            </a:schemeClr>
-          </a:lnRef>
-          <a:fillRef idx="1">
-            <a:schemeClr val="accent1"/>
-          </a:fillRef>
-          <a:effectRef idx="0">
-            <a:schemeClr val="accent1"/>
-          </a:effectRef>
-          <a:fontRef idx="minor">
-            <a:schemeClr val="lt1"/>
-          </a:fontRef>
-        </p:style>
-        <p:txBody>
-          <a:bodyPr rtlCol="0" anchor="ctr"/>
-          <a:lstStyle/>
-          <a:p>
-            <a:pPr algn="ctr"/>
-            <a:r>
-              <a:rPr lang="ko-KR" altLang="en-US" dirty="0">
-                <a:solidFill>
-                  <a:schemeClr val="tx1"/>
-                </a:solidFill>
-              </a:rPr>
-              <a:t>부천시</a:t>
-            </a:r>
-            <a:endParaRPr lang="en-US" altLang="ko-KR" dirty="0">
-              <a:solidFill>
-                <a:schemeClr val="tx1"/>
-              </a:solidFill>
-            </a:endParaRPr>
-          </a:p>
-        </p:txBody>
-      </p:sp>
-      <p:sp>
-        <p:nvSpPr>
-          <p:cNvPr id="28" name="직사각형 27">
-            <a:extLst>
-              <a:ext uri="{FF2B5EF4-FFF2-40B4-BE49-F238E27FC236}">
-                <a16:creationId xmlns:a16="http://schemas.microsoft.com/office/drawing/2014/main" id="{55B48130-0FAD-D6BF-2245-7A0C0C7EF009}"/>
-              </a:ext>
-            </a:extLst>
-          </p:cNvPr>
-          <p:cNvSpPr/>
-          <p:nvPr/>
-        </p:nvSpPr>
-        <p:spPr>
-          <a:xfrm>
-            <a:off x="7892873" y="4168156"/>
-            <a:ext cx="311544" cy="914400"/>
-          </a:xfrm>
-          <a:prstGeom prst="rect">
-            <a:avLst/>
-          </a:prstGeom>
-          <a:solidFill>
-            <a:schemeClr val="bg1"/>
-          </a:solidFill>
-          <a:ln>
-            <a:noFill/>
-          </a:ln>
-        </p:spPr>
-        <p:style>
-          <a:lnRef idx="2">
-            <a:schemeClr val="accent1">
-              <a:shade val="15000"/>
-            </a:schemeClr>
-          </a:lnRef>
-          <a:fillRef idx="1">
-            <a:schemeClr val="accent1"/>
-          </a:fillRef>
-          <a:effectRef idx="0">
-            <a:schemeClr val="accent1"/>
-          </a:effectRef>
-          <a:fontRef idx="minor">
-            <a:schemeClr val="lt1"/>
-          </a:fontRef>
-        </p:style>
-        <p:txBody>
-          <a:bodyPr rtlCol="0" anchor="ctr"/>
-          <a:lstStyle/>
-          <a:p>
-            <a:pPr algn="ctr"/>
-            <a:r>
-              <a:rPr lang="ko-KR" altLang="en-US" dirty="0">
-                <a:solidFill>
-                  <a:schemeClr val="tx1"/>
-                </a:solidFill>
-              </a:rPr>
-              <a:t>하남시</a:t>
-            </a:r>
-            <a:endParaRPr lang="en-US" altLang="ko-KR" dirty="0">
-              <a:solidFill>
-                <a:schemeClr val="tx1"/>
-              </a:solidFill>
-            </a:endParaRPr>
-          </a:p>
-        </p:txBody>
-      </p:sp>
-      <p:sp>
-        <p:nvSpPr>
-          <p:cNvPr id="29" name="직사각형 28">
-            <a:extLst>
-              <a:ext uri="{FF2B5EF4-FFF2-40B4-BE49-F238E27FC236}">
-                <a16:creationId xmlns:a16="http://schemas.microsoft.com/office/drawing/2014/main" id="{691DA4A7-1CD8-F388-E9DF-A9A781B6ACFE}"/>
-              </a:ext>
-            </a:extLst>
-          </p:cNvPr>
-          <p:cNvSpPr/>
-          <p:nvPr/>
-        </p:nvSpPr>
-        <p:spPr>
-          <a:xfrm>
-            <a:off x="8232176" y="4168156"/>
-            <a:ext cx="311544" cy="914400"/>
-          </a:xfrm>
-          <a:prstGeom prst="rect">
-            <a:avLst/>
-          </a:prstGeom>
-          <a:solidFill>
-            <a:schemeClr val="bg1"/>
-          </a:solidFill>
-          <a:ln>
-            <a:noFill/>
-          </a:ln>
-        </p:spPr>
-        <p:style>
-          <a:lnRef idx="2">
-            <a:schemeClr val="accent1">
-              <a:shade val="15000"/>
-            </a:schemeClr>
-          </a:lnRef>
-          <a:fillRef idx="1">
-            <a:schemeClr val="accent1"/>
-          </a:fillRef>
-          <a:effectRef idx="0">
-            <a:schemeClr val="accent1"/>
-          </a:effectRef>
-          <a:fontRef idx="minor">
-            <a:schemeClr val="lt1"/>
-          </a:fontRef>
-        </p:style>
-        <p:txBody>
-          <a:bodyPr rtlCol="0" anchor="ctr"/>
-          <a:lstStyle/>
-          <a:p>
-            <a:pPr algn="ctr"/>
-            <a:r>
-              <a:rPr lang="ko-KR" altLang="en-US" dirty="0">
-                <a:solidFill>
-                  <a:schemeClr val="tx1"/>
-                </a:solidFill>
-              </a:rPr>
-              <a:t>의정부</a:t>
-            </a:r>
-            <a:endParaRPr lang="en-US" altLang="ko-KR" dirty="0">
-              <a:solidFill>
-                <a:schemeClr val="tx1"/>
-              </a:solidFill>
-            </a:endParaRPr>
-          </a:p>
-        </p:txBody>
-      </p:sp>
-      <p:sp>
-        <p:nvSpPr>
-          <p:cNvPr id="30" name="직사각형 29">
-            <a:extLst>
-              <a:ext uri="{FF2B5EF4-FFF2-40B4-BE49-F238E27FC236}">
-                <a16:creationId xmlns:a16="http://schemas.microsoft.com/office/drawing/2014/main" id="{3180CEAC-5A0E-694C-6459-812C78FFD5F2}"/>
-              </a:ext>
-            </a:extLst>
-          </p:cNvPr>
-          <p:cNvSpPr/>
-          <p:nvPr/>
-        </p:nvSpPr>
-        <p:spPr>
-          <a:xfrm>
-            <a:off x="8571479" y="4168156"/>
-            <a:ext cx="311544" cy="914400"/>
-          </a:xfrm>
-          <a:prstGeom prst="rect">
-            <a:avLst/>
-          </a:prstGeom>
-          <a:solidFill>
-            <a:schemeClr val="bg1"/>
-          </a:solidFill>
-          <a:ln>
-            <a:noFill/>
-          </a:ln>
-        </p:spPr>
-        <p:style>
-          <a:lnRef idx="2">
-            <a:schemeClr val="accent1">
-              <a:shade val="15000"/>
-            </a:schemeClr>
-          </a:lnRef>
-          <a:fillRef idx="1">
-            <a:schemeClr val="accent1"/>
-          </a:fillRef>
-          <a:effectRef idx="0">
-            <a:schemeClr val="accent1"/>
-          </a:effectRef>
-          <a:fontRef idx="minor">
-            <a:schemeClr val="lt1"/>
-          </a:fontRef>
-        </p:style>
-        <p:txBody>
-          <a:bodyPr rtlCol="0" anchor="ctr"/>
-          <a:lstStyle/>
-          <a:p>
-            <a:pPr algn="ctr"/>
-            <a:r>
-              <a:rPr lang="ko-KR" altLang="en-US" dirty="0">
-                <a:solidFill>
-                  <a:schemeClr val="tx1"/>
-                </a:solidFill>
-              </a:rPr>
-              <a:t>오산시</a:t>
-            </a:r>
-            <a:endParaRPr lang="en-US" altLang="ko-KR" dirty="0">
-              <a:solidFill>
-                <a:schemeClr val="tx1"/>
-              </a:solidFill>
-            </a:endParaRPr>
-          </a:p>
-        </p:txBody>
-      </p:sp>
-      <p:sp>
-        <p:nvSpPr>
-          <p:cNvPr id="31" name="직사각형 30">
-            <a:extLst>
-              <a:ext uri="{FF2B5EF4-FFF2-40B4-BE49-F238E27FC236}">
-                <a16:creationId xmlns:a16="http://schemas.microsoft.com/office/drawing/2014/main" id="{146121B3-31A0-8E27-E657-488BC7937647}"/>
-              </a:ext>
-            </a:extLst>
-          </p:cNvPr>
-          <p:cNvSpPr/>
-          <p:nvPr/>
-        </p:nvSpPr>
-        <p:spPr>
-          <a:xfrm>
-            <a:off x="8910782" y="4168156"/>
-            <a:ext cx="311544" cy="914400"/>
-          </a:xfrm>
-          <a:prstGeom prst="rect">
-            <a:avLst/>
-          </a:prstGeom>
-          <a:solidFill>
-            <a:schemeClr val="bg1"/>
-          </a:solidFill>
-          <a:ln>
-            <a:noFill/>
-          </a:ln>
-        </p:spPr>
-        <p:style>
-          <a:lnRef idx="2">
-            <a:schemeClr val="accent1">
-              <a:shade val="15000"/>
-            </a:schemeClr>
-          </a:lnRef>
-          <a:fillRef idx="1">
-            <a:schemeClr val="accent1"/>
-          </a:fillRef>
-          <a:effectRef idx="0">
-            <a:schemeClr val="accent1"/>
-          </a:effectRef>
-          <a:fontRef idx="minor">
-            <a:schemeClr val="lt1"/>
-          </a:fontRef>
-        </p:style>
-        <p:txBody>
-          <a:bodyPr rtlCol="0" anchor="ctr"/>
-          <a:lstStyle/>
-          <a:p>
-            <a:pPr algn="ctr"/>
-            <a:r>
-              <a:rPr lang="ko-KR" altLang="en-US" dirty="0">
-                <a:solidFill>
-                  <a:schemeClr val="tx1"/>
-                </a:solidFill>
-              </a:rPr>
-              <a:t>안양시</a:t>
-            </a:r>
-            <a:endParaRPr lang="en-US" altLang="ko-KR" dirty="0">
-              <a:solidFill>
-                <a:schemeClr val="tx1"/>
-              </a:solidFill>
-            </a:endParaRPr>
-          </a:p>
-        </p:txBody>
-      </p:sp>
-      <p:sp>
-        <p:nvSpPr>
-          <p:cNvPr id="32" name="직사각형 31">
-            <a:extLst>
-              <a:ext uri="{FF2B5EF4-FFF2-40B4-BE49-F238E27FC236}">
-                <a16:creationId xmlns:a16="http://schemas.microsoft.com/office/drawing/2014/main" id="{5120B970-43BA-EB8D-32F2-FE6526A09FCF}"/>
-              </a:ext>
-            </a:extLst>
-          </p:cNvPr>
-          <p:cNvSpPr/>
-          <p:nvPr/>
-        </p:nvSpPr>
-        <p:spPr>
-          <a:xfrm>
-            <a:off x="9250085" y="4168156"/>
-            <a:ext cx="311544" cy="914400"/>
-          </a:xfrm>
-          <a:prstGeom prst="rect">
-            <a:avLst/>
-          </a:prstGeom>
-          <a:solidFill>
-            <a:schemeClr val="bg1"/>
-          </a:solidFill>
-          <a:ln>
-            <a:noFill/>
-          </a:ln>
-        </p:spPr>
-        <p:style>
-          <a:lnRef idx="2">
-            <a:schemeClr val="accent1">
-              <a:shade val="15000"/>
-            </a:schemeClr>
-          </a:lnRef>
-          <a:fillRef idx="1">
-            <a:schemeClr val="accent1"/>
-          </a:fillRef>
-          <a:effectRef idx="0">
-            <a:schemeClr val="accent1"/>
-          </a:effectRef>
-          <a:fontRef idx="minor">
-            <a:schemeClr val="lt1"/>
-          </a:fontRef>
-        </p:style>
-        <p:txBody>
-          <a:bodyPr rtlCol="0" anchor="ctr"/>
-          <a:lstStyle/>
-          <a:p>
-            <a:pPr algn="ctr"/>
-            <a:r>
-              <a:rPr lang="ko-KR" altLang="en-US" dirty="0">
-                <a:solidFill>
-                  <a:schemeClr val="tx1"/>
-                </a:solidFill>
-              </a:rPr>
-              <a:t>광명시</a:t>
-            </a:r>
-            <a:endParaRPr lang="en-US" altLang="ko-KR" dirty="0">
-              <a:solidFill>
-                <a:schemeClr val="tx1"/>
-              </a:solidFill>
-            </a:endParaRPr>
-          </a:p>
-        </p:txBody>
-      </p:sp>
-      <p:sp>
-        <p:nvSpPr>
-          <p:cNvPr id="33" name="직사각형 32">
-            <a:extLst>
-              <a:ext uri="{FF2B5EF4-FFF2-40B4-BE49-F238E27FC236}">
-                <a16:creationId xmlns:a16="http://schemas.microsoft.com/office/drawing/2014/main" id="{3CE2C81A-A67D-7BEA-130C-B6F6D9C2AD28}"/>
-              </a:ext>
-            </a:extLst>
-          </p:cNvPr>
-          <p:cNvSpPr/>
-          <p:nvPr/>
-        </p:nvSpPr>
-        <p:spPr>
-          <a:xfrm>
-            <a:off x="9589388" y="4168156"/>
-            <a:ext cx="311544" cy="914400"/>
-          </a:xfrm>
-          <a:prstGeom prst="rect">
-            <a:avLst/>
-          </a:prstGeom>
-          <a:solidFill>
-            <a:schemeClr val="bg1"/>
-          </a:solidFill>
-          <a:ln>
-            <a:noFill/>
-          </a:ln>
-        </p:spPr>
-        <p:style>
-          <a:lnRef idx="2">
-            <a:schemeClr val="accent1">
-              <a:shade val="15000"/>
-            </a:schemeClr>
-          </a:lnRef>
-          <a:fillRef idx="1">
-            <a:schemeClr val="accent1"/>
-          </a:fillRef>
-          <a:effectRef idx="0">
-            <a:schemeClr val="accent1"/>
-          </a:effectRef>
-          <a:fontRef idx="minor">
-            <a:schemeClr val="lt1"/>
-          </a:fontRef>
-        </p:style>
-        <p:txBody>
-          <a:bodyPr rtlCol="0" anchor="ctr"/>
-          <a:lstStyle/>
-          <a:p>
-            <a:pPr algn="ctr"/>
-            <a:r>
-              <a:rPr lang="ko-KR" altLang="en-US" dirty="0">
-                <a:solidFill>
-                  <a:schemeClr val="tx1"/>
-                </a:solidFill>
-              </a:rPr>
-              <a:t>동두천</a:t>
-            </a:r>
-            <a:endParaRPr lang="en-US" altLang="ko-KR" dirty="0">
-              <a:solidFill>
-                <a:schemeClr val="tx1"/>
-              </a:solidFill>
-            </a:endParaRPr>
-          </a:p>
-        </p:txBody>
-      </p:sp>
-      <p:sp>
-        <p:nvSpPr>
-          <p:cNvPr id="34" name="직사각형 33">
-            <a:extLst>
-              <a:ext uri="{FF2B5EF4-FFF2-40B4-BE49-F238E27FC236}">
-                <a16:creationId xmlns:a16="http://schemas.microsoft.com/office/drawing/2014/main" id="{3FAC4075-86E1-245E-DA0A-B3045F5E4359}"/>
-              </a:ext>
-            </a:extLst>
-          </p:cNvPr>
-          <p:cNvSpPr/>
-          <p:nvPr/>
-        </p:nvSpPr>
-        <p:spPr>
-          <a:xfrm>
-            <a:off x="9928691" y="4168156"/>
-            <a:ext cx="311544" cy="914400"/>
-          </a:xfrm>
-          <a:prstGeom prst="rect">
-            <a:avLst/>
-          </a:prstGeom>
-          <a:solidFill>
-            <a:schemeClr val="bg1"/>
-          </a:solidFill>
-          <a:ln>
-            <a:noFill/>
-          </a:ln>
-        </p:spPr>
-        <p:style>
-          <a:lnRef idx="2">
-            <a:schemeClr val="accent1">
-              <a:shade val="15000"/>
-            </a:schemeClr>
-          </a:lnRef>
-          <a:fillRef idx="1">
-            <a:schemeClr val="accent1"/>
-          </a:fillRef>
-          <a:effectRef idx="0">
-            <a:schemeClr val="accent1"/>
-          </a:effectRef>
-          <a:fontRef idx="minor">
-            <a:schemeClr val="lt1"/>
-          </a:fontRef>
-        </p:style>
-        <p:txBody>
-          <a:bodyPr rtlCol="0" anchor="ctr"/>
-          <a:lstStyle/>
-          <a:p>
-            <a:pPr algn="ctr"/>
-            <a:r>
-              <a:rPr lang="ko-KR" altLang="en-US" dirty="0">
-                <a:solidFill>
-                  <a:schemeClr val="tx1"/>
-                </a:solidFill>
-              </a:rPr>
-              <a:t>의왕시</a:t>
-            </a:r>
-            <a:endParaRPr lang="en-US" altLang="ko-KR" dirty="0">
-              <a:solidFill>
-                <a:schemeClr val="tx1"/>
-              </a:solidFill>
-            </a:endParaRPr>
-          </a:p>
-        </p:txBody>
-      </p:sp>
-      <p:sp>
-        <p:nvSpPr>
-          <p:cNvPr id="35" name="직사각형 34">
-            <a:extLst>
-              <a:ext uri="{FF2B5EF4-FFF2-40B4-BE49-F238E27FC236}">
-                <a16:creationId xmlns:a16="http://schemas.microsoft.com/office/drawing/2014/main" id="{5DD44CFF-97EC-FEDE-BECA-BD77408991ED}"/>
-              </a:ext>
-            </a:extLst>
-          </p:cNvPr>
-          <p:cNvSpPr/>
-          <p:nvPr/>
-        </p:nvSpPr>
-        <p:spPr>
-          <a:xfrm>
-            <a:off x="10267994" y="4168156"/>
-            <a:ext cx="311544" cy="914400"/>
-          </a:xfrm>
-          <a:prstGeom prst="rect">
-            <a:avLst/>
-          </a:prstGeom>
-          <a:solidFill>
-            <a:schemeClr val="bg1"/>
-          </a:solidFill>
-          <a:ln>
-            <a:noFill/>
-          </a:ln>
-        </p:spPr>
-        <p:style>
-          <a:lnRef idx="2">
-            <a:schemeClr val="accent1">
-              <a:shade val="15000"/>
-            </a:schemeClr>
-          </a:lnRef>
-          <a:fillRef idx="1">
-            <a:schemeClr val="accent1"/>
-          </a:fillRef>
-          <a:effectRef idx="0">
-            <a:schemeClr val="accent1"/>
-          </a:effectRef>
-          <a:fontRef idx="minor">
-            <a:schemeClr val="lt1"/>
-          </a:fontRef>
-        </p:style>
-        <p:txBody>
-          <a:bodyPr rtlCol="0" anchor="ctr"/>
-          <a:lstStyle/>
-          <a:p>
-            <a:pPr algn="ctr"/>
-            <a:r>
-              <a:rPr lang="ko-KR" altLang="en-US" dirty="0">
-                <a:solidFill>
-                  <a:schemeClr val="tx1"/>
-                </a:solidFill>
-              </a:rPr>
-              <a:t>군포시</a:t>
-            </a:r>
-            <a:endParaRPr lang="en-US" altLang="ko-KR" dirty="0">
-              <a:solidFill>
-                <a:schemeClr val="tx1"/>
-              </a:solidFill>
-            </a:endParaRPr>
-          </a:p>
-        </p:txBody>
-      </p:sp>
-      <p:sp>
-        <p:nvSpPr>
-          <p:cNvPr id="36" name="직사각형 35">
-            <a:extLst>
-              <a:ext uri="{FF2B5EF4-FFF2-40B4-BE49-F238E27FC236}">
-                <a16:creationId xmlns:a16="http://schemas.microsoft.com/office/drawing/2014/main" id="{CA3C3EA6-4095-FE66-A64F-CF28800B931A}"/>
-              </a:ext>
-            </a:extLst>
-          </p:cNvPr>
-          <p:cNvSpPr/>
-          <p:nvPr/>
-        </p:nvSpPr>
-        <p:spPr>
-          <a:xfrm>
-            <a:off x="10607297" y="4168156"/>
-            <a:ext cx="311544" cy="914400"/>
-          </a:xfrm>
-          <a:prstGeom prst="rect">
-            <a:avLst/>
-          </a:prstGeom>
-          <a:solidFill>
-            <a:schemeClr val="bg1"/>
-          </a:solidFill>
-          <a:ln>
-            <a:noFill/>
-          </a:ln>
-        </p:spPr>
-        <p:style>
-          <a:lnRef idx="2">
-            <a:schemeClr val="accent1">
-              <a:shade val="15000"/>
-            </a:schemeClr>
-          </a:lnRef>
-          <a:fillRef idx="1">
-            <a:schemeClr val="accent1"/>
-          </a:fillRef>
-          <a:effectRef idx="0">
-            <a:schemeClr val="accent1"/>
-          </a:effectRef>
-          <a:fontRef idx="minor">
-            <a:schemeClr val="lt1"/>
-          </a:fontRef>
-        </p:style>
-        <p:txBody>
-          <a:bodyPr rtlCol="0" anchor="ctr"/>
-          <a:lstStyle/>
-          <a:p>
-            <a:pPr algn="ctr"/>
-            <a:r>
-              <a:rPr lang="ko-KR" altLang="en-US" dirty="0">
-                <a:solidFill>
-                  <a:schemeClr val="tx1"/>
-                </a:solidFill>
-              </a:rPr>
-              <a:t>구리시</a:t>
-            </a:r>
-            <a:endParaRPr lang="en-US" altLang="ko-KR" dirty="0">
-              <a:solidFill>
-                <a:schemeClr val="tx1"/>
-              </a:solidFill>
-            </a:endParaRPr>
-          </a:p>
-        </p:txBody>
-      </p:sp>
-      <p:sp>
-        <p:nvSpPr>
-          <p:cNvPr id="37" name="직사각형 36">
-            <a:extLst>
-              <a:ext uri="{FF2B5EF4-FFF2-40B4-BE49-F238E27FC236}">
-                <a16:creationId xmlns:a16="http://schemas.microsoft.com/office/drawing/2014/main" id="{5648B884-B8BA-166E-84D3-7A26B39EB86A}"/>
-              </a:ext>
-            </a:extLst>
-          </p:cNvPr>
-          <p:cNvSpPr/>
-          <p:nvPr/>
-        </p:nvSpPr>
-        <p:spPr>
-          <a:xfrm>
-            <a:off x="10946608" y="4168156"/>
-            <a:ext cx="311544" cy="914400"/>
-          </a:xfrm>
-          <a:prstGeom prst="rect">
-            <a:avLst/>
-          </a:prstGeom>
-          <a:solidFill>
-            <a:schemeClr val="bg1"/>
-          </a:solidFill>
-          <a:ln>
-            <a:noFill/>
-          </a:ln>
-        </p:spPr>
-        <p:style>
-          <a:lnRef idx="2">
-            <a:schemeClr val="accent1">
-              <a:shade val="15000"/>
-            </a:schemeClr>
-          </a:lnRef>
-          <a:fillRef idx="1">
-            <a:schemeClr val="accent1"/>
-          </a:fillRef>
-          <a:effectRef idx="0">
-            <a:schemeClr val="accent1"/>
-          </a:effectRef>
-          <a:fontRef idx="minor">
-            <a:schemeClr val="lt1"/>
-          </a:fontRef>
-        </p:style>
-        <p:txBody>
-          <a:bodyPr rtlCol="0" anchor="ctr"/>
-          <a:lstStyle/>
-          <a:p>
-            <a:pPr algn="ctr"/>
-            <a:r>
-              <a:rPr lang="ko-KR" altLang="en-US" dirty="0">
-                <a:solidFill>
-                  <a:schemeClr val="tx1"/>
-                </a:solidFill>
-              </a:rPr>
-              <a:t>과천시</a:t>
-            </a:r>
-            <a:endParaRPr lang="en-US" altLang="ko-KR" dirty="0">
-              <a:solidFill>
-                <a:schemeClr val="tx1"/>
-              </a:solidFill>
-            </a:endParaRPr>
+            <a:endParaRPr lang="ko-KR" altLang="en-US"/>
           </a:p>
         </p:txBody>
       </p:sp>
@@ -5959,7 +6333,7 @@
           <a:lstStyle/>
           <a:p>
             <a:pPr algn="ctr"/>
-            <a:endParaRPr lang="ko-KR" altLang="en-US"/>
+            <a:endParaRPr lang="ko-KR" altLang="en-US" dirty="0"/>
           </a:p>
         </p:txBody>
       </p:sp>
@@ -6048,6 +6422,2421 @@
           <a:xfrm>
             <a:off x="132604" y="141628"/>
             <a:ext cx="12192000" cy="6574743"/>
+          </a:xfrm>
+          <a:prstGeom prst="rect">
+            <a:avLst/>
+          </a:prstGeom>
+        </p:spPr>
+      </p:pic>
+      <p:sp>
+        <p:nvSpPr>
+          <p:cNvPr id="8" name="직사각형 7">
+            <a:extLst>
+              <a:ext uri="{FF2B5EF4-FFF2-40B4-BE49-F238E27FC236}">
+                <a16:creationId xmlns:a16="http://schemas.microsoft.com/office/drawing/2014/main" id="{58DC63F0-771C-8361-74CD-93098C6816A3}"/>
+              </a:ext>
+            </a:extLst>
+          </p:cNvPr>
+          <p:cNvSpPr/>
+          <p:nvPr/>
+        </p:nvSpPr>
+        <p:spPr>
+          <a:xfrm>
+            <a:off x="12431158" y="291358"/>
+            <a:ext cx="325120" cy="5423642"/>
+          </a:xfrm>
+          <a:prstGeom prst="rect">
+            <a:avLst/>
+          </a:prstGeom>
+          <a:solidFill>
+            <a:schemeClr val="bg1"/>
+          </a:solidFill>
+          <a:ln>
+            <a:noFill/>
+          </a:ln>
+        </p:spPr>
+        <p:style>
+          <a:lnRef idx="2">
+            <a:schemeClr val="accent1">
+              <a:shade val="15000"/>
+            </a:schemeClr>
+          </a:lnRef>
+          <a:fillRef idx="1">
+            <a:schemeClr val="accent1"/>
+          </a:fillRef>
+          <a:effectRef idx="0">
+            <a:schemeClr val="accent1"/>
+          </a:effectRef>
+          <a:fontRef idx="minor">
+            <a:schemeClr val="lt1"/>
+          </a:fontRef>
+        </p:style>
+        <p:txBody>
+          <a:bodyPr rtlCol="0" anchor="ctr"/>
+          <a:lstStyle/>
+          <a:p>
+            <a:pPr algn="ctr"/>
+            <a:endParaRPr lang="ko-KR" altLang="en-US"/>
+          </a:p>
+        </p:txBody>
+      </p:sp>
+      <p:sp>
+        <p:nvSpPr>
+          <p:cNvPr id="9" name="직사각형 8">
+            <a:extLst>
+              <a:ext uri="{FF2B5EF4-FFF2-40B4-BE49-F238E27FC236}">
+                <a16:creationId xmlns:a16="http://schemas.microsoft.com/office/drawing/2014/main" id="{61D933B4-6D2A-1CFE-BB23-36E2E82B0B64}"/>
+              </a:ext>
+            </a:extLst>
+          </p:cNvPr>
+          <p:cNvSpPr/>
+          <p:nvPr/>
+        </p:nvSpPr>
+        <p:spPr>
+          <a:xfrm>
+            <a:off x="132604" y="291358"/>
+            <a:ext cx="325120" cy="5423642"/>
+          </a:xfrm>
+          <a:prstGeom prst="rect">
+            <a:avLst/>
+          </a:prstGeom>
+          <a:solidFill>
+            <a:schemeClr val="bg1"/>
+          </a:solidFill>
+          <a:ln>
+            <a:noFill/>
+          </a:ln>
+        </p:spPr>
+        <p:style>
+          <a:lnRef idx="2">
+            <a:schemeClr val="accent1">
+              <a:shade val="15000"/>
+            </a:schemeClr>
+          </a:lnRef>
+          <a:fillRef idx="1">
+            <a:schemeClr val="accent1"/>
+          </a:fillRef>
+          <a:effectRef idx="0">
+            <a:schemeClr val="accent1"/>
+          </a:effectRef>
+          <a:fontRef idx="minor">
+            <a:schemeClr val="lt1"/>
+          </a:fontRef>
+        </p:style>
+        <p:txBody>
+          <a:bodyPr rtlCol="0" anchor="ctr"/>
+          <a:lstStyle/>
+          <a:p>
+            <a:pPr algn="ctr"/>
+            <a:endParaRPr lang="ko-KR" altLang="en-US"/>
+          </a:p>
+        </p:txBody>
+      </p:sp>
+      <p:pic>
+        <p:nvPicPr>
+          <p:cNvPr id="49" name="그림 48">
+            <a:extLst>
+              <a:ext uri="{FF2B5EF4-FFF2-40B4-BE49-F238E27FC236}">
+                <a16:creationId xmlns:a16="http://schemas.microsoft.com/office/drawing/2014/main" id="{95695D1D-2A4B-A111-C3CE-AFE1D5CFF21E}"/>
+              </a:ext>
+            </a:extLst>
+          </p:cNvPr>
+          <p:cNvPicPr>
+            <a:picLocks noChangeAspect="1"/>
+          </p:cNvPicPr>
+          <p:nvPr/>
+        </p:nvPicPr>
+        <p:blipFill>
+          <a:blip r:embed="rId5"/>
+          <a:stretch>
+            <a:fillRect/>
+          </a:stretch>
+        </p:blipFill>
+        <p:spPr>
+          <a:xfrm>
+            <a:off x="127651" y="690699"/>
+            <a:ext cx="329490" cy="2362381"/>
+          </a:xfrm>
+          <a:prstGeom prst="rect">
+            <a:avLst/>
+          </a:prstGeom>
+        </p:spPr>
+      </p:pic>
+      <p:pic>
+        <p:nvPicPr>
+          <p:cNvPr id="50" name="그림 49">
+            <a:extLst>
+              <a:ext uri="{FF2B5EF4-FFF2-40B4-BE49-F238E27FC236}">
+                <a16:creationId xmlns:a16="http://schemas.microsoft.com/office/drawing/2014/main" id="{46498C4D-F448-43C1-F757-6EC266AD747B}"/>
+              </a:ext>
+            </a:extLst>
+          </p:cNvPr>
+          <p:cNvPicPr>
+            <a:picLocks noChangeAspect="1"/>
+          </p:cNvPicPr>
+          <p:nvPr/>
+        </p:nvPicPr>
+        <p:blipFill>
+          <a:blip r:embed="rId6"/>
+          <a:stretch>
+            <a:fillRect/>
+          </a:stretch>
+        </p:blipFill>
+        <p:spPr>
+          <a:xfrm>
+            <a:off x="12339891" y="921958"/>
+            <a:ext cx="293928" cy="2375665"/>
+          </a:xfrm>
+          <a:prstGeom prst="rect">
+            <a:avLst/>
+          </a:prstGeom>
+        </p:spPr>
+      </p:pic>
+      <p:sp>
+        <p:nvSpPr>
+          <p:cNvPr id="12" name="직사각형 11">
+            <a:extLst>
+              <a:ext uri="{FF2B5EF4-FFF2-40B4-BE49-F238E27FC236}">
+                <a16:creationId xmlns:a16="http://schemas.microsoft.com/office/drawing/2014/main" id="{1C8A5691-691B-C51E-9438-F9C3A9260450}"/>
+              </a:ext>
+            </a:extLst>
+          </p:cNvPr>
+          <p:cNvSpPr/>
+          <p:nvPr/>
+        </p:nvSpPr>
+        <p:spPr>
+          <a:xfrm>
+            <a:off x="2843481" y="322473"/>
+            <a:ext cx="2364733" cy="1198970"/>
+          </a:xfrm>
+          <a:prstGeom prst="rect">
+            <a:avLst/>
+          </a:prstGeom>
+          <a:solidFill>
+            <a:schemeClr val="bg1"/>
+          </a:solidFill>
+          <a:ln>
+            <a:solidFill>
+              <a:schemeClr val="tx1"/>
+            </a:solidFill>
+          </a:ln>
+        </p:spPr>
+        <p:style>
+          <a:lnRef idx="2">
+            <a:schemeClr val="accent1">
+              <a:shade val="15000"/>
+            </a:schemeClr>
+          </a:lnRef>
+          <a:fillRef idx="1">
+            <a:schemeClr val="accent1"/>
+          </a:fillRef>
+          <a:effectRef idx="0">
+            <a:schemeClr val="accent1"/>
+          </a:effectRef>
+          <a:fontRef idx="minor">
+            <a:schemeClr val="lt1"/>
+          </a:fontRef>
+        </p:style>
+        <p:txBody>
+          <a:bodyPr rtlCol="0" anchor="ctr"/>
+          <a:lstStyle/>
+          <a:p>
+            <a:pPr algn="ctr"/>
+            <a:endParaRPr lang="ko-KR" altLang="en-US"/>
+          </a:p>
+        </p:txBody>
+      </p:sp>
+      <p:pic>
+        <p:nvPicPr>
+          <p:cNvPr id="13" name="그림 12">
+            <a:extLst>
+              <a:ext uri="{FF2B5EF4-FFF2-40B4-BE49-F238E27FC236}">
+                <a16:creationId xmlns:a16="http://schemas.microsoft.com/office/drawing/2014/main" id="{83BA6FA3-28B3-C5E9-7725-23B4792A5A58}"/>
+              </a:ext>
+            </a:extLst>
+          </p:cNvPr>
+          <p:cNvPicPr>
+            <a:picLocks noChangeAspect="1"/>
+          </p:cNvPicPr>
+          <p:nvPr/>
+        </p:nvPicPr>
+        <p:blipFill>
+          <a:blip r:embed="rId7"/>
+          <a:srcRect l="52671" r="38769"/>
+          <a:stretch>
+            <a:fillRect/>
+          </a:stretch>
+        </p:blipFill>
+        <p:spPr>
+          <a:xfrm>
+            <a:off x="2933854" y="417647"/>
+            <a:ext cx="392061" cy="425456"/>
+          </a:xfrm>
+          <a:prstGeom prst="rect">
+            <a:avLst/>
+          </a:prstGeom>
+          <a:ln>
+            <a:solidFill>
+              <a:schemeClr val="tx1"/>
+            </a:solidFill>
+          </a:ln>
+        </p:spPr>
+      </p:pic>
+      <p:pic>
+        <p:nvPicPr>
+          <p:cNvPr id="14" name="그림 13">
+            <a:extLst>
+              <a:ext uri="{FF2B5EF4-FFF2-40B4-BE49-F238E27FC236}">
+                <a16:creationId xmlns:a16="http://schemas.microsoft.com/office/drawing/2014/main" id="{26D1B702-B995-E602-E6BD-27FBC07D7393}"/>
+              </a:ext>
+            </a:extLst>
+          </p:cNvPr>
+          <p:cNvPicPr>
+            <a:picLocks noChangeAspect="1"/>
+          </p:cNvPicPr>
+          <p:nvPr/>
+        </p:nvPicPr>
+        <p:blipFill>
+          <a:blip r:embed="rId7"/>
+          <a:srcRect r="91439"/>
+          <a:stretch>
+            <a:fillRect/>
+          </a:stretch>
+        </p:blipFill>
+        <p:spPr>
+          <a:xfrm>
+            <a:off x="2933853" y="1015434"/>
+            <a:ext cx="392061" cy="425456"/>
+          </a:xfrm>
+          <a:prstGeom prst="rect">
+            <a:avLst/>
+          </a:prstGeom>
+          <a:ln>
+            <a:solidFill>
+              <a:schemeClr val="tx1"/>
+            </a:solidFill>
+          </a:ln>
+        </p:spPr>
+      </p:pic>
+      <p:pic>
+        <p:nvPicPr>
+          <p:cNvPr id="15" name="그림 14">
+            <a:extLst>
+              <a:ext uri="{FF2B5EF4-FFF2-40B4-BE49-F238E27FC236}">
+                <a16:creationId xmlns:a16="http://schemas.microsoft.com/office/drawing/2014/main" id="{3868B562-5F18-0B91-632D-21A2B5F92A0A}"/>
+              </a:ext>
+            </a:extLst>
+          </p:cNvPr>
+          <p:cNvPicPr>
+            <a:picLocks noChangeAspect="1"/>
+          </p:cNvPicPr>
+          <p:nvPr/>
+        </p:nvPicPr>
+        <p:blipFill>
+          <a:blip r:embed="rId8"/>
+          <a:srcRect t="36283"/>
+          <a:stretch>
+            <a:fillRect/>
+          </a:stretch>
+        </p:blipFill>
+        <p:spPr>
+          <a:xfrm rot="5400000">
+            <a:off x="4137664" y="-160475"/>
+            <a:ext cx="291019" cy="1581700"/>
+          </a:xfrm>
+          <a:prstGeom prst="rect">
+            <a:avLst/>
+          </a:prstGeom>
+        </p:spPr>
+      </p:pic>
+      <p:sp>
+        <p:nvSpPr>
+          <p:cNvPr id="17" name="직사각형 16">
+            <a:extLst>
+              <a:ext uri="{FF2B5EF4-FFF2-40B4-BE49-F238E27FC236}">
+                <a16:creationId xmlns:a16="http://schemas.microsoft.com/office/drawing/2014/main" id="{A3EEB747-A52C-6B57-0796-AAD8AF7B3B61}"/>
+              </a:ext>
+            </a:extLst>
+          </p:cNvPr>
+          <p:cNvSpPr/>
+          <p:nvPr/>
+        </p:nvSpPr>
+        <p:spPr>
+          <a:xfrm>
+            <a:off x="2990835" y="478174"/>
+            <a:ext cx="274652" cy="277477"/>
+          </a:xfrm>
+          <a:prstGeom prst="rect">
+            <a:avLst/>
+          </a:prstGeom>
+          <a:solidFill>
+            <a:srgbClr val="4393C3"/>
+          </a:solidFill>
+          <a:ln>
+            <a:noFill/>
+          </a:ln>
+        </p:spPr>
+        <p:style>
+          <a:lnRef idx="2">
+            <a:schemeClr val="accent1">
+              <a:shade val="15000"/>
+            </a:schemeClr>
+          </a:lnRef>
+          <a:fillRef idx="1">
+            <a:schemeClr val="accent1"/>
+          </a:fillRef>
+          <a:effectRef idx="0">
+            <a:schemeClr val="accent1"/>
+          </a:effectRef>
+          <a:fontRef idx="minor">
+            <a:schemeClr val="lt1"/>
+          </a:fontRef>
+        </p:style>
+        <p:txBody>
+          <a:bodyPr rtlCol="0" anchor="ctr"/>
+          <a:lstStyle/>
+          <a:p>
+            <a:pPr algn="ctr"/>
+            <a:endParaRPr lang="ko-KR" altLang="en-US"/>
+          </a:p>
+        </p:txBody>
+      </p:sp>
+      <p:sp>
+        <p:nvSpPr>
+          <p:cNvPr id="83" name="직사각형 82">
+            <a:extLst>
+              <a:ext uri="{FF2B5EF4-FFF2-40B4-BE49-F238E27FC236}">
+                <a16:creationId xmlns:a16="http://schemas.microsoft.com/office/drawing/2014/main" id="{7E9C99F5-FF62-F63C-C57E-6874388C2456}"/>
+              </a:ext>
+            </a:extLst>
+          </p:cNvPr>
+          <p:cNvSpPr/>
+          <p:nvPr/>
+        </p:nvSpPr>
+        <p:spPr>
+          <a:xfrm>
+            <a:off x="698943" y="4180470"/>
+            <a:ext cx="11384442" cy="2604242"/>
+          </a:xfrm>
+          <a:prstGeom prst="rect">
+            <a:avLst/>
+          </a:prstGeom>
+          <a:solidFill>
+            <a:schemeClr val="bg1"/>
+          </a:solidFill>
+          <a:ln>
+            <a:noFill/>
+          </a:ln>
+        </p:spPr>
+        <p:style>
+          <a:lnRef idx="2">
+            <a:schemeClr val="accent1">
+              <a:shade val="15000"/>
+            </a:schemeClr>
+          </a:lnRef>
+          <a:fillRef idx="1">
+            <a:schemeClr val="accent1"/>
+          </a:fillRef>
+          <a:effectRef idx="0">
+            <a:schemeClr val="accent1"/>
+          </a:effectRef>
+          <a:fontRef idx="minor">
+            <a:schemeClr val="lt1"/>
+          </a:fontRef>
+        </p:style>
+        <p:txBody>
+          <a:bodyPr rtlCol="0" anchor="ctr"/>
+          <a:lstStyle/>
+          <a:p>
+            <a:pPr algn="ctr"/>
+            <a:endParaRPr lang="ko-KR" altLang="en-US"/>
+          </a:p>
+        </p:txBody>
+      </p:sp>
+      <p:sp>
+        <p:nvSpPr>
+          <p:cNvPr id="84" name="직사각형 83">
+            <a:extLst>
+              <a:ext uri="{FF2B5EF4-FFF2-40B4-BE49-F238E27FC236}">
+                <a16:creationId xmlns:a16="http://schemas.microsoft.com/office/drawing/2014/main" id="{0F0FB1D2-4B68-A0E9-70B3-5141D144B1B8}"/>
+              </a:ext>
+            </a:extLst>
+          </p:cNvPr>
+          <p:cNvSpPr/>
+          <p:nvPr/>
+        </p:nvSpPr>
+        <p:spPr>
+          <a:xfrm>
+            <a:off x="744635" y="4187966"/>
+            <a:ext cx="311544" cy="914400"/>
+          </a:xfrm>
+          <a:prstGeom prst="rect">
+            <a:avLst/>
+          </a:prstGeom>
+          <a:solidFill>
+            <a:schemeClr val="bg1"/>
+          </a:solidFill>
+          <a:ln>
+            <a:noFill/>
+          </a:ln>
+        </p:spPr>
+        <p:style>
+          <a:lnRef idx="2">
+            <a:schemeClr val="accent1">
+              <a:shade val="15000"/>
+            </a:schemeClr>
+          </a:lnRef>
+          <a:fillRef idx="1">
+            <a:schemeClr val="accent1"/>
+          </a:fillRef>
+          <a:effectRef idx="0">
+            <a:schemeClr val="accent1"/>
+          </a:effectRef>
+          <a:fontRef idx="minor">
+            <a:schemeClr val="lt1"/>
+          </a:fontRef>
+        </p:style>
+        <p:txBody>
+          <a:bodyPr rtlCol="0" anchor="ctr"/>
+          <a:lstStyle/>
+          <a:p>
+            <a:pPr algn="ctr"/>
+            <a:r>
+              <a:rPr lang="ko-KR" altLang="en-US" dirty="0">
+                <a:solidFill>
+                  <a:schemeClr val="tx1"/>
+                </a:solidFill>
+              </a:rPr>
+              <a:t>연천군</a:t>
+            </a:r>
+          </a:p>
+        </p:txBody>
+      </p:sp>
+      <p:sp>
+        <p:nvSpPr>
+          <p:cNvPr id="85" name="직사각형 84">
+            <a:extLst>
+              <a:ext uri="{FF2B5EF4-FFF2-40B4-BE49-F238E27FC236}">
+                <a16:creationId xmlns:a16="http://schemas.microsoft.com/office/drawing/2014/main" id="{E556D8E9-6CAC-D266-7D25-C18D1A68F05B}"/>
+              </a:ext>
+            </a:extLst>
+          </p:cNvPr>
+          <p:cNvSpPr/>
+          <p:nvPr/>
+        </p:nvSpPr>
+        <p:spPr>
+          <a:xfrm>
+            <a:off x="1105274" y="4187966"/>
+            <a:ext cx="311544" cy="914400"/>
+          </a:xfrm>
+          <a:prstGeom prst="rect">
+            <a:avLst/>
+          </a:prstGeom>
+          <a:solidFill>
+            <a:schemeClr val="bg1"/>
+          </a:solidFill>
+          <a:ln>
+            <a:noFill/>
+          </a:ln>
+        </p:spPr>
+        <p:style>
+          <a:lnRef idx="2">
+            <a:schemeClr val="accent1">
+              <a:shade val="15000"/>
+            </a:schemeClr>
+          </a:lnRef>
+          <a:fillRef idx="1">
+            <a:schemeClr val="accent1"/>
+          </a:fillRef>
+          <a:effectRef idx="0">
+            <a:schemeClr val="accent1"/>
+          </a:effectRef>
+          <a:fontRef idx="minor">
+            <a:schemeClr val="lt1"/>
+          </a:fontRef>
+        </p:style>
+        <p:txBody>
+          <a:bodyPr rtlCol="0" anchor="ctr"/>
+          <a:lstStyle/>
+          <a:p>
+            <a:pPr algn="ctr"/>
+            <a:r>
+              <a:rPr lang="ko-KR" altLang="en-US" dirty="0">
+                <a:solidFill>
+                  <a:schemeClr val="tx1"/>
+                </a:solidFill>
+              </a:rPr>
+              <a:t>파주시</a:t>
+            </a:r>
+          </a:p>
+        </p:txBody>
+      </p:sp>
+      <p:sp>
+        <p:nvSpPr>
+          <p:cNvPr id="86" name="직사각형 85">
+            <a:extLst>
+              <a:ext uri="{FF2B5EF4-FFF2-40B4-BE49-F238E27FC236}">
+                <a16:creationId xmlns:a16="http://schemas.microsoft.com/office/drawing/2014/main" id="{C9CD5F99-CFB7-22EC-1D7F-8FC8E57C5B9A}"/>
+              </a:ext>
+            </a:extLst>
+          </p:cNvPr>
+          <p:cNvSpPr/>
+          <p:nvPr/>
+        </p:nvSpPr>
+        <p:spPr>
+          <a:xfrm>
+            <a:off x="1465913" y="4187966"/>
+            <a:ext cx="311544" cy="914400"/>
+          </a:xfrm>
+          <a:prstGeom prst="rect">
+            <a:avLst/>
+          </a:prstGeom>
+          <a:solidFill>
+            <a:schemeClr val="bg1"/>
+          </a:solidFill>
+          <a:ln>
+            <a:noFill/>
+          </a:ln>
+        </p:spPr>
+        <p:style>
+          <a:lnRef idx="2">
+            <a:schemeClr val="accent1">
+              <a:shade val="15000"/>
+            </a:schemeClr>
+          </a:lnRef>
+          <a:fillRef idx="1">
+            <a:schemeClr val="accent1"/>
+          </a:fillRef>
+          <a:effectRef idx="0">
+            <a:schemeClr val="accent1"/>
+          </a:effectRef>
+          <a:fontRef idx="minor">
+            <a:schemeClr val="lt1"/>
+          </a:fontRef>
+        </p:style>
+        <p:txBody>
+          <a:bodyPr rtlCol="0" anchor="ctr"/>
+          <a:lstStyle/>
+          <a:p>
+            <a:pPr algn="ctr"/>
+            <a:r>
+              <a:rPr lang="ko-KR" altLang="en-US" dirty="0">
+                <a:solidFill>
+                  <a:schemeClr val="tx1"/>
+                </a:solidFill>
+              </a:rPr>
+              <a:t>안성시</a:t>
+            </a:r>
+          </a:p>
+        </p:txBody>
+      </p:sp>
+      <p:sp>
+        <p:nvSpPr>
+          <p:cNvPr id="87" name="직사각형 86">
+            <a:extLst>
+              <a:ext uri="{FF2B5EF4-FFF2-40B4-BE49-F238E27FC236}">
+                <a16:creationId xmlns:a16="http://schemas.microsoft.com/office/drawing/2014/main" id="{36123B9C-0427-FAA9-300B-C2CB29E2D34F}"/>
+              </a:ext>
+            </a:extLst>
+          </p:cNvPr>
+          <p:cNvSpPr/>
+          <p:nvPr/>
+        </p:nvSpPr>
+        <p:spPr>
+          <a:xfrm>
+            <a:off x="1826552" y="4187966"/>
+            <a:ext cx="311544" cy="914400"/>
+          </a:xfrm>
+          <a:prstGeom prst="rect">
+            <a:avLst/>
+          </a:prstGeom>
+          <a:solidFill>
+            <a:schemeClr val="bg1"/>
+          </a:solidFill>
+          <a:ln>
+            <a:noFill/>
+          </a:ln>
+        </p:spPr>
+        <p:style>
+          <a:lnRef idx="2">
+            <a:schemeClr val="accent1">
+              <a:shade val="15000"/>
+            </a:schemeClr>
+          </a:lnRef>
+          <a:fillRef idx="1">
+            <a:schemeClr val="accent1"/>
+          </a:fillRef>
+          <a:effectRef idx="0">
+            <a:schemeClr val="accent1"/>
+          </a:effectRef>
+          <a:fontRef idx="minor">
+            <a:schemeClr val="lt1"/>
+          </a:fontRef>
+        </p:style>
+        <p:txBody>
+          <a:bodyPr rtlCol="0" anchor="ctr"/>
+          <a:lstStyle/>
+          <a:p>
+            <a:pPr algn="ctr"/>
+            <a:r>
+              <a:rPr lang="ko-KR" altLang="en-US" dirty="0">
+                <a:solidFill>
+                  <a:schemeClr val="tx1"/>
+                </a:solidFill>
+              </a:rPr>
+              <a:t>화성시</a:t>
+            </a:r>
+          </a:p>
+        </p:txBody>
+      </p:sp>
+      <p:sp>
+        <p:nvSpPr>
+          <p:cNvPr id="88" name="직사각형 87">
+            <a:extLst>
+              <a:ext uri="{FF2B5EF4-FFF2-40B4-BE49-F238E27FC236}">
+                <a16:creationId xmlns:a16="http://schemas.microsoft.com/office/drawing/2014/main" id="{CC47F7CE-6213-3BDD-79A8-07E6953F0922}"/>
+              </a:ext>
+            </a:extLst>
+          </p:cNvPr>
+          <p:cNvSpPr/>
+          <p:nvPr/>
+        </p:nvSpPr>
+        <p:spPr>
+          <a:xfrm>
+            <a:off x="2187191" y="4187966"/>
+            <a:ext cx="311544" cy="914400"/>
+          </a:xfrm>
+          <a:prstGeom prst="rect">
+            <a:avLst/>
+          </a:prstGeom>
+          <a:solidFill>
+            <a:schemeClr val="bg1"/>
+          </a:solidFill>
+          <a:ln>
+            <a:noFill/>
+          </a:ln>
+        </p:spPr>
+        <p:style>
+          <a:lnRef idx="2">
+            <a:schemeClr val="accent1">
+              <a:shade val="15000"/>
+            </a:schemeClr>
+          </a:lnRef>
+          <a:fillRef idx="1">
+            <a:schemeClr val="accent1"/>
+          </a:fillRef>
+          <a:effectRef idx="0">
+            <a:schemeClr val="accent1"/>
+          </a:effectRef>
+          <a:fontRef idx="minor">
+            <a:schemeClr val="lt1"/>
+          </a:fontRef>
+        </p:style>
+        <p:txBody>
+          <a:bodyPr rtlCol="0" anchor="ctr"/>
+          <a:lstStyle/>
+          <a:p>
+            <a:pPr algn="ctr"/>
+            <a:r>
+              <a:rPr lang="ko-KR" altLang="en-US" dirty="0">
+                <a:solidFill>
+                  <a:schemeClr val="tx1"/>
+                </a:solidFill>
+              </a:rPr>
+              <a:t>포천시</a:t>
+            </a:r>
+          </a:p>
+        </p:txBody>
+      </p:sp>
+      <p:sp>
+        <p:nvSpPr>
+          <p:cNvPr id="89" name="직사각형 88">
+            <a:extLst>
+              <a:ext uri="{FF2B5EF4-FFF2-40B4-BE49-F238E27FC236}">
+                <a16:creationId xmlns:a16="http://schemas.microsoft.com/office/drawing/2014/main" id="{80888F83-91B5-105C-3F69-497B8328BAF0}"/>
+              </a:ext>
+            </a:extLst>
+          </p:cNvPr>
+          <p:cNvSpPr/>
+          <p:nvPr/>
+        </p:nvSpPr>
+        <p:spPr>
+          <a:xfrm>
+            <a:off x="2547830" y="4187966"/>
+            <a:ext cx="311544" cy="914400"/>
+          </a:xfrm>
+          <a:prstGeom prst="rect">
+            <a:avLst/>
+          </a:prstGeom>
+          <a:solidFill>
+            <a:schemeClr val="bg1"/>
+          </a:solidFill>
+          <a:ln>
+            <a:noFill/>
+          </a:ln>
+        </p:spPr>
+        <p:style>
+          <a:lnRef idx="2">
+            <a:schemeClr val="accent1">
+              <a:shade val="15000"/>
+            </a:schemeClr>
+          </a:lnRef>
+          <a:fillRef idx="1">
+            <a:schemeClr val="accent1"/>
+          </a:fillRef>
+          <a:effectRef idx="0">
+            <a:schemeClr val="accent1"/>
+          </a:effectRef>
+          <a:fontRef idx="minor">
+            <a:schemeClr val="lt1"/>
+          </a:fontRef>
+        </p:style>
+        <p:txBody>
+          <a:bodyPr rtlCol="0" anchor="ctr"/>
+          <a:lstStyle/>
+          <a:p>
+            <a:pPr algn="ctr"/>
+            <a:r>
+              <a:rPr lang="ko-KR" altLang="en-US" dirty="0">
+                <a:solidFill>
+                  <a:schemeClr val="tx1"/>
+                </a:solidFill>
+              </a:rPr>
+              <a:t>여주시</a:t>
+            </a:r>
+            <a:endParaRPr lang="en-US" altLang="ko-KR" dirty="0">
+              <a:solidFill>
+                <a:schemeClr val="tx1"/>
+              </a:solidFill>
+            </a:endParaRPr>
+          </a:p>
+        </p:txBody>
+      </p:sp>
+      <p:sp>
+        <p:nvSpPr>
+          <p:cNvPr id="90" name="직사각형 89">
+            <a:extLst>
+              <a:ext uri="{FF2B5EF4-FFF2-40B4-BE49-F238E27FC236}">
+                <a16:creationId xmlns:a16="http://schemas.microsoft.com/office/drawing/2014/main" id="{401B2B6B-DC04-4486-EDAF-43C3005C3063}"/>
+              </a:ext>
+            </a:extLst>
+          </p:cNvPr>
+          <p:cNvSpPr/>
+          <p:nvPr/>
+        </p:nvSpPr>
+        <p:spPr>
+          <a:xfrm>
+            <a:off x="2908469" y="4187966"/>
+            <a:ext cx="311544" cy="914400"/>
+          </a:xfrm>
+          <a:prstGeom prst="rect">
+            <a:avLst/>
+          </a:prstGeom>
+          <a:solidFill>
+            <a:schemeClr val="bg1"/>
+          </a:solidFill>
+          <a:ln>
+            <a:noFill/>
+          </a:ln>
+        </p:spPr>
+        <p:style>
+          <a:lnRef idx="2">
+            <a:schemeClr val="accent1">
+              <a:shade val="15000"/>
+            </a:schemeClr>
+          </a:lnRef>
+          <a:fillRef idx="1">
+            <a:schemeClr val="accent1"/>
+          </a:fillRef>
+          <a:effectRef idx="0">
+            <a:schemeClr val="accent1"/>
+          </a:effectRef>
+          <a:fontRef idx="minor">
+            <a:schemeClr val="lt1"/>
+          </a:fontRef>
+        </p:style>
+        <p:txBody>
+          <a:bodyPr rtlCol="0" anchor="ctr"/>
+          <a:lstStyle/>
+          <a:p>
+            <a:pPr algn="ctr"/>
+            <a:r>
+              <a:rPr lang="ko-KR" altLang="en-US" dirty="0">
+                <a:solidFill>
+                  <a:schemeClr val="tx1"/>
+                </a:solidFill>
+              </a:rPr>
+              <a:t>양평군</a:t>
+            </a:r>
+            <a:endParaRPr lang="en-US" altLang="ko-KR" dirty="0">
+              <a:solidFill>
+                <a:schemeClr val="tx1"/>
+              </a:solidFill>
+            </a:endParaRPr>
+          </a:p>
+        </p:txBody>
+      </p:sp>
+      <p:sp>
+        <p:nvSpPr>
+          <p:cNvPr id="91" name="직사각형 90">
+            <a:extLst>
+              <a:ext uri="{FF2B5EF4-FFF2-40B4-BE49-F238E27FC236}">
+                <a16:creationId xmlns:a16="http://schemas.microsoft.com/office/drawing/2014/main" id="{1EB5691A-ED20-C5D8-891B-D2813AB66DD9}"/>
+              </a:ext>
+            </a:extLst>
+          </p:cNvPr>
+          <p:cNvSpPr/>
+          <p:nvPr/>
+        </p:nvSpPr>
+        <p:spPr>
+          <a:xfrm>
+            <a:off x="3269108" y="4187966"/>
+            <a:ext cx="311544" cy="914400"/>
+          </a:xfrm>
+          <a:prstGeom prst="rect">
+            <a:avLst/>
+          </a:prstGeom>
+          <a:solidFill>
+            <a:schemeClr val="bg1"/>
+          </a:solidFill>
+          <a:ln>
+            <a:noFill/>
+          </a:ln>
+        </p:spPr>
+        <p:style>
+          <a:lnRef idx="2">
+            <a:schemeClr val="accent1">
+              <a:shade val="15000"/>
+            </a:schemeClr>
+          </a:lnRef>
+          <a:fillRef idx="1">
+            <a:schemeClr val="accent1"/>
+          </a:fillRef>
+          <a:effectRef idx="0">
+            <a:schemeClr val="accent1"/>
+          </a:effectRef>
+          <a:fontRef idx="minor">
+            <a:schemeClr val="lt1"/>
+          </a:fontRef>
+        </p:style>
+        <p:txBody>
+          <a:bodyPr rtlCol="0" anchor="ctr"/>
+          <a:lstStyle/>
+          <a:p>
+            <a:pPr algn="ctr"/>
+            <a:r>
+              <a:rPr lang="ko-KR" altLang="en-US" dirty="0">
+                <a:solidFill>
+                  <a:schemeClr val="tx1"/>
+                </a:solidFill>
+              </a:rPr>
+              <a:t>가평군</a:t>
+            </a:r>
+            <a:endParaRPr lang="en-US" altLang="ko-KR" dirty="0">
+              <a:solidFill>
+                <a:schemeClr val="tx1"/>
+              </a:solidFill>
+            </a:endParaRPr>
+          </a:p>
+        </p:txBody>
+      </p:sp>
+      <p:sp>
+        <p:nvSpPr>
+          <p:cNvPr id="92" name="직사각형 91">
+            <a:extLst>
+              <a:ext uri="{FF2B5EF4-FFF2-40B4-BE49-F238E27FC236}">
+                <a16:creationId xmlns:a16="http://schemas.microsoft.com/office/drawing/2014/main" id="{5589F8D3-71C8-828F-EB59-F145C5EFF3E0}"/>
+              </a:ext>
+            </a:extLst>
+          </p:cNvPr>
+          <p:cNvSpPr/>
+          <p:nvPr/>
+        </p:nvSpPr>
+        <p:spPr>
+          <a:xfrm>
+            <a:off x="3629747" y="4187966"/>
+            <a:ext cx="311544" cy="914400"/>
+          </a:xfrm>
+          <a:prstGeom prst="rect">
+            <a:avLst/>
+          </a:prstGeom>
+          <a:solidFill>
+            <a:schemeClr val="bg1"/>
+          </a:solidFill>
+          <a:ln>
+            <a:noFill/>
+          </a:ln>
+        </p:spPr>
+        <p:style>
+          <a:lnRef idx="2">
+            <a:schemeClr val="accent1">
+              <a:shade val="15000"/>
+            </a:schemeClr>
+          </a:lnRef>
+          <a:fillRef idx="1">
+            <a:schemeClr val="accent1"/>
+          </a:fillRef>
+          <a:effectRef idx="0">
+            <a:schemeClr val="accent1"/>
+          </a:effectRef>
+          <a:fontRef idx="minor">
+            <a:schemeClr val="lt1"/>
+          </a:fontRef>
+        </p:style>
+        <p:txBody>
+          <a:bodyPr rtlCol="0" anchor="ctr"/>
+          <a:lstStyle/>
+          <a:p>
+            <a:pPr algn="ctr"/>
+            <a:r>
+              <a:rPr lang="ko-KR" altLang="en-US" dirty="0">
+                <a:solidFill>
+                  <a:schemeClr val="tx1"/>
+                </a:solidFill>
+              </a:rPr>
+              <a:t>이천시</a:t>
+            </a:r>
+            <a:endParaRPr lang="en-US" altLang="ko-KR" dirty="0">
+              <a:solidFill>
+                <a:schemeClr val="tx1"/>
+              </a:solidFill>
+            </a:endParaRPr>
+          </a:p>
+        </p:txBody>
+      </p:sp>
+      <p:sp>
+        <p:nvSpPr>
+          <p:cNvPr id="93" name="직사각형 92">
+            <a:extLst>
+              <a:ext uri="{FF2B5EF4-FFF2-40B4-BE49-F238E27FC236}">
+                <a16:creationId xmlns:a16="http://schemas.microsoft.com/office/drawing/2014/main" id="{BE0D87F7-4462-D33C-CB55-85B7A21885AB}"/>
+              </a:ext>
+            </a:extLst>
+          </p:cNvPr>
+          <p:cNvSpPr/>
+          <p:nvPr/>
+        </p:nvSpPr>
+        <p:spPr>
+          <a:xfrm>
+            <a:off x="3990386" y="4187966"/>
+            <a:ext cx="311544" cy="914400"/>
+          </a:xfrm>
+          <a:prstGeom prst="rect">
+            <a:avLst/>
+          </a:prstGeom>
+          <a:solidFill>
+            <a:schemeClr val="bg1"/>
+          </a:solidFill>
+          <a:ln>
+            <a:noFill/>
+          </a:ln>
+        </p:spPr>
+        <p:style>
+          <a:lnRef idx="2">
+            <a:schemeClr val="accent1">
+              <a:shade val="15000"/>
+            </a:schemeClr>
+          </a:lnRef>
+          <a:fillRef idx="1">
+            <a:schemeClr val="accent1"/>
+          </a:fillRef>
+          <a:effectRef idx="0">
+            <a:schemeClr val="accent1"/>
+          </a:effectRef>
+          <a:fontRef idx="minor">
+            <a:schemeClr val="lt1"/>
+          </a:fontRef>
+        </p:style>
+        <p:txBody>
+          <a:bodyPr rtlCol="0" anchor="ctr"/>
+          <a:lstStyle/>
+          <a:p>
+            <a:pPr algn="ctr"/>
+            <a:r>
+              <a:rPr lang="ko-KR" altLang="en-US" dirty="0">
+                <a:solidFill>
+                  <a:schemeClr val="tx1"/>
+                </a:solidFill>
+              </a:rPr>
+              <a:t>용인시</a:t>
+            </a:r>
+            <a:endParaRPr lang="en-US" altLang="ko-KR" dirty="0">
+              <a:solidFill>
+                <a:schemeClr val="tx1"/>
+              </a:solidFill>
+            </a:endParaRPr>
+          </a:p>
+        </p:txBody>
+      </p:sp>
+      <p:sp>
+        <p:nvSpPr>
+          <p:cNvPr id="94" name="직사각형 93">
+            <a:extLst>
+              <a:ext uri="{FF2B5EF4-FFF2-40B4-BE49-F238E27FC236}">
+                <a16:creationId xmlns:a16="http://schemas.microsoft.com/office/drawing/2014/main" id="{F8E04D5E-18FF-0AC1-940B-C58E02E6CCF0}"/>
+              </a:ext>
+            </a:extLst>
+          </p:cNvPr>
+          <p:cNvSpPr/>
+          <p:nvPr/>
+        </p:nvSpPr>
+        <p:spPr>
+          <a:xfrm>
+            <a:off x="4351025" y="4187966"/>
+            <a:ext cx="311544" cy="914400"/>
+          </a:xfrm>
+          <a:prstGeom prst="rect">
+            <a:avLst/>
+          </a:prstGeom>
+          <a:solidFill>
+            <a:schemeClr val="bg1"/>
+          </a:solidFill>
+          <a:ln>
+            <a:noFill/>
+          </a:ln>
+        </p:spPr>
+        <p:style>
+          <a:lnRef idx="2">
+            <a:schemeClr val="accent1">
+              <a:shade val="15000"/>
+            </a:schemeClr>
+          </a:lnRef>
+          <a:fillRef idx="1">
+            <a:schemeClr val="accent1"/>
+          </a:fillRef>
+          <a:effectRef idx="0">
+            <a:schemeClr val="accent1"/>
+          </a:effectRef>
+          <a:fontRef idx="minor">
+            <a:schemeClr val="lt1"/>
+          </a:fontRef>
+        </p:style>
+        <p:txBody>
+          <a:bodyPr rtlCol="0" anchor="ctr"/>
+          <a:lstStyle/>
+          <a:p>
+            <a:pPr algn="ctr"/>
+            <a:r>
+              <a:rPr lang="ko-KR" altLang="en-US" dirty="0">
+                <a:solidFill>
+                  <a:schemeClr val="tx1"/>
+                </a:solidFill>
+              </a:rPr>
+              <a:t>평택시</a:t>
+            </a:r>
+            <a:endParaRPr lang="en-US" altLang="ko-KR" dirty="0">
+              <a:solidFill>
+                <a:schemeClr val="tx1"/>
+              </a:solidFill>
+            </a:endParaRPr>
+          </a:p>
+        </p:txBody>
+      </p:sp>
+      <p:sp>
+        <p:nvSpPr>
+          <p:cNvPr id="95" name="직사각형 94">
+            <a:extLst>
+              <a:ext uri="{FF2B5EF4-FFF2-40B4-BE49-F238E27FC236}">
+                <a16:creationId xmlns:a16="http://schemas.microsoft.com/office/drawing/2014/main" id="{9C5A7296-955E-EF0E-5DC0-5F74B21CD69B}"/>
+              </a:ext>
+            </a:extLst>
+          </p:cNvPr>
+          <p:cNvSpPr/>
+          <p:nvPr/>
+        </p:nvSpPr>
+        <p:spPr>
+          <a:xfrm>
+            <a:off x="4711664" y="4187966"/>
+            <a:ext cx="311544" cy="914400"/>
+          </a:xfrm>
+          <a:prstGeom prst="rect">
+            <a:avLst/>
+          </a:prstGeom>
+          <a:solidFill>
+            <a:schemeClr val="bg1"/>
+          </a:solidFill>
+          <a:ln>
+            <a:noFill/>
+          </a:ln>
+        </p:spPr>
+        <p:style>
+          <a:lnRef idx="2">
+            <a:schemeClr val="accent1">
+              <a:shade val="15000"/>
+            </a:schemeClr>
+          </a:lnRef>
+          <a:fillRef idx="1">
+            <a:schemeClr val="accent1"/>
+          </a:fillRef>
+          <a:effectRef idx="0">
+            <a:schemeClr val="accent1"/>
+          </a:effectRef>
+          <a:fontRef idx="minor">
+            <a:schemeClr val="lt1"/>
+          </a:fontRef>
+        </p:style>
+        <p:txBody>
+          <a:bodyPr rtlCol="0" anchor="ctr"/>
+          <a:lstStyle/>
+          <a:p>
+            <a:pPr algn="ctr"/>
+            <a:r>
+              <a:rPr lang="ko-KR" altLang="en-US" dirty="0">
+                <a:solidFill>
+                  <a:schemeClr val="tx1"/>
+                </a:solidFill>
+              </a:rPr>
+              <a:t>안산시</a:t>
+            </a:r>
+            <a:endParaRPr lang="en-US" altLang="ko-KR" dirty="0">
+              <a:solidFill>
+                <a:schemeClr val="tx1"/>
+              </a:solidFill>
+            </a:endParaRPr>
+          </a:p>
+        </p:txBody>
+      </p:sp>
+      <p:sp>
+        <p:nvSpPr>
+          <p:cNvPr id="96" name="직사각형 95">
+            <a:extLst>
+              <a:ext uri="{FF2B5EF4-FFF2-40B4-BE49-F238E27FC236}">
+                <a16:creationId xmlns:a16="http://schemas.microsoft.com/office/drawing/2014/main" id="{2269D95C-958B-311D-08B9-1345F960C191}"/>
+              </a:ext>
+            </a:extLst>
+          </p:cNvPr>
+          <p:cNvSpPr/>
+          <p:nvPr/>
+        </p:nvSpPr>
+        <p:spPr>
+          <a:xfrm>
+            <a:off x="5072303" y="4187966"/>
+            <a:ext cx="311544" cy="914400"/>
+          </a:xfrm>
+          <a:prstGeom prst="rect">
+            <a:avLst/>
+          </a:prstGeom>
+          <a:solidFill>
+            <a:schemeClr val="bg1"/>
+          </a:solidFill>
+          <a:ln>
+            <a:noFill/>
+          </a:ln>
+        </p:spPr>
+        <p:style>
+          <a:lnRef idx="2">
+            <a:schemeClr val="accent1">
+              <a:shade val="15000"/>
+            </a:schemeClr>
+          </a:lnRef>
+          <a:fillRef idx="1">
+            <a:schemeClr val="accent1"/>
+          </a:fillRef>
+          <a:effectRef idx="0">
+            <a:schemeClr val="accent1"/>
+          </a:effectRef>
+          <a:fontRef idx="minor">
+            <a:schemeClr val="lt1"/>
+          </a:fontRef>
+        </p:style>
+        <p:txBody>
+          <a:bodyPr rtlCol="0" anchor="ctr"/>
+          <a:lstStyle/>
+          <a:p>
+            <a:pPr algn="ctr"/>
+            <a:r>
+              <a:rPr lang="ko-KR" altLang="en-US" dirty="0">
+                <a:solidFill>
+                  <a:schemeClr val="tx1"/>
+                </a:solidFill>
+              </a:rPr>
+              <a:t>남양주</a:t>
+            </a:r>
+            <a:endParaRPr lang="en-US" altLang="ko-KR" dirty="0">
+              <a:solidFill>
+                <a:schemeClr val="tx1"/>
+              </a:solidFill>
+            </a:endParaRPr>
+          </a:p>
+        </p:txBody>
+      </p:sp>
+      <p:sp>
+        <p:nvSpPr>
+          <p:cNvPr id="97" name="직사각형 96">
+            <a:extLst>
+              <a:ext uri="{FF2B5EF4-FFF2-40B4-BE49-F238E27FC236}">
+                <a16:creationId xmlns:a16="http://schemas.microsoft.com/office/drawing/2014/main" id="{113AC47D-5EE4-F602-AA96-2DF25AEE98A2}"/>
+              </a:ext>
+            </a:extLst>
+          </p:cNvPr>
+          <p:cNvSpPr/>
+          <p:nvPr/>
+        </p:nvSpPr>
+        <p:spPr>
+          <a:xfrm>
+            <a:off x="5432942" y="4187966"/>
+            <a:ext cx="311544" cy="914400"/>
+          </a:xfrm>
+          <a:prstGeom prst="rect">
+            <a:avLst/>
+          </a:prstGeom>
+          <a:solidFill>
+            <a:schemeClr val="bg1"/>
+          </a:solidFill>
+          <a:ln>
+            <a:noFill/>
+          </a:ln>
+        </p:spPr>
+        <p:style>
+          <a:lnRef idx="2">
+            <a:schemeClr val="accent1">
+              <a:shade val="15000"/>
+            </a:schemeClr>
+          </a:lnRef>
+          <a:fillRef idx="1">
+            <a:schemeClr val="accent1"/>
+          </a:fillRef>
+          <a:effectRef idx="0">
+            <a:schemeClr val="accent1"/>
+          </a:effectRef>
+          <a:fontRef idx="minor">
+            <a:schemeClr val="lt1"/>
+          </a:fontRef>
+        </p:style>
+        <p:txBody>
+          <a:bodyPr rtlCol="0" anchor="ctr"/>
+          <a:lstStyle/>
+          <a:p>
+            <a:pPr algn="ctr"/>
+            <a:r>
+              <a:rPr lang="ko-KR" altLang="en-US" dirty="0">
+                <a:solidFill>
+                  <a:schemeClr val="tx1"/>
+                </a:solidFill>
+              </a:rPr>
+              <a:t>김포시</a:t>
+            </a:r>
+            <a:endParaRPr lang="en-US" altLang="ko-KR" dirty="0">
+              <a:solidFill>
+                <a:schemeClr val="tx1"/>
+              </a:solidFill>
+            </a:endParaRPr>
+          </a:p>
+        </p:txBody>
+      </p:sp>
+      <p:sp>
+        <p:nvSpPr>
+          <p:cNvPr id="98" name="직사각형 97">
+            <a:extLst>
+              <a:ext uri="{FF2B5EF4-FFF2-40B4-BE49-F238E27FC236}">
+                <a16:creationId xmlns:a16="http://schemas.microsoft.com/office/drawing/2014/main" id="{DC9E1378-44A2-3B60-ED7C-2F0955BE58BE}"/>
+              </a:ext>
+            </a:extLst>
+          </p:cNvPr>
+          <p:cNvSpPr/>
+          <p:nvPr/>
+        </p:nvSpPr>
+        <p:spPr>
+          <a:xfrm>
+            <a:off x="5793581" y="4187966"/>
+            <a:ext cx="311544" cy="914400"/>
+          </a:xfrm>
+          <a:prstGeom prst="rect">
+            <a:avLst/>
+          </a:prstGeom>
+          <a:solidFill>
+            <a:schemeClr val="bg1"/>
+          </a:solidFill>
+          <a:ln>
+            <a:noFill/>
+          </a:ln>
+        </p:spPr>
+        <p:style>
+          <a:lnRef idx="2">
+            <a:schemeClr val="accent1">
+              <a:shade val="15000"/>
+            </a:schemeClr>
+          </a:lnRef>
+          <a:fillRef idx="1">
+            <a:schemeClr val="accent1"/>
+          </a:fillRef>
+          <a:effectRef idx="0">
+            <a:schemeClr val="accent1"/>
+          </a:effectRef>
+          <a:fontRef idx="minor">
+            <a:schemeClr val="lt1"/>
+          </a:fontRef>
+        </p:style>
+        <p:txBody>
+          <a:bodyPr rtlCol="0" anchor="ctr"/>
+          <a:lstStyle/>
+          <a:p>
+            <a:pPr algn="ctr"/>
+            <a:r>
+              <a:rPr lang="ko-KR" altLang="en-US" dirty="0">
+                <a:solidFill>
+                  <a:schemeClr val="tx1"/>
+                </a:solidFill>
+              </a:rPr>
+              <a:t>시흥시</a:t>
+            </a:r>
+            <a:endParaRPr lang="en-US" altLang="ko-KR" dirty="0">
+              <a:solidFill>
+                <a:schemeClr val="tx1"/>
+              </a:solidFill>
+            </a:endParaRPr>
+          </a:p>
+        </p:txBody>
+      </p:sp>
+      <p:sp>
+        <p:nvSpPr>
+          <p:cNvPr id="99" name="직사각형 98">
+            <a:extLst>
+              <a:ext uri="{FF2B5EF4-FFF2-40B4-BE49-F238E27FC236}">
+                <a16:creationId xmlns:a16="http://schemas.microsoft.com/office/drawing/2014/main" id="{E3B43964-7DA4-8BF0-5557-89CEC8F13498}"/>
+              </a:ext>
+            </a:extLst>
+          </p:cNvPr>
+          <p:cNvSpPr/>
+          <p:nvPr/>
+        </p:nvSpPr>
+        <p:spPr>
+          <a:xfrm>
+            <a:off x="6154220" y="4187966"/>
+            <a:ext cx="311544" cy="914400"/>
+          </a:xfrm>
+          <a:prstGeom prst="rect">
+            <a:avLst/>
+          </a:prstGeom>
+          <a:solidFill>
+            <a:schemeClr val="bg1"/>
+          </a:solidFill>
+          <a:ln>
+            <a:noFill/>
+          </a:ln>
+        </p:spPr>
+        <p:style>
+          <a:lnRef idx="2">
+            <a:schemeClr val="accent1">
+              <a:shade val="15000"/>
+            </a:schemeClr>
+          </a:lnRef>
+          <a:fillRef idx="1">
+            <a:schemeClr val="accent1"/>
+          </a:fillRef>
+          <a:effectRef idx="0">
+            <a:schemeClr val="accent1"/>
+          </a:effectRef>
+          <a:fontRef idx="minor">
+            <a:schemeClr val="lt1"/>
+          </a:fontRef>
+        </p:style>
+        <p:txBody>
+          <a:bodyPr rtlCol="0" anchor="ctr"/>
+          <a:lstStyle/>
+          <a:p>
+            <a:pPr algn="ctr"/>
+            <a:r>
+              <a:rPr lang="ko-KR" altLang="en-US" dirty="0">
+                <a:solidFill>
+                  <a:schemeClr val="tx1"/>
+                </a:solidFill>
+              </a:rPr>
+              <a:t>양주시</a:t>
+            </a:r>
+            <a:endParaRPr lang="en-US" altLang="ko-KR" dirty="0">
+              <a:solidFill>
+                <a:schemeClr val="tx1"/>
+              </a:solidFill>
+            </a:endParaRPr>
+          </a:p>
+        </p:txBody>
+      </p:sp>
+      <p:sp>
+        <p:nvSpPr>
+          <p:cNvPr id="100" name="직사각형 99">
+            <a:extLst>
+              <a:ext uri="{FF2B5EF4-FFF2-40B4-BE49-F238E27FC236}">
+                <a16:creationId xmlns:a16="http://schemas.microsoft.com/office/drawing/2014/main" id="{5A41AF4C-683F-5E90-1014-BA8B5F0E04F2}"/>
+              </a:ext>
+            </a:extLst>
+          </p:cNvPr>
+          <p:cNvSpPr/>
+          <p:nvPr/>
+        </p:nvSpPr>
+        <p:spPr>
+          <a:xfrm>
+            <a:off x="6514859" y="4187966"/>
+            <a:ext cx="311544" cy="914400"/>
+          </a:xfrm>
+          <a:prstGeom prst="rect">
+            <a:avLst/>
+          </a:prstGeom>
+          <a:solidFill>
+            <a:schemeClr val="bg1"/>
+          </a:solidFill>
+          <a:ln>
+            <a:noFill/>
+          </a:ln>
+        </p:spPr>
+        <p:style>
+          <a:lnRef idx="2">
+            <a:schemeClr val="accent1">
+              <a:shade val="15000"/>
+            </a:schemeClr>
+          </a:lnRef>
+          <a:fillRef idx="1">
+            <a:schemeClr val="accent1"/>
+          </a:fillRef>
+          <a:effectRef idx="0">
+            <a:schemeClr val="accent1"/>
+          </a:effectRef>
+          <a:fontRef idx="minor">
+            <a:schemeClr val="lt1"/>
+          </a:fontRef>
+        </p:style>
+        <p:txBody>
+          <a:bodyPr rtlCol="0" anchor="ctr"/>
+          <a:lstStyle/>
+          <a:p>
+            <a:pPr algn="ctr"/>
+            <a:r>
+              <a:rPr lang="ko-KR" altLang="en-US" dirty="0">
+                <a:solidFill>
+                  <a:schemeClr val="tx1"/>
+                </a:solidFill>
+              </a:rPr>
+              <a:t>고양시</a:t>
+            </a:r>
+            <a:endParaRPr lang="en-US" altLang="ko-KR" dirty="0">
+              <a:solidFill>
+                <a:schemeClr val="tx1"/>
+              </a:solidFill>
+            </a:endParaRPr>
+          </a:p>
+        </p:txBody>
+      </p:sp>
+      <p:sp>
+        <p:nvSpPr>
+          <p:cNvPr id="101" name="직사각형 100">
+            <a:extLst>
+              <a:ext uri="{FF2B5EF4-FFF2-40B4-BE49-F238E27FC236}">
+                <a16:creationId xmlns:a16="http://schemas.microsoft.com/office/drawing/2014/main" id="{9775CE90-15B4-81CC-FCBE-A6E00622963F}"/>
+              </a:ext>
+            </a:extLst>
+          </p:cNvPr>
+          <p:cNvSpPr/>
+          <p:nvPr/>
+        </p:nvSpPr>
+        <p:spPr>
+          <a:xfrm>
+            <a:off x="6875498" y="4187966"/>
+            <a:ext cx="311544" cy="914400"/>
+          </a:xfrm>
+          <a:prstGeom prst="rect">
+            <a:avLst/>
+          </a:prstGeom>
+          <a:solidFill>
+            <a:schemeClr val="bg1"/>
+          </a:solidFill>
+          <a:ln>
+            <a:noFill/>
+          </a:ln>
+        </p:spPr>
+        <p:style>
+          <a:lnRef idx="2">
+            <a:schemeClr val="accent1">
+              <a:shade val="15000"/>
+            </a:schemeClr>
+          </a:lnRef>
+          <a:fillRef idx="1">
+            <a:schemeClr val="accent1"/>
+          </a:fillRef>
+          <a:effectRef idx="0">
+            <a:schemeClr val="accent1"/>
+          </a:effectRef>
+          <a:fontRef idx="minor">
+            <a:schemeClr val="lt1"/>
+          </a:fontRef>
+        </p:style>
+        <p:txBody>
+          <a:bodyPr rtlCol="0" anchor="ctr"/>
+          <a:lstStyle/>
+          <a:p>
+            <a:pPr algn="ctr"/>
+            <a:r>
+              <a:rPr lang="ko-KR" altLang="en-US" dirty="0">
+                <a:solidFill>
+                  <a:schemeClr val="tx1"/>
+                </a:solidFill>
+              </a:rPr>
+              <a:t>수원시</a:t>
+            </a:r>
+            <a:endParaRPr lang="en-US" altLang="ko-KR" dirty="0">
+              <a:solidFill>
+                <a:schemeClr val="tx1"/>
+              </a:solidFill>
+            </a:endParaRPr>
+          </a:p>
+        </p:txBody>
+      </p:sp>
+      <p:sp>
+        <p:nvSpPr>
+          <p:cNvPr id="102" name="직사각형 101">
+            <a:extLst>
+              <a:ext uri="{FF2B5EF4-FFF2-40B4-BE49-F238E27FC236}">
+                <a16:creationId xmlns:a16="http://schemas.microsoft.com/office/drawing/2014/main" id="{13444BD4-AC52-4AD3-8F64-540370BF51CD}"/>
+              </a:ext>
+            </a:extLst>
+          </p:cNvPr>
+          <p:cNvSpPr/>
+          <p:nvPr/>
+        </p:nvSpPr>
+        <p:spPr>
+          <a:xfrm>
+            <a:off x="7236137" y="4187966"/>
+            <a:ext cx="311544" cy="914400"/>
+          </a:xfrm>
+          <a:prstGeom prst="rect">
+            <a:avLst/>
+          </a:prstGeom>
+          <a:solidFill>
+            <a:schemeClr val="bg1"/>
+          </a:solidFill>
+          <a:ln>
+            <a:noFill/>
+          </a:ln>
+        </p:spPr>
+        <p:style>
+          <a:lnRef idx="2">
+            <a:schemeClr val="accent1">
+              <a:shade val="15000"/>
+            </a:schemeClr>
+          </a:lnRef>
+          <a:fillRef idx="1">
+            <a:schemeClr val="accent1"/>
+          </a:fillRef>
+          <a:effectRef idx="0">
+            <a:schemeClr val="accent1"/>
+          </a:effectRef>
+          <a:fontRef idx="minor">
+            <a:schemeClr val="lt1"/>
+          </a:fontRef>
+        </p:style>
+        <p:txBody>
+          <a:bodyPr rtlCol="0" anchor="ctr"/>
+          <a:lstStyle/>
+          <a:p>
+            <a:pPr algn="ctr"/>
+            <a:r>
+              <a:rPr lang="ko-KR" altLang="en-US" dirty="0">
+                <a:solidFill>
+                  <a:schemeClr val="tx1"/>
+                </a:solidFill>
+              </a:rPr>
+              <a:t>성남시</a:t>
+            </a:r>
+            <a:endParaRPr lang="en-US" altLang="ko-KR" dirty="0">
+              <a:solidFill>
+                <a:schemeClr val="tx1"/>
+              </a:solidFill>
+            </a:endParaRPr>
+          </a:p>
+        </p:txBody>
+      </p:sp>
+      <p:sp>
+        <p:nvSpPr>
+          <p:cNvPr id="103" name="직사각형 102">
+            <a:extLst>
+              <a:ext uri="{FF2B5EF4-FFF2-40B4-BE49-F238E27FC236}">
+                <a16:creationId xmlns:a16="http://schemas.microsoft.com/office/drawing/2014/main" id="{4BE28E19-92F4-BDD8-0F8E-6BDB599C7C82}"/>
+              </a:ext>
+            </a:extLst>
+          </p:cNvPr>
+          <p:cNvSpPr/>
+          <p:nvPr/>
+        </p:nvSpPr>
+        <p:spPr>
+          <a:xfrm>
+            <a:off x="7596776" y="4187966"/>
+            <a:ext cx="311544" cy="914400"/>
+          </a:xfrm>
+          <a:prstGeom prst="rect">
+            <a:avLst/>
+          </a:prstGeom>
+          <a:solidFill>
+            <a:schemeClr val="bg1"/>
+          </a:solidFill>
+          <a:ln>
+            <a:noFill/>
+          </a:ln>
+        </p:spPr>
+        <p:style>
+          <a:lnRef idx="2">
+            <a:schemeClr val="accent1">
+              <a:shade val="15000"/>
+            </a:schemeClr>
+          </a:lnRef>
+          <a:fillRef idx="1">
+            <a:schemeClr val="accent1"/>
+          </a:fillRef>
+          <a:effectRef idx="0">
+            <a:schemeClr val="accent1"/>
+          </a:effectRef>
+          <a:fontRef idx="minor">
+            <a:schemeClr val="lt1"/>
+          </a:fontRef>
+        </p:style>
+        <p:txBody>
+          <a:bodyPr rtlCol="0" anchor="ctr"/>
+          <a:lstStyle/>
+          <a:p>
+            <a:pPr algn="ctr"/>
+            <a:r>
+              <a:rPr lang="ko-KR" altLang="en-US" dirty="0">
+                <a:solidFill>
+                  <a:schemeClr val="tx1"/>
+                </a:solidFill>
+              </a:rPr>
+              <a:t>부천시</a:t>
+            </a:r>
+            <a:endParaRPr lang="en-US" altLang="ko-KR" dirty="0">
+              <a:solidFill>
+                <a:schemeClr val="tx1"/>
+              </a:solidFill>
+            </a:endParaRPr>
+          </a:p>
+        </p:txBody>
+      </p:sp>
+      <p:sp>
+        <p:nvSpPr>
+          <p:cNvPr id="104" name="직사각형 103">
+            <a:extLst>
+              <a:ext uri="{FF2B5EF4-FFF2-40B4-BE49-F238E27FC236}">
+                <a16:creationId xmlns:a16="http://schemas.microsoft.com/office/drawing/2014/main" id="{E4739E44-1CCF-F568-3E22-30631D58F047}"/>
+              </a:ext>
+            </a:extLst>
+          </p:cNvPr>
+          <p:cNvSpPr/>
+          <p:nvPr/>
+        </p:nvSpPr>
+        <p:spPr>
+          <a:xfrm>
+            <a:off x="7957415" y="4187966"/>
+            <a:ext cx="311544" cy="914400"/>
+          </a:xfrm>
+          <a:prstGeom prst="rect">
+            <a:avLst/>
+          </a:prstGeom>
+          <a:solidFill>
+            <a:schemeClr val="bg1"/>
+          </a:solidFill>
+          <a:ln>
+            <a:noFill/>
+          </a:ln>
+        </p:spPr>
+        <p:style>
+          <a:lnRef idx="2">
+            <a:schemeClr val="accent1">
+              <a:shade val="15000"/>
+            </a:schemeClr>
+          </a:lnRef>
+          <a:fillRef idx="1">
+            <a:schemeClr val="accent1"/>
+          </a:fillRef>
+          <a:effectRef idx="0">
+            <a:schemeClr val="accent1"/>
+          </a:effectRef>
+          <a:fontRef idx="minor">
+            <a:schemeClr val="lt1"/>
+          </a:fontRef>
+        </p:style>
+        <p:txBody>
+          <a:bodyPr rtlCol="0" anchor="ctr"/>
+          <a:lstStyle/>
+          <a:p>
+            <a:pPr algn="ctr"/>
+            <a:r>
+              <a:rPr lang="ko-KR" altLang="en-US" dirty="0">
+                <a:solidFill>
+                  <a:schemeClr val="tx1"/>
+                </a:solidFill>
+              </a:rPr>
+              <a:t>하남시</a:t>
+            </a:r>
+            <a:endParaRPr lang="en-US" altLang="ko-KR" dirty="0">
+              <a:solidFill>
+                <a:schemeClr val="tx1"/>
+              </a:solidFill>
+            </a:endParaRPr>
+          </a:p>
+        </p:txBody>
+      </p:sp>
+      <p:sp>
+        <p:nvSpPr>
+          <p:cNvPr id="105" name="직사각형 104">
+            <a:extLst>
+              <a:ext uri="{FF2B5EF4-FFF2-40B4-BE49-F238E27FC236}">
+                <a16:creationId xmlns:a16="http://schemas.microsoft.com/office/drawing/2014/main" id="{D5A6FF08-CB06-A7A8-069B-B956D4EC8754}"/>
+              </a:ext>
+            </a:extLst>
+          </p:cNvPr>
+          <p:cNvSpPr/>
+          <p:nvPr/>
+        </p:nvSpPr>
+        <p:spPr>
+          <a:xfrm>
+            <a:off x="8318054" y="4187966"/>
+            <a:ext cx="311544" cy="914400"/>
+          </a:xfrm>
+          <a:prstGeom prst="rect">
+            <a:avLst/>
+          </a:prstGeom>
+          <a:solidFill>
+            <a:schemeClr val="bg1"/>
+          </a:solidFill>
+          <a:ln>
+            <a:noFill/>
+          </a:ln>
+        </p:spPr>
+        <p:style>
+          <a:lnRef idx="2">
+            <a:schemeClr val="accent1">
+              <a:shade val="15000"/>
+            </a:schemeClr>
+          </a:lnRef>
+          <a:fillRef idx="1">
+            <a:schemeClr val="accent1"/>
+          </a:fillRef>
+          <a:effectRef idx="0">
+            <a:schemeClr val="accent1"/>
+          </a:effectRef>
+          <a:fontRef idx="minor">
+            <a:schemeClr val="lt1"/>
+          </a:fontRef>
+        </p:style>
+        <p:txBody>
+          <a:bodyPr rtlCol="0" anchor="ctr"/>
+          <a:lstStyle/>
+          <a:p>
+            <a:pPr algn="ctr"/>
+            <a:r>
+              <a:rPr lang="ko-KR" altLang="en-US" dirty="0">
+                <a:solidFill>
+                  <a:schemeClr val="tx1"/>
+                </a:solidFill>
+              </a:rPr>
+              <a:t>의정부</a:t>
+            </a:r>
+            <a:endParaRPr lang="en-US" altLang="ko-KR" dirty="0">
+              <a:solidFill>
+                <a:schemeClr val="tx1"/>
+              </a:solidFill>
+            </a:endParaRPr>
+          </a:p>
+        </p:txBody>
+      </p:sp>
+      <p:sp>
+        <p:nvSpPr>
+          <p:cNvPr id="106" name="직사각형 105">
+            <a:extLst>
+              <a:ext uri="{FF2B5EF4-FFF2-40B4-BE49-F238E27FC236}">
+                <a16:creationId xmlns:a16="http://schemas.microsoft.com/office/drawing/2014/main" id="{5B741D28-6FDD-CBA8-08A1-E9E3A9C9E684}"/>
+              </a:ext>
+            </a:extLst>
+          </p:cNvPr>
+          <p:cNvSpPr/>
+          <p:nvPr/>
+        </p:nvSpPr>
+        <p:spPr>
+          <a:xfrm>
+            <a:off x="8678693" y="4187966"/>
+            <a:ext cx="311544" cy="914400"/>
+          </a:xfrm>
+          <a:prstGeom prst="rect">
+            <a:avLst/>
+          </a:prstGeom>
+          <a:solidFill>
+            <a:schemeClr val="bg1"/>
+          </a:solidFill>
+          <a:ln>
+            <a:noFill/>
+          </a:ln>
+        </p:spPr>
+        <p:style>
+          <a:lnRef idx="2">
+            <a:schemeClr val="accent1">
+              <a:shade val="15000"/>
+            </a:schemeClr>
+          </a:lnRef>
+          <a:fillRef idx="1">
+            <a:schemeClr val="accent1"/>
+          </a:fillRef>
+          <a:effectRef idx="0">
+            <a:schemeClr val="accent1"/>
+          </a:effectRef>
+          <a:fontRef idx="minor">
+            <a:schemeClr val="lt1"/>
+          </a:fontRef>
+        </p:style>
+        <p:txBody>
+          <a:bodyPr rtlCol="0" anchor="ctr"/>
+          <a:lstStyle/>
+          <a:p>
+            <a:pPr algn="ctr"/>
+            <a:r>
+              <a:rPr lang="ko-KR" altLang="en-US" dirty="0">
+                <a:solidFill>
+                  <a:schemeClr val="tx1"/>
+                </a:solidFill>
+              </a:rPr>
+              <a:t>안양시</a:t>
+            </a:r>
+            <a:endParaRPr lang="en-US" altLang="ko-KR" dirty="0">
+              <a:solidFill>
+                <a:schemeClr val="tx1"/>
+              </a:solidFill>
+            </a:endParaRPr>
+          </a:p>
+        </p:txBody>
+      </p:sp>
+      <p:sp>
+        <p:nvSpPr>
+          <p:cNvPr id="107" name="직사각형 106">
+            <a:extLst>
+              <a:ext uri="{FF2B5EF4-FFF2-40B4-BE49-F238E27FC236}">
+                <a16:creationId xmlns:a16="http://schemas.microsoft.com/office/drawing/2014/main" id="{5A1818BB-C983-F345-2CE1-EA7C5CE4A6A9}"/>
+              </a:ext>
+            </a:extLst>
+          </p:cNvPr>
+          <p:cNvSpPr/>
+          <p:nvPr/>
+        </p:nvSpPr>
+        <p:spPr>
+          <a:xfrm>
+            <a:off x="9039332" y="4187966"/>
+            <a:ext cx="311544" cy="914400"/>
+          </a:xfrm>
+          <a:prstGeom prst="rect">
+            <a:avLst/>
+          </a:prstGeom>
+          <a:solidFill>
+            <a:schemeClr val="bg1"/>
+          </a:solidFill>
+          <a:ln>
+            <a:noFill/>
+          </a:ln>
+        </p:spPr>
+        <p:style>
+          <a:lnRef idx="2">
+            <a:schemeClr val="accent1">
+              <a:shade val="15000"/>
+            </a:schemeClr>
+          </a:lnRef>
+          <a:fillRef idx="1">
+            <a:schemeClr val="accent1"/>
+          </a:fillRef>
+          <a:effectRef idx="0">
+            <a:schemeClr val="accent1"/>
+          </a:effectRef>
+          <a:fontRef idx="minor">
+            <a:schemeClr val="lt1"/>
+          </a:fontRef>
+        </p:style>
+        <p:txBody>
+          <a:bodyPr rtlCol="0" anchor="ctr"/>
+          <a:lstStyle/>
+          <a:p>
+            <a:pPr algn="ctr"/>
+            <a:r>
+              <a:rPr lang="ko-KR" altLang="en-US" dirty="0">
+                <a:solidFill>
+                  <a:schemeClr val="tx1"/>
+                </a:solidFill>
+              </a:rPr>
+              <a:t>동두천</a:t>
+            </a:r>
+            <a:endParaRPr lang="en-US" altLang="ko-KR" dirty="0">
+              <a:solidFill>
+                <a:schemeClr val="tx1"/>
+              </a:solidFill>
+            </a:endParaRPr>
+          </a:p>
+        </p:txBody>
+      </p:sp>
+      <p:sp>
+        <p:nvSpPr>
+          <p:cNvPr id="108" name="직사각형 107">
+            <a:extLst>
+              <a:ext uri="{FF2B5EF4-FFF2-40B4-BE49-F238E27FC236}">
+                <a16:creationId xmlns:a16="http://schemas.microsoft.com/office/drawing/2014/main" id="{B34A250D-8FBE-3DBA-C97B-0672290B591A}"/>
+              </a:ext>
+            </a:extLst>
+          </p:cNvPr>
+          <p:cNvSpPr/>
+          <p:nvPr/>
+        </p:nvSpPr>
+        <p:spPr>
+          <a:xfrm>
+            <a:off x="9399971" y="4187966"/>
+            <a:ext cx="311544" cy="914400"/>
+          </a:xfrm>
+          <a:prstGeom prst="rect">
+            <a:avLst/>
+          </a:prstGeom>
+          <a:solidFill>
+            <a:schemeClr val="bg1"/>
+          </a:solidFill>
+          <a:ln>
+            <a:noFill/>
+          </a:ln>
+        </p:spPr>
+        <p:style>
+          <a:lnRef idx="2">
+            <a:schemeClr val="accent1">
+              <a:shade val="15000"/>
+            </a:schemeClr>
+          </a:lnRef>
+          <a:fillRef idx="1">
+            <a:schemeClr val="accent1"/>
+          </a:fillRef>
+          <a:effectRef idx="0">
+            <a:schemeClr val="accent1"/>
+          </a:effectRef>
+          <a:fontRef idx="minor">
+            <a:schemeClr val="lt1"/>
+          </a:fontRef>
+        </p:style>
+        <p:txBody>
+          <a:bodyPr rtlCol="0" anchor="ctr"/>
+          <a:lstStyle/>
+          <a:p>
+            <a:pPr algn="ctr"/>
+            <a:r>
+              <a:rPr lang="ko-KR" altLang="en-US" dirty="0">
+                <a:solidFill>
+                  <a:schemeClr val="tx1"/>
+                </a:solidFill>
+              </a:rPr>
+              <a:t>의왕시</a:t>
+            </a:r>
+            <a:endParaRPr lang="en-US" altLang="ko-KR" dirty="0">
+              <a:solidFill>
+                <a:schemeClr val="tx1"/>
+              </a:solidFill>
+            </a:endParaRPr>
+          </a:p>
+        </p:txBody>
+      </p:sp>
+      <p:sp>
+        <p:nvSpPr>
+          <p:cNvPr id="109" name="직사각형 108">
+            <a:extLst>
+              <a:ext uri="{FF2B5EF4-FFF2-40B4-BE49-F238E27FC236}">
+                <a16:creationId xmlns:a16="http://schemas.microsoft.com/office/drawing/2014/main" id="{0D1D00E9-0513-79CC-D3FE-43A931B68C19}"/>
+              </a:ext>
+            </a:extLst>
+          </p:cNvPr>
+          <p:cNvSpPr/>
+          <p:nvPr/>
+        </p:nvSpPr>
+        <p:spPr>
+          <a:xfrm>
+            <a:off x="9760610" y="4187966"/>
+            <a:ext cx="311544" cy="914400"/>
+          </a:xfrm>
+          <a:prstGeom prst="rect">
+            <a:avLst/>
+          </a:prstGeom>
+          <a:solidFill>
+            <a:schemeClr val="bg1"/>
+          </a:solidFill>
+          <a:ln>
+            <a:noFill/>
+          </a:ln>
+        </p:spPr>
+        <p:style>
+          <a:lnRef idx="2">
+            <a:schemeClr val="accent1">
+              <a:shade val="15000"/>
+            </a:schemeClr>
+          </a:lnRef>
+          <a:fillRef idx="1">
+            <a:schemeClr val="accent1"/>
+          </a:fillRef>
+          <a:effectRef idx="0">
+            <a:schemeClr val="accent1"/>
+          </a:effectRef>
+          <a:fontRef idx="minor">
+            <a:schemeClr val="lt1"/>
+          </a:fontRef>
+        </p:style>
+        <p:txBody>
+          <a:bodyPr rtlCol="0" anchor="ctr"/>
+          <a:lstStyle/>
+          <a:p>
+            <a:pPr algn="ctr"/>
+            <a:r>
+              <a:rPr lang="ko-KR" altLang="en-US" dirty="0">
+                <a:solidFill>
+                  <a:schemeClr val="tx1"/>
+                </a:solidFill>
+              </a:rPr>
+              <a:t>오산시</a:t>
+            </a:r>
+            <a:endParaRPr lang="en-US" altLang="ko-KR" dirty="0">
+              <a:solidFill>
+                <a:schemeClr val="tx1"/>
+              </a:solidFill>
+            </a:endParaRPr>
+          </a:p>
+        </p:txBody>
+      </p:sp>
+      <p:sp>
+        <p:nvSpPr>
+          <p:cNvPr id="110" name="직사각형 109">
+            <a:extLst>
+              <a:ext uri="{FF2B5EF4-FFF2-40B4-BE49-F238E27FC236}">
+                <a16:creationId xmlns:a16="http://schemas.microsoft.com/office/drawing/2014/main" id="{81D2B2DC-C89F-6589-BB8C-268DE88B3341}"/>
+              </a:ext>
+            </a:extLst>
+          </p:cNvPr>
+          <p:cNvSpPr/>
+          <p:nvPr/>
+        </p:nvSpPr>
+        <p:spPr>
+          <a:xfrm>
+            <a:off x="10121249" y="4187966"/>
+            <a:ext cx="311544" cy="914400"/>
+          </a:xfrm>
+          <a:prstGeom prst="rect">
+            <a:avLst/>
+          </a:prstGeom>
+          <a:solidFill>
+            <a:schemeClr val="bg1"/>
+          </a:solidFill>
+          <a:ln>
+            <a:noFill/>
+          </a:ln>
+        </p:spPr>
+        <p:style>
+          <a:lnRef idx="2">
+            <a:schemeClr val="accent1">
+              <a:shade val="15000"/>
+            </a:schemeClr>
+          </a:lnRef>
+          <a:fillRef idx="1">
+            <a:schemeClr val="accent1"/>
+          </a:fillRef>
+          <a:effectRef idx="0">
+            <a:schemeClr val="accent1"/>
+          </a:effectRef>
+          <a:fontRef idx="minor">
+            <a:schemeClr val="lt1"/>
+          </a:fontRef>
+        </p:style>
+        <p:txBody>
+          <a:bodyPr rtlCol="0" anchor="ctr"/>
+          <a:lstStyle/>
+          <a:p>
+            <a:pPr algn="ctr"/>
+            <a:r>
+              <a:rPr lang="ko-KR" altLang="en-US" dirty="0">
+                <a:solidFill>
+                  <a:schemeClr val="tx1"/>
+                </a:solidFill>
+              </a:rPr>
+              <a:t>군포시</a:t>
+            </a:r>
+            <a:endParaRPr lang="en-US" altLang="ko-KR" dirty="0">
+              <a:solidFill>
+                <a:schemeClr val="tx1"/>
+              </a:solidFill>
+            </a:endParaRPr>
+          </a:p>
+        </p:txBody>
+      </p:sp>
+      <p:sp>
+        <p:nvSpPr>
+          <p:cNvPr id="111" name="직사각형 110">
+            <a:extLst>
+              <a:ext uri="{FF2B5EF4-FFF2-40B4-BE49-F238E27FC236}">
+                <a16:creationId xmlns:a16="http://schemas.microsoft.com/office/drawing/2014/main" id="{F21F4658-0F85-F4A8-562C-043C69C298FE}"/>
+              </a:ext>
+            </a:extLst>
+          </p:cNvPr>
+          <p:cNvSpPr/>
+          <p:nvPr/>
+        </p:nvSpPr>
+        <p:spPr>
+          <a:xfrm>
+            <a:off x="10481888" y="4187966"/>
+            <a:ext cx="311544" cy="914400"/>
+          </a:xfrm>
+          <a:prstGeom prst="rect">
+            <a:avLst/>
+          </a:prstGeom>
+          <a:solidFill>
+            <a:schemeClr val="bg1"/>
+          </a:solidFill>
+          <a:ln>
+            <a:noFill/>
+          </a:ln>
+        </p:spPr>
+        <p:style>
+          <a:lnRef idx="2">
+            <a:schemeClr val="accent1">
+              <a:shade val="15000"/>
+            </a:schemeClr>
+          </a:lnRef>
+          <a:fillRef idx="1">
+            <a:schemeClr val="accent1"/>
+          </a:fillRef>
+          <a:effectRef idx="0">
+            <a:schemeClr val="accent1"/>
+          </a:effectRef>
+          <a:fontRef idx="minor">
+            <a:schemeClr val="lt1"/>
+          </a:fontRef>
+        </p:style>
+        <p:txBody>
+          <a:bodyPr rtlCol="0" anchor="ctr"/>
+          <a:lstStyle/>
+          <a:p>
+            <a:pPr algn="ctr"/>
+            <a:r>
+              <a:rPr lang="ko-KR" altLang="en-US" dirty="0">
+                <a:solidFill>
+                  <a:schemeClr val="tx1"/>
+                </a:solidFill>
+              </a:rPr>
+              <a:t>광명시</a:t>
+            </a:r>
+            <a:endParaRPr lang="en-US" altLang="ko-KR" dirty="0">
+              <a:solidFill>
+                <a:schemeClr val="tx1"/>
+              </a:solidFill>
+            </a:endParaRPr>
+          </a:p>
+        </p:txBody>
+      </p:sp>
+      <p:sp>
+        <p:nvSpPr>
+          <p:cNvPr id="112" name="직사각형 111">
+            <a:extLst>
+              <a:ext uri="{FF2B5EF4-FFF2-40B4-BE49-F238E27FC236}">
+                <a16:creationId xmlns:a16="http://schemas.microsoft.com/office/drawing/2014/main" id="{6BCBF12A-C7BD-AE3F-052A-C92B93E98CAA}"/>
+              </a:ext>
+            </a:extLst>
+          </p:cNvPr>
+          <p:cNvSpPr/>
+          <p:nvPr/>
+        </p:nvSpPr>
+        <p:spPr>
+          <a:xfrm>
+            <a:off x="10842527" y="4187966"/>
+            <a:ext cx="311544" cy="914400"/>
+          </a:xfrm>
+          <a:prstGeom prst="rect">
+            <a:avLst/>
+          </a:prstGeom>
+          <a:solidFill>
+            <a:schemeClr val="bg1"/>
+          </a:solidFill>
+          <a:ln>
+            <a:noFill/>
+          </a:ln>
+        </p:spPr>
+        <p:style>
+          <a:lnRef idx="2">
+            <a:schemeClr val="accent1">
+              <a:shade val="15000"/>
+            </a:schemeClr>
+          </a:lnRef>
+          <a:fillRef idx="1">
+            <a:schemeClr val="accent1"/>
+          </a:fillRef>
+          <a:effectRef idx="0">
+            <a:schemeClr val="accent1"/>
+          </a:effectRef>
+          <a:fontRef idx="minor">
+            <a:schemeClr val="lt1"/>
+          </a:fontRef>
+        </p:style>
+        <p:txBody>
+          <a:bodyPr rtlCol="0" anchor="ctr"/>
+          <a:lstStyle/>
+          <a:p>
+            <a:pPr algn="ctr"/>
+            <a:r>
+              <a:rPr lang="ko-KR" altLang="en-US" dirty="0">
+                <a:solidFill>
+                  <a:schemeClr val="tx1"/>
+                </a:solidFill>
+              </a:rPr>
+              <a:t>구리시</a:t>
+            </a:r>
+            <a:endParaRPr lang="en-US" altLang="ko-KR" dirty="0">
+              <a:solidFill>
+                <a:schemeClr val="tx1"/>
+              </a:solidFill>
+            </a:endParaRPr>
+          </a:p>
+        </p:txBody>
+      </p:sp>
+      <p:sp>
+        <p:nvSpPr>
+          <p:cNvPr id="113" name="직사각형 112">
+            <a:extLst>
+              <a:ext uri="{FF2B5EF4-FFF2-40B4-BE49-F238E27FC236}">
+                <a16:creationId xmlns:a16="http://schemas.microsoft.com/office/drawing/2014/main" id="{1E646AAE-36D1-1CB0-0E10-5C24C49AFA35}"/>
+              </a:ext>
+            </a:extLst>
+          </p:cNvPr>
+          <p:cNvSpPr/>
+          <p:nvPr/>
+        </p:nvSpPr>
+        <p:spPr>
+          <a:xfrm>
+            <a:off x="11203166" y="4187966"/>
+            <a:ext cx="311544" cy="914400"/>
+          </a:xfrm>
+          <a:prstGeom prst="rect">
+            <a:avLst/>
+          </a:prstGeom>
+          <a:solidFill>
+            <a:schemeClr val="bg1"/>
+          </a:solidFill>
+          <a:ln>
+            <a:noFill/>
+          </a:ln>
+        </p:spPr>
+        <p:style>
+          <a:lnRef idx="2">
+            <a:schemeClr val="accent1">
+              <a:shade val="15000"/>
+            </a:schemeClr>
+          </a:lnRef>
+          <a:fillRef idx="1">
+            <a:schemeClr val="accent1"/>
+          </a:fillRef>
+          <a:effectRef idx="0">
+            <a:schemeClr val="accent1"/>
+          </a:effectRef>
+          <a:fontRef idx="minor">
+            <a:schemeClr val="lt1"/>
+          </a:fontRef>
+        </p:style>
+        <p:txBody>
+          <a:bodyPr rtlCol="0" anchor="ctr"/>
+          <a:lstStyle/>
+          <a:p>
+            <a:pPr algn="ctr"/>
+            <a:r>
+              <a:rPr lang="ko-KR" altLang="en-US" dirty="0">
+                <a:solidFill>
+                  <a:schemeClr val="tx1"/>
+                </a:solidFill>
+              </a:rPr>
+              <a:t>과천시</a:t>
+            </a:r>
+            <a:endParaRPr lang="en-US" altLang="ko-KR" dirty="0">
+              <a:solidFill>
+                <a:schemeClr val="tx1"/>
+              </a:solidFill>
+            </a:endParaRPr>
+          </a:p>
+        </p:txBody>
+      </p:sp>
+      <p:sp>
+        <p:nvSpPr>
+          <p:cNvPr id="114" name="직사각형 113">
+            <a:extLst>
+              <a:ext uri="{FF2B5EF4-FFF2-40B4-BE49-F238E27FC236}">
+                <a16:creationId xmlns:a16="http://schemas.microsoft.com/office/drawing/2014/main" id="{91292EE3-60F8-A38D-98E7-E3BD9CB30125}"/>
+              </a:ext>
+            </a:extLst>
+          </p:cNvPr>
+          <p:cNvSpPr/>
+          <p:nvPr/>
+        </p:nvSpPr>
+        <p:spPr>
+          <a:xfrm>
+            <a:off x="11563813" y="4187966"/>
+            <a:ext cx="311544" cy="914400"/>
+          </a:xfrm>
+          <a:prstGeom prst="rect">
+            <a:avLst/>
+          </a:prstGeom>
+          <a:solidFill>
+            <a:schemeClr val="bg1"/>
+          </a:solidFill>
+          <a:ln>
+            <a:noFill/>
+          </a:ln>
+        </p:spPr>
+        <p:style>
+          <a:lnRef idx="2">
+            <a:schemeClr val="accent1">
+              <a:shade val="15000"/>
+            </a:schemeClr>
+          </a:lnRef>
+          <a:fillRef idx="1">
+            <a:schemeClr val="accent1"/>
+          </a:fillRef>
+          <a:effectRef idx="0">
+            <a:schemeClr val="accent1"/>
+          </a:effectRef>
+          <a:fontRef idx="minor">
+            <a:schemeClr val="lt1"/>
+          </a:fontRef>
+        </p:style>
+        <p:txBody>
+          <a:bodyPr rtlCol="0" anchor="ctr"/>
+          <a:lstStyle/>
+          <a:p>
+            <a:pPr algn="ctr"/>
+            <a:r>
+              <a:rPr lang="ko-KR" altLang="en-US" dirty="0">
+                <a:solidFill>
+                  <a:schemeClr val="tx1"/>
+                </a:solidFill>
+              </a:rPr>
+              <a:t>광주시</a:t>
+            </a:r>
+            <a:endParaRPr lang="en-US" altLang="ko-KR" dirty="0">
+              <a:solidFill>
+                <a:schemeClr val="tx1"/>
+              </a:solidFill>
+            </a:endParaRPr>
+          </a:p>
+        </p:txBody>
+      </p:sp>
+      <p:pic>
+        <p:nvPicPr>
+          <p:cNvPr id="115" name="그림 114">
+            <a:extLst>
+              <a:ext uri="{FF2B5EF4-FFF2-40B4-BE49-F238E27FC236}">
+                <a16:creationId xmlns:a16="http://schemas.microsoft.com/office/drawing/2014/main" id="{0867E830-5170-84D6-EBE7-8F882AFA9CE8}"/>
+              </a:ext>
+            </a:extLst>
+          </p:cNvPr>
+          <p:cNvPicPr>
+            <a:picLocks noChangeAspect="1"/>
+          </p:cNvPicPr>
+          <p:nvPr/>
+        </p:nvPicPr>
+        <p:blipFill>
+          <a:blip r:embed="rId6"/>
+          <a:srcRect b="57551"/>
+          <a:stretch>
+            <a:fillRect/>
+          </a:stretch>
+        </p:blipFill>
+        <p:spPr>
+          <a:xfrm rot="16200000">
+            <a:off x="3878883" y="723941"/>
+            <a:ext cx="293928" cy="1008442"/>
           </a:xfrm>
           <a:prstGeom prst="rect">
             <a:avLst/>
